--- a/CWSI_v2_기술이관_대동양식.pptx
+++ b/CWSI_v2_기술이관_대동양식.pptx
@@ -4,26 +4,29 @@
   <p:sldMasterIdLst>
     <p:sldMasterId id="2147483648" r:id="rId1"/>
   </p:sldMasterIdLst>
+  <p:notesMasterIdLst>
+    <p:notesMasterId r:id="rId19"/>
+  </p:notesMasterIdLst>
   <p:sldIdLst>
-    <p:sldId id="256" r:id="rId7"/>
-    <p:sldId id="257" r:id="rId9"/>
-    <p:sldId id="258" r:id="rId10"/>
-    <p:sldId id="259" r:id="rId11"/>
-    <p:sldId id="260" r:id="rId12"/>
-    <p:sldId id="261" r:id="rId13"/>
-    <p:sldId id="262" r:id="rId14"/>
-    <p:sldId id="263" r:id="rId15"/>
-    <p:sldId id="264" r:id="rId16"/>
-    <p:sldId id="265" r:id="rId17"/>
-    <p:sldId id="266" r:id="rId18"/>
-    <p:sldId id="267" r:id="rId19"/>
-    <p:sldId id="268" r:id="rId20"/>
-    <p:sldId id="269" r:id="rId21"/>
-    <p:sldId id="270" r:id="rId22"/>
-    <p:sldId id="271" r:id="rId23"/>
-    <p:sldId id="272" r:id="rId24"/>
+    <p:sldId id="256" r:id="rId2"/>
+    <p:sldId id="257" r:id="rId3"/>
+    <p:sldId id="258" r:id="rId4"/>
+    <p:sldId id="259" r:id="rId5"/>
+    <p:sldId id="260" r:id="rId6"/>
+    <p:sldId id="261" r:id="rId7"/>
+    <p:sldId id="262" r:id="rId8"/>
+    <p:sldId id="263" r:id="rId9"/>
+    <p:sldId id="264" r:id="rId10"/>
+    <p:sldId id="265" r:id="rId11"/>
+    <p:sldId id="266" r:id="rId12"/>
+    <p:sldId id="267" r:id="rId13"/>
+    <p:sldId id="268" r:id="rId14"/>
+    <p:sldId id="269" r:id="rId15"/>
+    <p:sldId id="270" r:id="rId16"/>
+    <p:sldId id="271" r:id="rId17"/>
+    <p:sldId id="272" r:id="rId18"/>
   </p:sldIdLst>
-  <p:sldSz cx="9905695" cy="6858000" type="screen4x3"/>
+  <p:sldSz cx="9906000" cy="6858000" type="A4"/>
   <p:notesSz cx="6858000" cy="9144000"/>
   <p:defaultTextStyle>
     <a:defPPr>
@@ -120,18 +123,39 @@
       </a:defRPr>
     </a:lvl9pPr>
   </p:defaultTextStyle>
+  <p:extLst>
+    <p:ext uri="{EFAFB233-063F-42B5-8137-9DF3F51BA10A}">
+      <p15:sldGuideLst xmlns:p15="http://schemas.microsoft.com/office/powerpoint/2012/main">
+        <p15:guide id="1" orient="horz" pos="2160">
+          <p15:clr>
+            <a:srgbClr val="A4A3A4"/>
+          </p15:clr>
+        </p15:guide>
+        <p15:guide id="2" pos="2880">
+          <p15:clr>
+            <a:srgbClr val="A4A3A4"/>
+          </p15:clr>
+        </p15:guide>
+      </p15:sldGuideLst>
+    </p:ext>
+  </p:extLst>
 </p:presentation>
 </file>
 
 <file path=ppt/charts/chart1.xml><?xml version="1.0" encoding="utf-8"?>
-<c:chartSpace xmlns:c="http://schemas.openxmlformats.org/drawingml/2006/chart" xmlns:a="http://schemas.openxmlformats.org/drawingml/2006/main" xmlns:r="http://schemas.openxmlformats.org/officeDocument/2006/relationships">
+<c:chartSpace xmlns:c="http://schemas.openxmlformats.org/drawingml/2006/chart" xmlns:a="http://schemas.openxmlformats.org/drawingml/2006/main" xmlns:r="http://schemas.openxmlformats.org/officeDocument/2006/relationships" xmlns:c16r2="http://schemas.microsoft.com/office/drawing/2015/06/chart">
   <c:date1904 val="0"/>
+  <c:lang val="ko-KR"/>
+  <c:roundedCorners val="1"/>
+  <c:style val="2"/>
   <c:chart>
     <c:autoTitleDeleted val="1"/>
     <c:plotArea>
+      <c:layout/>
       <c:barChart>
         <c:barDir val="col"/>
         <c:grouping val="clustered"/>
+        <c:varyColors val="1"/>
         <c:ser>
           <c:idx val="0"/>
           <c:order val="0"/>
@@ -151,6 +175,42 @@
               <a:srgbClr val="BFBFBF"/>
             </a:solidFill>
           </c:spPr>
+          <c:invertIfNegative val="1"/>
+          <c:dLbls>
+            <c:numFmt formatCode="0.00" sourceLinked="0"/>
+            <c:spPr>
+              <a:noFill/>
+              <a:ln>
+                <a:noFill/>
+              </a:ln>
+              <a:effectLst/>
+            </c:spPr>
+            <c:txPr>
+              <a:bodyPr/>
+              <a:lstStyle/>
+              <a:p>
+                <a:pPr>
+                  <a:defRPr sz="900">
+                    <a:latin typeface="Malgun Gothic"/>
+                  </a:defRPr>
+                </a:pPr>
+                <a:endParaRPr lang="ko-KR"/>
+              </a:p>
+            </c:txPr>
+            <c:dLblPos val="outEnd"/>
+            <c:showLegendKey val="0"/>
+            <c:showVal val="1"/>
+            <c:showCatName val="0"/>
+            <c:showSerName val="0"/>
+            <c:showPercent val="0"/>
+            <c:showBubbleSize val="0"/>
+            <c:showLeaderLines val="0"/>
+            <c:extLst>
+              <c:ext xmlns:c15="http://schemas.microsoft.com/office/drawing/2012/chart" uri="{CE6537A1-D6FC-4f65-9D91-7224C49458BB}">
+                <c15:showLeaderLines val="0"/>
+              </c:ext>
+            </c:extLst>
+          </c:dLbls>
           <c:cat>
             <c:strRef>
               <c:f>Sheet1!$A$2:$A$5</c:f>
@@ -187,11 +247,25 @@
                   <c:v>0.115</c:v>
                 </c:pt>
                 <c:pt idx="3">
-                  <c:v>0.407</c:v>
+                  <c:v>0.40699999999999997</c:v>
                 </c:pt>
               </c:numCache>
             </c:numRef>
           </c:val>
+          <c:extLst>
+            <c:ext xmlns:c14="http://schemas.microsoft.com/office/drawing/2007/8/2/chart" uri="{6F2FDCE9-48DA-4B69-8628-5D25D57E5C99}">
+              <c14:invertSolidFillFmt>
+                <c14:spPr xmlns:c14="http://schemas.microsoft.com/office/drawing/2007/8/2/chart">
+                  <a:solidFill>
+                    <a:srgbClr val="FFFFFF"/>
+                  </a:solidFill>
+                </c14:spPr>
+              </c14:invertSolidFillFmt>
+            </c:ext>
+            <c:ext xmlns:c16="http://schemas.microsoft.com/office/drawing/2014/chart" uri="{C3380CC4-5D6E-409C-BE32-E72D297353CC}">
+              <c16:uniqueId val="{00000000-EB7A-49ED-98BC-67320AB46D14}"/>
+            </c:ext>
+          </c:extLst>
         </c:ser>
         <c:ser>
           <c:idx val="1"/>
@@ -212,6 +286,42 @@
               <a:srgbClr val="002060"/>
             </a:solidFill>
           </c:spPr>
+          <c:invertIfNegative val="1"/>
+          <c:dLbls>
+            <c:numFmt formatCode="0.00" sourceLinked="0"/>
+            <c:spPr>
+              <a:noFill/>
+              <a:ln>
+                <a:noFill/>
+              </a:ln>
+              <a:effectLst/>
+            </c:spPr>
+            <c:txPr>
+              <a:bodyPr/>
+              <a:lstStyle/>
+              <a:p>
+                <a:pPr>
+                  <a:defRPr sz="900">
+                    <a:latin typeface="Malgun Gothic"/>
+                  </a:defRPr>
+                </a:pPr>
+                <a:endParaRPr lang="ko-KR"/>
+              </a:p>
+            </c:txPr>
+            <c:dLblPos val="outEnd"/>
+            <c:showLegendKey val="0"/>
+            <c:showVal val="1"/>
+            <c:showCatName val="0"/>
+            <c:showSerName val="0"/>
+            <c:showPercent val="0"/>
+            <c:showBubbleSize val="0"/>
+            <c:showLeaderLines val="0"/>
+            <c:extLst>
+              <c:ext xmlns:c15="http://schemas.microsoft.com/office/drawing/2012/chart" uri="{CE6537A1-D6FC-4f65-9D91-7224C49458BB}">
+                <c15:showLeaderLines val="0"/>
+              </c:ext>
+            </c:extLst>
+          </c:dLbls>
           <c:cat>
             <c:strRef>
               <c:f>Sheet1!$A$2:$A$5</c:f>
@@ -239,13 +349,13 @@
                 <c:formatCode>General</c:formatCode>
                 <c:ptCount val="4"/>
                 <c:pt idx="0">
-                  <c:v>0.278</c:v>
+                  <c:v>0.27800000000000002</c:v>
                 </c:pt>
                 <c:pt idx="1">
                   <c:v>0.374</c:v>
                 </c:pt>
                 <c:pt idx="2">
-                  <c:v>0.472</c:v>
+                  <c:v>0.47199999999999998</c:v>
                 </c:pt>
                 <c:pt idx="3">
                   <c:v>0.52</c:v>
@@ -253,20 +363,22 @@
               </c:numCache>
             </c:numRef>
           </c:val>
+          <c:extLst>
+            <c:ext xmlns:c14="http://schemas.microsoft.com/office/drawing/2007/8/2/chart" uri="{6F2FDCE9-48DA-4B69-8628-5D25D57E5C99}">
+              <c14:invertSolidFillFmt>
+                <c14:spPr xmlns:c14="http://schemas.microsoft.com/office/drawing/2007/8/2/chart">
+                  <a:solidFill>
+                    <a:srgbClr val="FFFFFF"/>
+                  </a:solidFill>
+                </c14:spPr>
+              </c14:invertSolidFillFmt>
+            </c:ext>
+            <c:ext xmlns:c16="http://schemas.microsoft.com/office/drawing/2014/chart" uri="{C3380CC4-5D6E-409C-BE32-E72D297353CC}">
+              <c16:uniqueId val="{00000001-EB7A-49ED-98BC-67320AB46D14}"/>
+            </c:ext>
+          </c:extLst>
         </c:ser>
         <c:dLbls>
-          <c:numFmt formatCode="0.00" sourceLinked="0"/>
-          <c:txPr>
-            <a:bodyPr/>
-            <a:lstStyle/>
-            <a:p>
-              <a:pPr>
-                <a:defRPr sz="900">
-                  <a:latin typeface="Malgun Gothic"/>
-                </a:defRPr>
-              </a:pPr>
-            </a:p>
-          </c:txPr>
           <c:dLblPos val="outEnd"/>
           <c:showLegendKey val="0"/>
           <c:showVal val="1"/>
@@ -274,7 +386,6 @@
           <c:showSerName val="0"/>
           <c:showPercent val="0"/>
           <c:showBubbleSize val="0"/>
-          <c:showLeaderLines val="1"/>
         </c:dLbls>
         <c:gapWidth val="80"/>
         <c:axId val="-2068027336"/>
@@ -287,6 +398,7 @@
         </c:scaling>
         <c:delete val="0"/>
         <c:axPos val="b"/>
+        <c:numFmt formatCode="General" sourceLinked="0"/>
         <c:majorTickMark val="out"/>
         <c:minorTickMark val="none"/>
         <c:tickLblPos val="nextTo"/>
@@ -299,6 +411,7 @@
                 <a:latin typeface="Malgun Gothic"/>
               </a:defRPr>
             </a:pPr>
+            <a:endParaRPr lang="ko-KR"/>
           </a:p>
         </c:txPr>
         <c:crossAx val="-2113994440"/>
@@ -311,11 +424,13 @@
       <c:valAx>
         <c:axId val="-2113994440"/>
         <c:scaling>
+          <c:orientation val="minMax"/>
           <c:max val="0.6"/>
         </c:scaling>
         <c:delete val="0"/>
         <c:axPos val="l"/>
         <c:majorGridlines/>
+        <c:numFmt formatCode="General" sourceLinked="1"/>
         <c:majorTickMark val="out"/>
         <c:minorTickMark val="none"/>
         <c:tickLblPos val="nextTo"/>
@@ -328,10 +443,12 @@
                 <a:latin typeface="Malgun Gothic"/>
               </a:defRPr>
             </a:pPr>
+            <a:endParaRPr lang="ko-KR"/>
           </a:p>
         </c:txPr>
         <c:crossAx val="-2068027336"/>
         <c:crosses val="autoZero"/>
+        <c:crossBetween val="between"/>
         <c:majorUnit val="0.2"/>
       </c:valAx>
     </c:plotArea>
@@ -347,10 +464,13 @@
               <a:latin typeface="Malgun Gothic"/>
             </a:defRPr>
           </a:pPr>
+          <a:endParaRPr lang="ko-KR"/>
         </a:p>
       </c:txPr>
     </c:legend>
+    <c:plotVisOnly val="1"/>
     <c:dispBlanksAs val="gap"/>
+    <c:showDLblsOverMax val="1"/>
   </c:chart>
   <c:txPr>
     <a:bodyPr/>
@@ -369,14 +489,19 @@
 </file>
 
 <file path=ppt/charts/chart2.xml><?xml version="1.0" encoding="utf-8"?>
-<c:chartSpace xmlns:c="http://schemas.openxmlformats.org/drawingml/2006/chart" xmlns:a="http://schemas.openxmlformats.org/drawingml/2006/main" xmlns:r="http://schemas.openxmlformats.org/officeDocument/2006/relationships">
+<c:chartSpace xmlns:c="http://schemas.openxmlformats.org/drawingml/2006/chart" xmlns:a="http://schemas.openxmlformats.org/drawingml/2006/main" xmlns:r="http://schemas.openxmlformats.org/officeDocument/2006/relationships" xmlns:c16r2="http://schemas.microsoft.com/office/drawing/2015/06/chart">
   <c:date1904 val="0"/>
+  <c:lang val="ko-KR"/>
+  <c:roundedCorners val="1"/>
+  <c:style val="2"/>
   <c:chart>
     <c:autoTitleDeleted val="1"/>
     <c:plotArea>
+      <c:layout/>
       <c:barChart>
         <c:barDir val="col"/>
         <c:grouping val="clustered"/>
+        <c:varyColors val="1"/>
         <c:ser>
           <c:idx val="0"/>
           <c:order val="0"/>
@@ -396,6 +521,42 @@
               <a:srgbClr val="002060"/>
             </a:solidFill>
           </c:spPr>
+          <c:invertIfNegative val="1"/>
+          <c:dLbls>
+            <c:numFmt formatCode="0.00" sourceLinked="0"/>
+            <c:spPr>
+              <a:noFill/>
+              <a:ln>
+                <a:noFill/>
+              </a:ln>
+              <a:effectLst/>
+            </c:spPr>
+            <c:txPr>
+              <a:bodyPr/>
+              <a:lstStyle/>
+              <a:p>
+                <a:pPr>
+                  <a:defRPr sz="950">
+                    <a:latin typeface="Malgun Gothic"/>
+                  </a:defRPr>
+                </a:pPr>
+                <a:endParaRPr lang="ko-KR"/>
+              </a:p>
+            </c:txPr>
+            <c:dLblPos val="outEnd"/>
+            <c:showLegendKey val="0"/>
+            <c:showVal val="1"/>
+            <c:showCatName val="0"/>
+            <c:showSerName val="0"/>
+            <c:showPercent val="0"/>
+            <c:showBubbleSize val="0"/>
+            <c:showLeaderLines val="0"/>
+            <c:extLst>
+              <c:ext xmlns:c15="http://schemas.microsoft.com/office/drawing/2012/chart" uri="{CE6537A1-D6FC-4f65-9D91-7224C49458BB}">
+                <c15:showLeaderLines val="0"/>
+              </c:ext>
+            </c:extLst>
+          </c:dLbls>
           <c:cat>
             <c:strRef>
               <c:f>Sheet1!$A$2:$A$7</c:f>
@@ -429,7 +590,7 @@
                 <c:formatCode>General</c:formatCode>
                 <c:ptCount val="6"/>
                 <c:pt idx="0">
-                  <c:v>0.349</c:v>
+                  <c:v>0.34899999999999998</c:v>
                 </c:pt>
                 <c:pt idx="1">
                   <c:v>0.51</c:v>
@@ -438,31 +599,33 @@
                   <c:v>0.5</c:v>
                 </c:pt>
                 <c:pt idx="3">
-                  <c:v>0.528</c:v>
+                  <c:v>0.52800000000000002</c:v>
                 </c:pt>
                 <c:pt idx="4">
-                  <c:v>0.402</c:v>
+                  <c:v>0.40200000000000002</c:v>
                 </c:pt>
                 <c:pt idx="5">
-                  <c:v>0.468</c:v>
+                  <c:v>0.46800000000000003</c:v>
                 </c:pt>
               </c:numCache>
             </c:numRef>
           </c:val>
+          <c:extLst>
+            <c:ext xmlns:c14="http://schemas.microsoft.com/office/drawing/2007/8/2/chart" uri="{6F2FDCE9-48DA-4B69-8628-5D25D57E5C99}">
+              <c14:invertSolidFillFmt>
+                <c14:spPr xmlns:c14="http://schemas.microsoft.com/office/drawing/2007/8/2/chart">
+                  <a:solidFill>
+                    <a:srgbClr val="FFFFFF"/>
+                  </a:solidFill>
+                </c14:spPr>
+              </c14:invertSolidFillFmt>
+            </c:ext>
+            <c:ext xmlns:c16="http://schemas.microsoft.com/office/drawing/2014/chart" uri="{C3380CC4-5D6E-409C-BE32-E72D297353CC}">
+              <c16:uniqueId val="{00000000-49E4-4A27-8481-8AAB4AFFAD93}"/>
+            </c:ext>
+          </c:extLst>
         </c:ser>
         <c:dLbls>
-          <c:numFmt formatCode="0.00" sourceLinked="0"/>
-          <c:txPr>
-            <a:bodyPr/>
-            <a:lstStyle/>
-            <a:p>
-              <a:pPr>
-                <a:defRPr sz="950">
-                  <a:latin typeface="Malgun Gothic"/>
-                </a:defRPr>
-              </a:pPr>
-            </a:p>
-          </c:txPr>
           <c:dLblPos val="outEnd"/>
           <c:showLegendKey val="0"/>
           <c:showVal val="1"/>
@@ -470,7 +633,6 @@
           <c:showSerName val="0"/>
           <c:showPercent val="0"/>
           <c:showBubbleSize val="0"/>
-          <c:showLeaderLines val="1"/>
         </c:dLbls>
         <c:gapWidth val="50"/>
         <c:axId val="-2068027336"/>
@@ -483,6 +645,7 @@
         </c:scaling>
         <c:delete val="0"/>
         <c:axPos val="b"/>
+        <c:numFmt formatCode="General" sourceLinked="0"/>
         <c:majorTickMark val="out"/>
         <c:minorTickMark val="none"/>
         <c:tickLblPos val="nextTo"/>
@@ -495,6 +658,7 @@
                 <a:latin typeface="Malgun Gothic"/>
               </a:defRPr>
             </a:pPr>
+            <a:endParaRPr lang="ko-KR"/>
           </a:p>
         </c:txPr>
         <c:crossAx val="-2113994440"/>
@@ -507,11 +671,13 @@
       <c:valAx>
         <c:axId val="-2113994440"/>
         <c:scaling>
+          <c:orientation val="minMax"/>
           <c:max val="0.6"/>
         </c:scaling>
         <c:delete val="0"/>
         <c:axPos val="l"/>
         <c:majorGridlines/>
+        <c:numFmt formatCode="General" sourceLinked="1"/>
         <c:majorTickMark val="out"/>
         <c:minorTickMark val="none"/>
         <c:tickLblPos val="nextTo"/>
@@ -524,14 +690,18 @@
                 <a:latin typeface="Malgun Gothic"/>
               </a:defRPr>
             </a:pPr>
+            <a:endParaRPr lang="ko-KR"/>
           </a:p>
         </c:txPr>
         <c:crossAx val="-2068027336"/>
         <c:crosses val="autoZero"/>
+        <c:crossBetween val="between"/>
         <c:majorUnit val="0.2"/>
       </c:valAx>
     </c:plotArea>
+    <c:plotVisOnly val="1"/>
     <c:dispBlanksAs val="gap"/>
+    <c:showDLblsOverMax val="1"/>
   </c:chart>
   <c:txPr>
     <a:bodyPr/>
@@ -550,7 +720,7 @@
 </file>
 
 <file path=ppt/notesMasters/notesMaster1.xml><?xml version="1.0" encoding="utf-8"?>
-<p:notesMaster xmlns:a="http://schemas.openxmlformats.org/drawingml/2006/main" xmlns:p="http://schemas.openxmlformats.org/presentationml/2006/main" xmlns:r="http://schemas.openxmlformats.org/officeDocument/2006/relationships">
+<p:notesMaster xmlns:a="http://schemas.openxmlformats.org/drawingml/2006/main" xmlns:r="http://schemas.openxmlformats.org/officeDocument/2006/relationships" xmlns:p="http://schemas.openxmlformats.org/presentationml/2006/main">
   <p:cSld>
     <p:bg>
       <p:bgRef idx="1001">
@@ -571,241 +741,16 @@
           <a:chExt cx="0" cy="0"/>
         </a:xfrm>
       </p:grpSpPr>
-      <p:sp>
-        <p:nvSpPr>
-          <p:cNvPr id="2" name="Header Placeholder 1"/>
-          <p:cNvSpPr>
-            <a:spLocks noGrp="1"/>
-          </p:cNvSpPr>
-          <p:nvPr>
-            <p:ph type="hdr" sz="quarter"/>
-          </p:nvPr>
-        </p:nvSpPr>
-        <p:spPr>
-          <a:xfrm>
-            <a:off x="0" y="0"/>
-            <a:ext cx="2971800" cy="457200"/>
-          </a:xfrm>
-          <a:prstGeom prst="rect">
-            <a:avLst/>
-          </a:prstGeom>
-        </p:spPr>
-        <p:txBody>
-          <a:bodyPr vert="horz" lIns="91440" tIns="45720" rIns="91440" bIns="45720" rtlCol="0"/>
-          <a:lstStyle>
-            <a:lvl1pPr algn="l">
-              <a:defRPr sz="1200"/>
-            </a:lvl1pPr>
-          </a:lstStyle>
-          <a:p>
-            <a:endParaRPr lang="en-US"/>
-          </a:p>
-        </p:txBody>
-      </p:sp>
-      <p:sp>
-        <p:nvSpPr>
-          <p:cNvPr id="3" name="Date Placeholder 2"/>
-          <p:cNvSpPr>
-            <a:spLocks noGrp="1"/>
-          </p:cNvSpPr>
-          <p:nvPr>
-            <p:ph type="dt" idx="1"/>
-          </p:nvPr>
-        </p:nvSpPr>
-        <p:spPr>
-          <a:xfrm>
-            <a:off x="3884613" y="0"/>
-            <a:ext cx="2971800" cy="457200"/>
-          </a:xfrm>
-          <a:prstGeom prst="rect">
-            <a:avLst/>
-          </a:prstGeom>
-        </p:spPr>
-        <p:txBody>
-          <a:bodyPr vert="horz" lIns="91440" tIns="45720" rIns="91440" bIns="45720" rtlCol="0"/>
-          <a:lstStyle>
-            <a:lvl1pPr algn="r">
-              <a:defRPr sz="1200"/>
-            </a:lvl1pPr>
-          </a:lstStyle>
-          <a:p>
-            <a:fld id="{0F89C1C7-3DCD-1040-A9CF-14679D8B5DDD}" type="datetimeFigureOut">
-              <a:rPr lang="en-US" smtClean="0"/>
-              <a:t>10/17/16</a:t>
-            </a:fld>
-            <a:endParaRPr lang="en-US"/>
-          </a:p>
-        </p:txBody>
-      </p:sp>
-      <p:sp>
-        <p:nvSpPr>
-          <p:cNvPr id="4" name="Slide Image Placeholder 3"/>
-          <p:cNvSpPr>
-            <a:spLocks noGrp="1" noRot="1" noChangeAspect="1"/>
-          </p:cNvSpPr>
-          <p:nvPr>
-            <p:ph type="sldImg" idx="2"/>
-          </p:nvPr>
-        </p:nvSpPr>
-        <p:spPr>
-          <a:xfrm>
-            <a:off x="1143000" y="685800"/>
-            <a:ext cx="4572000" cy="3429000"/>
-          </a:xfrm>
-          <a:prstGeom prst="rect">
-            <a:avLst/>
-          </a:prstGeom>
-          <a:noFill/>
-          <a:ln w="12700">
-            <a:solidFill>
-              <a:prstClr val="black"/>
-            </a:solidFill>
-          </a:ln>
-        </p:spPr>
-        <p:txBody>
-          <a:bodyPr vert="horz" lIns="91440" tIns="45720" rIns="91440" bIns="45720" rtlCol="0" anchor="ctr"/>
-          <a:lstStyle/>
-          <a:p>
-            <a:endParaRPr lang="en-US"/>
-          </a:p>
-        </p:txBody>
-      </p:sp>
-      <p:sp>
-        <p:nvSpPr>
-          <p:cNvPr id="5" name="Notes Placeholder 4"/>
-          <p:cNvSpPr>
-            <a:spLocks noGrp="1"/>
-          </p:cNvSpPr>
-          <p:nvPr>
-            <p:ph type="body" sz="quarter" idx="3"/>
-          </p:nvPr>
-        </p:nvSpPr>
-        <p:spPr>
-          <a:xfrm>
-            <a:off x="685800" y="4343400"/>
-            <a:ext cx="5486400" cy="4114800"/>
-          </a:xfrm>
-          <a:prstGeom prst="rect">
-            <a:avLst/>
-          </a:prstGeom>
-        </p:spPr>
-        <p:txBody>
-          <a:bodyPr vert="horz" lIns="91440" tIns="45720" rIns="91440" bIns="45720" rtlCol="0"/>
-          <a:lstStyle/>
-          <a:p>
-            <a:pPr lvl="0"/>
-            <a:r>
-              <a:rPr lang="en-US" smtClean="0"/>
-              <a:t>Click to edit Master text styles</a:t>
-            </a:r>
-          </a:p>
-          <a:p>
-            <a:pPr lvl="1"/>
-            <a:r>
-              <a:rPr lang="en-US" smtClean="0"/>
-              <a:t>Second level</a:t>
-            </a:r>
-          </a:p>
-          <a:p>
-            <a:pPr lvl="2"/>
-            <a:r>
-              <a:rPr lang="en-US" smtClean="0"/>
-              <a:t>Third level</a:t>
-            </a:r>
-          </a:p>
-          <a:p>
-            <a:pPr lvl="3"/>
-            <a:r>
-              <a:rPr lang="en-US" smtClean="0"/>
-              <a:t>Fourth level</a:t>
-            </a:r>
-          </a:p>
-          <a:p>
-            <a:pPr lvl="4"/>
-            <a:r>
-              <a:rPr lang="en-US" smtClean="0"/>
-              <a:t>Fifth level</a:t>
-            </a:r>
-            <a:endParaRPr lang="en-US"/>
-          </a:p>
-        </p:txBody>
-      </p:sp>
-      <p:sp>
-        <p:nvSpPr>
-          <p:cNvPr id="6" name="Footer Placeholder 5"/>
-          <p:cNvSpPr>
-            <a:spLocks noGrp="1"/>
-          </p:cNvSpPr>
-          <p:nvPr>
-            <p:ph type="ftr" sz="quarter" idx="4"/>
-          </p:nvPr>
-        </p:nvSpPr>
-        <p:spPr>
-          <a:xfrm>
-            <a:off x="0" y="8685213"/>
-            <a:ext cx="2971800" cy="457200"/>
-          </a:xfrm>
-          <a:prstGeom prst="rect">
-            <a:avLst/>
-          </a:prstGeom>
-        </p:spPr>
-        <p:txBody>
-          <a:bodyPr vert="horz" lIns="91440" tIns="45720" rIns="91440" bIns="45720" rtlCol="0" anchor="b"/>
-          <a:lstStyle>
-            <a:lvl1pPr algn="l">
-              <a:defRPr sz="1200"/>
-            </a:lvl1pPr>
-          </a:lstStyle>
-          <a:p>
-            <a:endParaRPr lang="en-US"/>
-          </a:p>
-        </p:txBody>
-      </p:sp>
-      <p:sp>
-        <p:nvSpPr>
-          <p:cNvPr id="7" name="Slide Number Placeholder 6"/>
-          <p:cNvSpPr>
-            <a:spLocks noGrp="1"/>
-          </p:cNvSpPr>
-          <p:nvPr>
-            <p:ph type="sldNum" sz="quarter" idx="5"/>
-          </p:nvPr>
-        </p:nvSpPr>
-        <p:spPr>
-          <a:xfrm>
-            <a:off x="3884613" y="8685213"/>
-            <a:ext cx="2971800" cy="457200"/>
-          </a:xfrm>
-          <a:prstGeom prst="rect">
-            <a:avLst/>
-          </a:prstGeom>
-        </p:spPr>
-        <p:txBody>
-          <a:bodyPr vert="horz" lIns="91440" tIns="45720" rIns="91440" bIns="45720" rtlCol="0" anchor="b"/>
-          <a:lstStyle>
-            <a:lvl1pPr algn="r">
-              <a:defRPr sz="1200"/>
-            </a:lvl1pPr>
-          </a:lstStyle>
-          <a:p>
-            <a:fld id="{BB5E49A5-4136-284D-997B-48E1D791AD67}" type="slidenum">
-              <a:rPr lang="en-US" smtClean="0"/>
-              <a:t>‹#›</a:t>
-            </a:fld>
-            <a:endParaRPr lang="en-US"/>
-          </a:p>
-        </p:txBody>
-      </p:sp>
     </p:spTree>
     <p:extLst>
       <p:ext uri="{BB962C8B-B14F-4D97-AF65-F5344CB8AC3E}">
-        <p14:creationId xmlns:p14="http://schemas.microsoft.com/office/powerpoint/2010/main" val="2623252185"/>
+        <p14:creationId xmlns:p14="http://schemas.microsoft.com/office/powerpoint/2010/main" val="576483121"/>
       </p:ext>
     </p:extLst>
   </p:cSld>
   <p:clrMap bg1="lt1" tx1="dk1" bg2="lt2" tx2="dk2" accent1="accent1" accent2="accent2" accent3="accent3" accent4="accent4" accent5="accent5" accent6="accent6" hlink="hlink" folHlink="folHlink"/>
   <p:notesStyle>
-    <a:lvl1pPr marL="0" algn="l" defTabSz="457200" rtl="0" eaLnBrk="1" latinLnBrk="0" hangingPunct="1">
+    <a:lvl1pPr marL="0" algn="l" defTabSz="914400" rtl="0" eaLnBrk="1" latinLnBrk="1" hangingPunct="1">
       <a:defRPr sz="1200" kern="1200">
         <a:solidFill>
           <a:schemeClr val="tx1"/>
@@ -815,7 +760,7 @@
         <a:cs typeface="+mn-cs"/>
       </a:defRPr>
     </a:lvl1pPr>
-    <a:lvl2pPr marL="457200" algn="l" defTabSz="457200" rtl="0" eaLnBrk="1" latinLnBrk="0" hangingPunct="1">
+    <a:lvl2pPr marL="457200" algn="l" defTabSz="914400" rtl="0" eaLnBrk="1" latinLnBrk="1" hangingPunct="1">
       <a:defRPr sz="1200" kern="1200">
         <a:solidFill>
           <a:schemeClr val="tx1"/>
@@ -825,7 +770,7 @@
         <a:cs typeface="+mn-cs"/>
       </a:defRPr>
     </a:lvl2pPr>
-    <a:lvl3pPr marL="914400" algn="l" defTabSz="457200" rtl="0" eaLnBrk="1" latinLnBrk="0" hangingPunct="1">
+    <a:lvl3pPr marL="914400" algn="l" defTabSz="914400" rtl="0" eaLnBrk="1" latinLnBrk="1" hangingPunct="1">
       <a:defRPr sz="1200" kern="1200">
         <a:solidFill>
           <a:schemeClr val="tx1"/>
@@ -835,7 +780,7 @@
         <a:cs typeface="+mn-cs"/>
       </a:defRPr>
     </a:lvl3pPr>
-    <a:lvl4pPr marL="1371600" algn="l" defTabSz="457200" rtl="0" eaLnBrk="1" latinLnBrk="0" hangingPunct="1">
+    <a:lvl4pPr marL="1371600" algn="l" defTabSz="914400" rtl="0" eaLnBrk="1" latinLnBrk="1" hangingPunct="1">
       <a:defRPr sz="1200" kern="1200">
         <a:solidFill>
           <a:schemeClr val="tx1"/>
@@ -845,7 +790,7 @@
         <a:cs typeface="+mn-cs"/>
       </a:defRPr>
     </a:lvl4pPr>
-    <a:lvl5pPr marL="1828800" algn="l" defTabSz="457200" rtl="0" eaLnBrk="1" latinLnBrk="0" hangingPunct="1">
+    <a:lvl5pPr marL="1828800" algn="l" defTabSz="914400" rtl="0" eaLnBrk="1" latinLnBrk="1" hangingPunct="1">
       <a:defRPr sz="1200" kern="1200">
         <a:solidFill>
           <a:schemeClr val="tx1"/>
@@ -855,7 +800,7 @@
         <a:cs typeface="+mn-cs"/>
       </a:defRPr>
     </a:lvl5pPr>
-    <a:lvl6pPr marL="2286000" algn="l" defTabSz="457200" rtl="0" eaLnBrk="1" latinLnBrk="0" hangingPunct="1">
+    <a:lvl6pPr marL="2286000" algn="l" defTabSz="914400" rtl="0" eaLnBrk="1" latinLnBrk="1" hangingPunct="1">
       <a:defRPr sz="1200" kern="1200">
         <a:solidFill>
           <a:schemeClr val="tx1"/>
@@ -865,7 +810,7 @@
         <a:cs typeface="+mn-cs"/>
       </a:defRPr>
     </a:lvl6pPr>
-    <a:lvl7pPr marL="2743200" algn="l" defTabSz="457200" rtl="0" eaLnBrk="1" latinLnBrk="0" hangingPunct="1">
+    <a:lvl7pPr marL="2743200" algn="l" defTabSz="914400" rtl="0" eaLnBrk="1" latinLnBrk="1" hangingPunct="1">
       <a:defRPr sz="1200" kern="1200">
         <a:solidFill>
           <a:schemeClr val="tx1"/>
@@ -875,7 +820,7 @@
         <a:cs typeface="+mn-cs"/>
       </a:defRPr>
     </a:lvl7pPr>
-    <a:lvl8pPr marL="3200400" algn="l" defTabSz="457200" rtl="0" eaLnBrk="1" latinLnBrk="0" hangingPunct="1">
+    <a:lvl8pPr marL="3200400" algn="l" defTabSz="914400" rtl="0" eaLnBrk="1" latinLnBrk="1" hangingPunct="1">
       <a:defRPr sz="1200" kern="1200">
         <a:solidFill>
           <a:schemeClr val="tx1"/>
@@ -885,7 +830,7 @@
         <a:cs typeface="+mn-cs"/>
       </a:defRPr>
     </a:lvl8pPr>
-    <a:lvl9pPr marL="3657600" algn="l" defTabSz="457200" rtl="0" eaLnBrk="1" latinLnBrk="0" hangingPunct="1">
+    <a:lvl9pPr marL="3657600" algn="l" defTabSz="914400" rtl="0" eaLnBrk="1" latinLnBrk="1" hangingPunct="1">
       <a:defRPr sz="1200" kern="1200">
         <a:solidFill>
           <a:schemeClr val="tx1"/>
@@ -900,7 +845,7 @@
 </file>
 
 <file path=ppt/notesSlides/notesSlide1.xml><?xml version="1.0" encoding="utf-8"?>
-<p:notes xmlns:a="http://schemas.openxmlformats.org/drawingml/2006/main" xmlns:p="http://schemas.openxmlformats.org/presentationml/2006/main" xmlns:r="http://schemas.openxmlformats.org/officeDocument/2006/relationships">
+<p:notes xmlns:a="http://schemas.openxmlformats.org/drawingml/2006/main" xmlns:r="http://schemas.openxmlformats.org/officeDocument/2006/relationships" xmlns:p="http://schemas.openxmlformats.org/presentationml/2006/main">
   <p:cSld>
     <p:spTree>
       <p:nvGrpSpPr>
@@ -920,7 +865,7 @@
         <p:nvSpPr>
           <p:cNvPr id="2" name="Slide Image Placeholder 1"/>
           <p:cNvSpPr>
-            <a:spLocks noGrp="1"/>
+            <a:spLocks noGrp="1" noRot="1" noChangeAspect="1"/>
           </p:cNvSpPr>
           <p:nvPr>
             <p:ph type="sldImg" idx="2"/>
@@ -935,7 +880,7 @@
             <a:spLocks noGrp="1"/>
           </p:cNvSpPr>
           <p:nvPr>
-            <p:ph type="body" idx="3" sz="quarter"/>
+            <p:ph type="body" sz="quarter" idx="3"/>
           </p:nvPr>
         </p:nvSpPr>
         <p:spPr/>
@@ -956,7 +901,7 @@
             <a:spLocks noGrp="1"/>
           </p:cNvSpPr>
           <p:nvPr>
-            <p:ph type="sldNum" idx="5" sz="quarter"/>
+            <p:ph type="sldNum" sz="quarter" idx="5"/>
           </p:nvPr>
         </p:nvSpPr>
         <p:spPr/>
@@ -970,7 +915,7 @@
 </file>
 
 <file path=ppt/notesSlides/notesSlide10.xml><?xml version="1.0" encoding="utf-8"?>
-<p:notes xmlns:a="http://schemas.openxmlformats.org/drawingml/2006/main" xmlns:p="http://schemas.openxmlformats.org/presentationml/2006/main" xmlns:r="http://schemas.openxmlformats.org/officeDocument/2006/relationships">
+<p:notes xmlns:a="http://schemas.openxmlformats.org/drawingml/2006/main" xmlns:r="http://schemas.openxmlformats.org/officeDocument/2006/relationships" xmlns:p="http://schemas.openxmlformats.org/presentationml/2006/main">
   <p:cSld>
     <p:spTree>
       <p:nvGrpSpPr>
@@ -990,7 +935,7 @@
         <p:nvSpPr>
           <p:cNvPr id="2" name="Slide Image Placeholder 1"/>
           <p:cNvSpPr>
-            <a:spLocks noGrp="1"/>
+            <a:spLocks noGrp="1" noRot="1" noChangeAspect="1"/>
           </p:cNvSpPr>
           <p:nvPr>
             <p:ph type="sldImg" idx="2"/>
@@ -1005,7 +950,7 @@
             <a:spLocks noGrp="1"/>
           </p:cNvSpPr>
           <p:nvPr>
-            <p:ph type="body" idx="3" sz="quarter"/>
+            <p:ph type="body" sz="quarter" idx="3"/>
           </p:nvPr>
         </p:nvSpPr>
         <p:spPr/>
@@ -1026,7 +971,7 @@
             <a:spLocks noGrp="1"/>
           </p:cNvSpPr>
           <p:nvPr>
-            <p:ph type="sldNum" idx="5" sz="quarter"/>
+            <p:ph type="sldNum" sz="quarter" idx="5"/>
           </p:nvPr>
         </p:nvSpPr>
         <p:spPr/>
@@ -1040,7 +985,7 @@
 </file>
 
 <file path=ppt/notesSlides/notesSlide11.xml><?xml version="1.0" encoding="utf-8"?>
-<p:notes xmlns:a="http://schemas.openxmlformats.org/drawingml/2006/main" xmlns:p="http://schemas.openxmlformats.org/presentationml/2006/main" xmlns:r="http://schemas.openxmlformats.org/officeDocument/2006/relationships">
+<p:notes xmlns:a="http://schemas.openxmlformats.org/drawingml/2006/main" xmlns:r="http://schemas.openxmlformats.org/officeDocument/2006/relationships" xmlns:p="http://schemas.openxmlformats.org/presentationml/2006/main">
   <p:cSld>
     <p:spTree>
       <p:nvGrpSpPr>
@@ -1060,7 +1005,7 @@
         <p:nvSpPr>
           <p:cNvPr id="2" name="Slide Image Placeholder 1"/>
           <p:cNvSpPr>
-            <a:spLocks noGrp="1"/>
+            <a:spLocks noGrp="1" noRot="1" noChangeAspect="1"/>
           </p:cNvSpPr>
           <p:nvPr>
             <p:ph type="sldImg" idx="2"/>
@@ -1075,7 +1020,7 @@
             <a:spLocks noGrp="1"/>
           </p:cNvSpPr>
           <p:nvPr>
-            <p:ph type="body" idx="3" sz="quarter"/>
+            <p:ph type="body" sz="quarter" idx="3"/>
           </p:nvPr>
         </p:nvSpPr>
         <p:spPr/>
@@ -1096,7 +1041,7 @@
             <a:spLocks noGrp="1"/>
           </p:cNvSpPr>
           <p:nvPr>
-            <p:ph type="sldNum" idx="5" sz="quarter"/>
+            <p:ph type="sldNum" sz="quarter" idx="5"/>
           </p:nvPr>
         </p:nvSpPr>
         <p:spPr/>
@@ -1110,7 +1055,7 @@
 </file>
 
 <file path=ppt/notesSlides/notesSlide12.xml><?xml version="1.0" encoding="utf-8"?>
-<p:notes xmlns:a="http://schemas.openxmlformats.org/drawingml/2006/main" xmlns:p="http://schemas.openxmlformats.org/presentationml/2006/main" xmlns:r="http://schemas.openxmlformats.org/officeDocument/2006/relationships">
+<p:notes xmlns:a="http://schemas.openxmlformats.org/drawingml/2006/main" xmlns:r="http://schemas.openxmlformats.org/officeDocument/2006/relationships" xmlns:p="http://schemas.openxmlformats.org/presentationml/2006/main">
   <p:cSld>
     <p:spTree>
       <p:nvGrpSpPr>
@@ -1130,7 +1075,7 @@
         <p:nvSpPr>
           <p:cNvPr id="2" name="Slide Image Placeholder 1"/>
           <p:cNvSpPr>
-            <a:spLocks noGrp="1"/>
+            <a:spLocks noGrp="1" noRot="1" noChangeAspect="1"/>
           </p:cNvSpPr>
           <p:nvPr>
             <p:ph type="sldImg" idx="2"/>
@@ -1145,7 +1090,7 @@
             <a:spLocks noGrp="1"/>
           </p:cNvSpPr>
           <p:nvPr>
-            <p:ph type="body" idx="3" sz="quarter"/>
+            <p:ph type="body" sz="quarter" idx="3"/>
           </p:nvPr>
         </p:nvSpPr>
         <p:spPr/>
@@ -1166,7 +1111,7 @@
             <a:spLocks noGrp="1"/>
           </p:cNvSpPr>
           <p:nvPr>
-            <p:ph type="sldNum" idx="5" sz="quarter"/>
+            <p:ph type="sldNum" sz="quarter" idx="5"/>
           </p:nvPr>
         </p:nvSpPr>
         <p:spPr/>
@@ -1180,7 +1125,7 @@
 </file>
 
 <file path=ppt/notesSlides/notesSlide13.xml><?xml version="1.0" encoding="utf-8"?>
-<p:notes xmlns:a="http://schemas.openxmlformats.org/drawingml/2006/main" xmlns:p="http://schemas.openxmlformats.org/presentationml/2006/main" xmlns:r="http://schemas.openxmlformats.org/officeDocument/2006/relationships">
+<p:notes xmlns:a="http://schemas.openxmlformats.org/drawingml/2006/main" xmlns:r="http://schemas.openxmlformats.org/officeDocument/2006/relationships" xmlns:p="http://schemas.openxmlformats.org/presentationml/2006/main">
   <p:cSld>
     <p:spTree>
       <p:nvGrpSpPr>
@@ -1200,7 +1145,7 @@
         <p:nvSpPr>
           <p:cNvPr id="2" name="Slide Image Placeholder 1"/>
           <p:cNvSpPr>
-            <a:spLocks noGrp="1"/>
+            <a:spLocks noGrp="1" noRot="1" noChangeAspect="1"/>
           </p:cNvSpPr>
           <p:nvPr>
             <p:ph type="sldImg" idx="2"/>
@@ -1215,7 +1160,7 @@
             <a:spLocks noGrp="1"/>
           </p:cNvSpPr>
           <p:nvPr>
-            <p:ph type="body" idx="3" sz="quarter"/>
+            <p:ph type="body" sz="quarter" idx="3"/>
           </p:nvPr>
         </p:nvSpPr>
         <p:spPr/>
@@ -1236,7 +1181,7 @@
             <a:spLocks noGrp="1"/>
           </p:cNvSpPr>
           <p:nvPr>
-            <p:ph type="sldNum" idx="5" sz="quarter"/>
+            <p:ph type="sldNum" sz="quarter" idx="5"/>
           </p:nvPr>
         </p:nvSpPr>
         <p:spPr/>
@@ -1250,7 +1195,7 @@
 </file>
 
 <file path=ppt/notesSlides/notesSlide14.xml><?xml version="1.0" encoding="utf-8"?>
-<p:notes xmlns:a="http://schemas.openxmlformats.org/drawingml/2006/main" xmlns:p="http://schemas.openxmlformats.org/presentationml/2006/main" xmlns:r="http://schemas.openxmlformats.org/officeDocument/2006/relationships">
+<p:notes xmlns:a="http://schemas.openxmlformats.org/drawingml/2006/main" xmlns:r="http://schemas.openxmlformats.org/officeDocument/2006/relationships" xmlns:p="http://schemas.openxmlformats.org/presentationml/2006/main">
   <p:cSld>
     <p:spTree>
       <p:nvGrpSpPr>
@@ -1270,7 +1215,7 @@
         <p:nvSpPr>
           <p:cNvPr id="2" name="Slide Image Placeholder 1"/>
           <p:cNvSpPr>
-            <a:spLocks noGrp="1"/>
+            <a:spLocks noGrp="1" noRot="1" noChangeAspect="1"/>
           </p:cNvSpPr>
           <p:nvPr>
             <p:ph type="sldImg" idx="2"/>
@@ -1285,7 +1230,7 @@
             <a:spLocks noGrp="1"/>
           </p:cNvSpPr>
           <p:nvPr>
-            <p:ph type="body" idx="3" sz="quarter"/>
+            <p:ph type="body" sz="quarter" idx="3"/>
           </p:nvPr>
         </p:nvSpPr>
         <p:spPr/>
@@ -1306,7 +1251,7 @@
             <a:spLocks noGrp="1"/>
           </p:cNvSpPr>
           <p:nvPr>
-            <p:ph type="sldNum" idx="5" sz="quarter"/>
+            <p:ph type="sldNum" sz="quarter" idx="5"/>
           </p:nvPr>
         </p:nvSpPr>
         <p:spPr/>
@@ -1320,7 +1265,7 @@
 </file>
 
 <file path=ppt/notesSlides/notesSlide15.xml><?xml version="1.0" encoding="utf-8"?>
-<p:notes xmlns:a="http://schemas.openxmlformats.org/drawingml/2006/main" xmlns:p="http://schemas.openxmlformats.org/presentationml/2006/main" xmlns:r="http://schemas.openxmlformats.org/officeDocument/2006/relationships">
+<p:notes xmlns:a="http://schemas.openxmlformats.org/drawingml/2006/main" xmlns:r="http://schemas.openxmlformats.org/officeDocument/2006/relationships" xmlns:p="http://schemas.openxmlformats.org/presentationml/2006/main">
   <p:cSld>
     <p:spTree>
       <p:nvGrpSpPr>
@@ -1340,7 +1285,7 @@
         <p:nvSpPr>
           <p:cNvPr id="2" name="Slide Image Placeholder 1"/>
           <p:cNvSpPr>
-            <a:spLocks noGrp="1"/>
+            <a:spLocks noGrp="1" noRot="1" noChangeAspect="1"/>
           </p:cNvSpPr>
           <p:nvPr>
             <p:ph type="sldImg" idx="2"/>
@@ -1355,7 +1300,7 @@
             <a:spLocks noGrp="1"/>
           </p:cNvSpPr>
           <p:nvPr>
-            <p:ph type="body" idx="3" sz="quarter"/>
+            <p:ph type="body" sz="quarter" idx="3"/>
           </p:nvPr>
         </p:nvSpPr>
         <p:spPr/>
@@ -1376,7 +1321,7 @@
             <a:spLocks noGrp="1"/>
           </p:cNvSpPr>
           <p:nvPr>
-            <p:ph type="sldNum" idx="5" sz="quarter"/>
+            <p:ph type="sldNum" sz="quarter" idx="5"/>
           </p:nvPr>
         </p:nvSpPr>
         <p:spPr/>
@@ -1390,7 +1335,7 @@
 </file>
 
 <file path=ppt/notesSlides/notesSlide16.xml><?xml version="1.0" encoding="utf-8"?>
-<p:notes xmlns:a="http://schemas.openxmlformats.org/drawingml/2006/main" xmlns:p="http://schemas.openxmlformats.org/presentationml/2006/main" xmlns:r="http://schemas.openxmlformats.org/officeDocument/2006/relationships">
+<p:notes xmlns:a="http://schemas.openxmlformats.org/drawingml/2006/main" xmlns:r="http://schemas.openxmlformats.org/officeDocument/2006/relationships" xmlns:p="http://schemas.openxmlformats.org/presentationml/2006/main">
   <p:cSld>
     <p:spTree>
       <p:nvGrpSpPr>
@@ -1410,7 +1355,7 @@
         <p:nvSpPr>
           <p:cNvPr id="2" name="Slide Image Placeholder 1"/>
           <p:cNvSpPr>
-            <a:spLocks noGrp="1"/>
+            <a:spLocks noGrp="1" noRot="1" noChangeAspect="1"/>
           </p:cNvSpPr>
           <p:nvPr>
             <p:ph type="sldImg" idx="2"/>
@@ -1425,7 +1370,7 @@
             <a:spLocks noGrp="1"/>
           </p:cNvSpPr>
           <p:nvPr>
-            <p:ph type="body" idx="3" sz="quarter"/>
+            <p:ph type="body" sz="quarter" idx="3"/>
           </p:nvPr>
         </p:nvSpPr>
         <p:spPr/>
@@ -1446,7 +1391,7 @@
             <a:spLocks noGrp="1"/>
           </p:cNvSpPr>
           <p:nvPr>
-            <p:ph type="sldNum" idx="5" sz="quarter"/>
+            <p:ph type="sldNum" sz="quarter" idx="5"/>
           </p:nvPr>
         </p:nvSpPr>
         <p:spPr/>
@@ -1460,7 +1405,7 @@
 </file>
 
 <file path=ppt/notesSlides/notesSlide2.xml><?xml version="1.0" encoding="utf-8"?>
-<p:notes xmlns:a="http://schemas.openxmlformats.org/drawingml/2006/main" xmlns:p="http://schemas.openxmlformats.org/presentationml/2006/main" xmlns:r="http://schemas.openxmlformats.org/officeDocument/2006/relationships">
+<p:notes xmlns:a="http://schemas.openxmlformats.org/drawingml/2006/main" xmlns:r="http://schemas.openxmlformats.org/officeDocument/2006/relationships" xmlns:p="http://schemas.openxmlformats.org/presentationml/2006/main">
   <p:cSld>
     <p:spTree>
       <p:nvGrpSpPr>
@@ -1480,7 +1425,7 @@
         <p:nvSpPr>
           <p:cNvPr id="2" name="Slide Image Placeholder 1"/>
           <p:cNvSpPr>
-            <a:spLocks noGrp="1"/>
+            <a:spLocks noGrp="1" noRot="1" noChangeAspect="1"/>
           </p:cNvSpPr>
           <p:nvPr>
             <p:ph type="sldImg" idx="2"/>
@@ -1495,7 +1440,7 @@
             <a:spLocks noGrp="1"/>
           </p:cNvSpPr>
           <p:nvPr>
-            <p:ph type="body" idx="3" sz="quarter"/>
+            <p:ph type="body" sz="quarter" idx="3"/>
           </p:nvPr>
         </p:nvSpPr>
         <p:spPr/>
@@ -1516,7 +1461,7 @@
             <a:spLocks noGrp="1"/>
           </p:cNvSpPr>
           <p:nvPr>
-            <p:ph type="sldNum" idx="5" sz="quarter"/>
+            <p:ph type="sldNum" sz="quarter" idx="5"/>
           </p:nvPr>
         </p:nvSpPr>
         <p:spPr/>
@@ -1530,7 +1475,7 @@
 </file>
 
 <file path=ppt/notesSlides/notesSlide3.xml><?xml version="1.0" encoding="utf-8"?>
-<p:notes xmlns:a="http://schemas.openxmlformats.org/drawingml/2006/main" xmlns:p="http://schemas.openxmlformats.org/presentationml/2006/main" xmlns:r="http://schemas.openxmlformats.org/officeDocument/2006/relationships">
+<p:notes xmlns:a="http://schemas.openxmlformats.org/drawingml/2006/main" xmlns:r="http://schemas.openxmlformats.org/officeDocument/2006/relationships" xmlns:p="http://schemas.openxmlformats.org/presentationml/2006/main">
   <p:cSld>
     <p:spTree>
       <p:nvGrpSpPr>
@@ -1550,7 +1495,7 @@
         <p:nvSpPr>
           <p:cNvPr id="2" name="Slide Image Placeholder 1"/>
           <p:cNvSpPr>
-            <a:spLocks noGrp="1"/>
+            <a:spLocks noGrp="1" noRot="1" noChangeAspect="1"/>
           </p:cNvSpPr>
           <p:nvPr>
             <p:ph type="sldImg" idx="2"/>
@@ -1565,7 +1510,7 @@
             <a:spLocks noGrp="1"/>
           </p:cNvSpPr>
           <p:nvPr>
-            <p:ph type="body" idx="3" sz="quarter"/>
+            <p:ph type="body" sz="quarter" idx="3"/>
           </p:nvPr>
         </p:nvSpPr>
         <p:spPr/>
@@ -1576,6 +1521,21 @@
             <a:r>
               <a:t>용어: CWSI는 '건조 기준온도'와 '습윤 기준온도' 사이에서 작물 온도의 위치를 0~1로 나타내는 지수 — 따라서 각 논문의 차이는 결국 이 두 기준온도를 어떻게 정하느냐임. NWSB=물을 충분히 준 작물의 온도를 대기 건조도(VPD, 기온·습도로 계산)로 예측하는 회귀식. NRCT=포장 내 최저/최고 온도로 정규화한 간이 열지수. Otsu/Jenks=식생과 토양을 나누는 경계값을 자동으로 찾는 알고리즘. VPD=수증기압차(공기가 얼마나 건조한지). 상세: 참고논문_요약집.md</a:t>
             </a:r>
+            <a:endParaRPr lang="en-US"/>
+          </a:p>
+          <a:p>
+            <a:endParaRPr lang="en-US"/>
+          </a:p>
+          <a:p>
+            <a:r>
+              <a:rPr lang="en-US"/>
+              <a:t>NWSB </a:t>
+            </a:r>
+            <a:r>
+              <a:rPr lang="ko-KR" altLang="en-US"/>
+              <a:t>무 수분 스트레스 기준선</a:t>
+            </a:r>
+            <a:endParaRPr/>
           </a:p>
         </p:txBody>
       </p:sp>
@@ -1586,7 +1546,7 @@
             <a:spLocks noGrp="1"/>
           </p:cNvSpPr>
           <p:nvPr>
-            <p:ph type="sldNum" idx="5" sz="quarter"/>
+            <p:ph type="sldNum" sz="quarter" idx="5"/>
           </p:nvPr>
         </p:nvSpPr>
         <p:spPr/>
@@ -1600,7 +1560,7 @@
 </file>
 
 <file path=ppt/notesSlides/notesSlide4.xml><?xml version="1.0" encoding="utf-8"?>
-<p:notes xmlns:a="http://schemas.openxmlformats.org/drawingml/2006/main" xmlns:p="http://schemas.openxmlformats.org/presentationml/2006/main" xmlns:r="http://schemas.openxmlformats.org/officeDocument/2006/relationships">
+<p:notes xmlns:a="http://schemas.openxmlformats.org/drawingml/2006/main" xmlns:r="http://schemas.openxmlformats.org/officeDocument/2006/relationships" xmlns:p="http://schemas.openxmlformats.org/presentationml/2006/main">
   <p:cSld>
     <p:spTree>
       <p:nvGrpSpPr>
@@ -1620,7 +1580,7 @@
         <p:nvSpPr>
           <p:cNvPr id="2" name="Slide Image Placeholder 1"/>
           <p:cNvSpPr>
-            <a:spLocks noGrp="1"/>
+            <a:spLocks noGrp="1" noRot="1" noChangeAspect="1"/>
           </p:cNvSpPr>
           <p:nvPr>
             <p:ph type="sldImg" idx="2"/>
@@ -1635,7 +1595,7 @@
             <a:spLocks noGrp="1"/>
           </p:cNvSpPr>
           <p:nvPr>
-            <p:ph type="body" idx="3" sz="quarter"/>
+            <p:ph type="body" sz="quarter" idx="3"/>
           </p:nvPr>
         </p:nvSpPr>
         <p:spPr/>
@@ -1656,7 +1616,7 @@
             <a:spLocks noGrp="1"/>
           </p:cNvSpPr>
           <p:nvPr>
-            <p:ph type="sldNum" idx="5" sz="quarter"/>
+            <p:ph type="sldNum" sz="quarter" idx="5"/>
           </p:nvPr>
         </p:nvSpPr>
         <p:spPr/>
@@ -1670,7 +1630,7 @@
 </file>
 
 <file path=ppt/notesSlides/notesSlide5.xml><?xml version="1.0" encoding="utf-8"?>
-<p:notes xmlns:a="http://schemas.openxmlformats.org/drawingml/2006/main" xmlns:p="http://schemas.openxmlformats.org/presentationml/2006/main" xmlns:r="http://schemas.openxmlformats.org/officeDocument/2006/relationships">
+<p:notes xmlns:a="http://schemas.openxmlformats.org/drawingml/2006/main" xmlns:r="http://schemas.openxmlformats.org/officeDocument/2006/relationships" xmlns:p="http://schemas.openxmlformats.org/presentationml/2006/main">
   <p:cSld>
     <p:spTree>
       <p:nvGrpSpPr>
@@ -1690,7 +1650,7 @@
         <p:nvSpPr>
           <p:cNvPr id="2" name="Slide Image Placeholder 1"/>
           <p:cNvSpPr>
-            <a:spLocks noGrp="1"/>
+            <a:spLocks noGrp="1" noRot="1" noChangeAspect="1"/>
           </p:cNvSpPr>
           <p:nvPr>
             <p:ph type="sldImg" idx="2"/>
@@ -1705,7 +1665,7 @@
             <a:spLocks noGrp="1"/>
           </p:cNvSpPr>
           <p:nvPr>
-            <p:ph type="body" idx="3" sz="quarter"/>
+            <p:ph type="body" sz="quarter" idx="3"/>
           </p:nvPr>
         </p:nvSpPr>
         <p:spPr/>
@@ -1726,7 +1686,7 @@
             <a:spLocks noGrp="1"/>
           </p:cNvSpPr>
           <p:nvPr>
-            <p:ph type="sldNum" idx="5" sz="quarter"/>
+            <p:ph type="sldNum" sz="quarter" idx="5"/>
           </p:nvPr>
         </p:nvSpPr>
         <p:spPr/>
@@ -1740,7 +1700,7 @@
 </file>
 
 <file path=ppt/notesSlides/notesSlide6.xml><?xml version="1.0" encoding="utf-8"?>
-<p:notes xmlns:a="http://schemas.openxmlformats.org/drawingml/2006/main" xmlns:p="http://schemas.openxmlformats.org/presentationml/2006/main" xmlns:r="http://schemas.openxmlformats.org/officeDocument/2006/relationships">
+<p:notes xmlns:a="http://schemas.openxmlformats.org/drawingml/2006/main" xmlns:r="http://schemas.openxmlformats.org/officeDocument/2006/relationships" xmlns:p="http://schemas.openxmlformats.org/presentationml/2006/main">
   <p:cSld>
     <p:spTree>
       <p:nvGrpSpPr>
@@ -1760,7 +1720,7 @@
         <p:nvSpPr>
           <p:cNvPr id="2" name="Slide Image Placeholder 1"/>
           <p:cNvSpPr>
-            <a:spLocks noGrp="1"/>
+            <a:spLocks noGrp="1" noRot="1" noChangeAspect="1"/>
           </p:cNvSpPr>
           <p:nvPr>
             <p:ph type="sldImg" idx="2"/>
@@ -1775,7 +1735,7 @@
             <a:spLocks noGrp="1"/>
           </p:cNvSpPr>
           <p:nvPr>
-            <p:ph type="body" idx="3" sz="quarter"/>
+            <p:ph type="body" sz="quarter" idx="3"/>
           </p:nvPr>
         </p:nvSpPr>
         <p:spPr/>
@@ -1796,7 +1756,7 @@
             <a:spLocks noGrp="1"/>
           </p:cNvSpPr>
           <p:nvPr>
-            <p:ph type="sldNum" idx="5" sz="quarter"/>
+            <p:ph type="sldNum" sz="quarter" idx="5"/>
           </p:nvPr>
         </p:nvSpPr>
         <p:spPr/>
@@ -1810,7 +1770,7 @@
 </file>
 
 <file path=ppt/notesSlides/notesSlide7.xml><?xml version="1.0" encoding="utf-8"?>
-<p:notes xmlns:a="http://schemas.openxmlformats.org/drawingml/2006/main" xmlns:p="http://schemas.openxmlformats.org/presentationml/2006/main" xmlns:r="http://schemas.openxmlformats.org/officeDocument/2006/relationships">
+<p:notes xmlns:a="http://schemas.openxmlformats.org/drawingml/2006/main" xmlns:r="http://schemas.openxmlformats.org/officeDocument/2006/relationships" xmlns:p="http://schemas.openxmlformats.org/presentationml/2006/main">
   <p:cSld>
     <p:spTree>
       <p:nvGrpSpPr>
@@ -1830,7 +1790,7 @@
         <p:nvSpPr>
           <p:cNvPr id="2" name="Slide Image Placeholder 1"/>
           <p:cNvSpPr>
-            <a:spLocks noGrp="1"/>
+            <a:spLocks noGrp="1" noRot="1" noChangeAspect="1"/>
           </p:cNvSpPr>
           <p:nvPr>
             <p:ph type="sldImg" idx="2"/>
@@ -1845,7 +1805,7 @@
             <a:spLocks noGrp="1"/>
           </p:cNvSpPr>
           <p:nvPr>
-            <p:ph type="body" idx="3" sz="quarter"/>
+            <p:ph type="body" sz="quarter" idx="3"/>
           </p:nvPr>
         </p:nvSpPr>
         <p:spPr/>
@@ -1866,7 +1826,7 @@
             <a:spLocks noGrp="1"/>
           </p:cNvSpPr>
           <p:nvPr>
-            <p:ph type="sldNum" idx="5" sz="quarter"/>
+            <p:ph type="sldNum" sz="quarter" idx="5"/>
           </p:nvPr>
         </p:nvSpPr>
         <p:spPr/>
@@ -1880,7 +1840,7 @@
 </file>
 
 <file path=ppt/notesSlides/notesSlide8.xml><?xml version="1.0" encoding="utf-8"?>
-<p:notes xmlns:a="http://schemas.openxmlformats.org/drawingml/2006/main" xmlns:p="http://schemas.openxmlformats.org/presentationml/2006/main" xmlns:r="http://schemas.openxmlformats.org/officeDocument/2006/relationships">
+<p:notes xmlns:a="http://schemas.openxmlformats.org/drawingml/2006/main" xmlns:r="http://schemas.openxmlformats.org/officeDocument/2006/relationships" xmlns:p="http://schemas.openxmlformats.org/presentationml/2006/main">
   <p:cSld>
     <p:spTree>
       <p:nvGrpSpPr>
@@ -1900,7 +1860,7 @@
         <p:nvSpPr>
           <p:cNvPr id="2" name="Slide Image Placeholder 1"/>
           <p:cNvSpPr>
-            <a:spLocks noGrp="1"/>
+            <a:spLocks noGrp="1" noRot="1" noChangeAspect="1"/>
           </p:cNvSpPr>
           <p:nvPr>
             <p:ph type="sldImg" idx="2"/>
@@ -1915,7 +1875,7 @@
             <a:spLocks noGrp="1"/>
           </p:cNvSpPr>
           <p:nvPr>
-            <p:ph type="body" idx="3" sz="quarter"/>
+            <p:ph type="body" sz="quarter" idx="3"/>
           </p:nvPr>
         </p:nvSpPr>
         <p:spPr/>
@@ -1936,7 +1896,7 @@
             <a:spLocks noGrp="1"/>
           </p:cNvSpPr>
           <p:nvPr>
-            <p:ph type="sldNum" idx="5" sz="quarter"/>
+            <p:ph type="sldNum" sz="quarter" idx="5"/>
           </p:nvPr>
         </p:nvSpPr>
         <p:spPr/>
@@ -1950,7 +1910,7 @@
 </file>
 
 <file path=ppt/notesSlides/notesSlide9.xml><?xml version="1.0" encoding="utf-8"?>
-<p:notes xmlns:a="http://schemas.openxmlformats.org/drawingml/2006/main" xmlns:p="http://schemas.openxmlformats.org/presentationml/2006/main" xmlns:r="http://schemas.openxmlformats.org/officeDocument/2006/relationships">
+<p:notes xmlns:a="http://schemas.openxmlformats.org/drawingml/2006/main" xmlns:r="http://schemas.openxmlformats.org/officeDocument/2006/relationships" xmlns:p="http://schemas.openxmlformats.org/presentationml/2006/main">
   <p:cSld>
     <p:spTree>
       <p:nvGrpSpPr>
@@ -1970,7 +1930,7 @@
         <p:nvSpPr>
           <p:cNvPr id="2" name="Slide Image Placeholder 1"/>
           <p:cNvSpPr>
-            <a:spLocks noGrp="1"/>
+            <a:spLocks noGrp="1" noRot="1" noChangeAspect="1"/>
           </p:cNvSpPr>
           <p:nvPr>
             <p:ph type="sldImg" idx="2"/>
@@ -1985,7 +1945,7 @@
             <a:spLocks noGrp="1"/>
           </p:cNvSpPr>
           <p:nvPr>
-            <p:ph type="body" idx="3" sz="quarter"/>
+            <p:ph type="body" sz="quarter" idx="3"/>
           </p:nvPr>
         </p:nvSpPr>
         <p:spPr/>
@@ -2006,7 +1966,7 @@
             <a:spLocks noGrp="1"/>
           </p:cNvSpPr>
           <p:nvPr>
-            <p:ph type="sldNum" idx="5" sz="quarter"/>
+            <p:ph type="sldNum" sz="quarter" idx="5"/>
           </p:nvPr>
         </p:nvSpPr>
         <p:spPr/>
@@ -2057,10 +2017,9 @@
           <a:lstStyle/>
           <a:p>
             <a:r>
-              <a:rPr lang="en-US" smtClean="0"/>
+              <a:rPr lang="en-US"/>
               <a:t>Click to edit Master title style</a:t>
             </a:r>
-            <a:endParaRPr lang="en-US"/>
           </a:p>
         </p:txBody>
       </p:sp>
@@ -2176,10 +2135,9 @@
           </a:lstStyle>
           <a:p>
             <a:r>
-              <a:rPr lang="en-US" smtClean="0"/>
+              <a:rPr lang="en-US"/>
               <a:t>Click to edit Master subtitle style</a:t>
             </a:r>
-            <a:endParaRPr lang="en-US"/>
           </a:p>
         </p:txBody>
       </p:sp>
@@ -2200,7 +2158,7 @@
           <a:p>
             <a:fld id="{5BCAD085-E8A6-8845-BD4E-CB4CCA059FC4}" type="datetimeFigureOut">
               <a:rPr lang="en-US" smtClean="0"/>
-              <a:t>1/27/13</a:t>
+              <a:t>9/7/2026</a:t>
             </a:fld>
             <a:endParaRPr lang="en-US"/>
           </a:p>
@@ -2294,10 +2252,9 @@
           <a:lstStyle/>
           <a:p>
             <a:r>
-              <a:rPr lang="en-US" smtClean="0"/>
+              <a:rPr lang="en-US"/>
               <a:t>Click to edit Master title style</a:t>
             </a:r>
-            <a:endParaRPr lang="en-US"/>
           </a:p>
         </p:txBody>
       </p:sp>
@@ -2318,38 +2275,37 @@
           <a:p>
             <a:pPr lvl="0"/>
             <a:r>
-              <a:rPr lang="en-US" smtClean="0"/>
+              <a:rPr lang="en-US"/>
               <a:t>Click to edit Master text styles</a:t>
             </a:r>
           </a:p>
           <a:p>
             <a:pPr lvl="1"/>
             <a:r>
-              <a:rPr lang="en-US" smtClean="0"/>
+              <a:rPr lang="en-US"/>
               <a:t>Second level</a:t>
             </a:r>
           </a:p>
           <a:p>
             <a:pPr lvl="2"/>
             <a:r>
-              <a:rPr lang="en-US" smtClean="0"/>
+              <a:rPr lang="en-US"/>
               <a:t>Third level</a:t>
             </a:r>
           </a:p>
           <a:p>
             <a:pPr lvl="3"/>
             <a:r>
-              <a:rPr lang="en-US" smtClean="0"/>
+              <a:rPr lang="en-US"/>
               <a:t>Fourth level</a:t>
             </a:r>
           </a:p>
           <a:p>
             <a:pPr lvl="4"/>
             <a:r>
-              <a:rPr lang="en-US" smtClean="0"/>
+              <a:rPr lang="en-US"/>
               <a:t>Fifth level</a:t>
             </a:r>
-            <a:endParaRPr lang="en-US"/>
           </a:p>
         </p:txBody>
       </p:sp>
@@ -2370,7 +2326,7 @@
           <a:p>
             <a:fld id="{5BCAD085-E8A6-8845-BD4E-CB4CCA059FC4}" type="datetimeFigureOut">
               <a:rPr lang="en-US" smtClean="0"/>
-              <a:t>1/27/13</a:t>
+              <a:t>9/7/2026</a:t>
             </a:fld>
             <a:endParaRPr lang="en-US"/>
           </a:p>
@@ -2469,10 +2425,9 @@
           <a:lstStyle/>
           <a:p>
             <a:r>
-              <a:rPr lang="en-US" smtClean="0"/>
+              <a:rPr lang="en-US"/>
               <a:t>Click to edit Master title style</a:t>
             </a:r>
-            <a:endParaRPr lang="en-US"/>
           </a:p>
         </p:txBody>
       </p:sp>
@@ -2498,38 +2453,37 @@
           <a:p>
             <a:pPr lvl="0"/>
             <a:r>
-              <a:rPr lang="en-US" smtClean="0"/>
+              <a:rPr lang="en-US"/>
               <a:t>Click to edit Master text styles</a:t>
             </a:r>
           </a:p>
           <a:p>
             <a:pPr lvl="1"/>
             <a:r>
-              <a:rPr lang="en-US" smtClean="0"/>
+              <a:rPr lang="en-US"/>
               <a:t>Second level</a:t>
             </a:r>
           </a:p>
           <a:p>
             <a:pPr lvl="2"/>
             <a:r>
-              <a:rPr lang="en-US" smtClean="0"/>
+              <a:rPr lang="en-US"/>
               <a:t>Third level</a:t>
             </a:r>
           </a:p>
           <a:p>
             <a:pPr lvl="3"/>
             <a:r>
-              <a:rPr lang="en-US" smtClean="0"/>
+              <a:rPr lang="en-US"/>
               <a:t>Fourth level</a:t>
             </a:r>
           </a:p>
           <a:p>
             <a:pPr lvl="4"/>
             <a:r>
-              <a:rPr lang="en-US" smtClean="0"/>
+              <a:rPr lang="en-US"/>
               <a:t>Fifth level</a:t>
             </a:r>
-            <a:endParaRPr lang="en-US"/>
           </a:p>
         </p:txBody>
       </p:sp>
@@ -2550,7 +2504,7 @@
           <a:p>
             <a:fld id="{5BCAD085-E8A6-8845-BD4E-CB4CCA059FC4}" type="datetimeFigureOut">
               <a:rPr lang="en-US" smtClean="0"/>
-              <a:t>1/27/13</a:t>
+              <a:t>9/7/2026</a:t>
             </a:fld>
             <a:endParaRPr lang="en-US"/>
           </a:p>
@@ -2644,10 +2598,9 @@
           <a:lstStyle/>
           <a:p>
             <a:r>
-              <a:rPr lang="en-US" smtClean="0"/>
+              <a:rPr lang="en-US"/>
               <a:t>Click to edit Master title style</a:t>
             </a:r>
-            <a:endParaRPr lang="en-US"/>
           </a:p>
         </p:txBody>
       </p:sp>
@@ -2668,38 +2621,37 @@
           <a:p>
             <a:pPr lvl="0"/>
             <a:r>
-              <a:rPr lang="en-US" smtClean="0"/>
+              <a:rPr lang="en-US"/>
               <a:t>Click to edit Master text styles</a:t>
             </a:r>
           </a:p>
           <a:p>
             <a:pPr lvl="1"/>
             <a:r>
-              <a:rPr lang="en-US" smtClean="0"/>
+              <a:rPr lang="en-US"/>
               <a:t>Second level</a:t>
             </a:r>
           </a:p>
           <a:p>
             <a:pPr lvl="2"/>
             <a:r>
-              <a:rPr lang="en-US" smtClean="0"/>
+              <a:rPr lang="en-US"/>
               <a:t>Third level</a:t>
             </a:r>
           </a:p>
           <a:p>
             <a:pPr lvl="3"/>
             <a:r>
-              <a:rPr lang="en-US" smtClean="0"/>
+              <a:rPr lang="en-US"/>
               <a:t>Fourth level</a:t>
             </a:r>
           </a:p>
           <a:p>
             <a:pPr lvl="4"/>
             <a:r>
-              <a:rPr lang="en-US" smtClean="0"/>
+              <a:rPr lang="en-US"/>
               <a:t>Fifth level</a:t>
             </a:r>
-            <a:endParaRPr lang="en-US"/>
           </a:p>
         </p:txBody>
       </p:sp>
@@ -2720,7 +2672,7 @@
           <a:p>
             <a:fld id="{5BCAD085-E8A6-8845-BD4E-CB4CCA059FC4}" type="datetimeFigureOut">
               <a:rPr lang="en-US" smtClean="0"/>
-              <a:t>1/27/13</a:t>
+              <a:t>9/7/2026</a:t>
             </a:fld>
             <a:endParaRPr lang="en-US"/>
           </a:p>
@@ -2823,10 +2775,9 @@
           </a:lstStyle>
           <a:p>
             <a:r>
-              <a:rPr lang="en-US" smtClean="0"/>
+              <a:rPr lang="en-US"/>
               <a:t>Click to edit Master title style</a:t>
             </a:r>
-            <a:endParaRPr lang="en-US"/>
           </a:p>
         </p:txBody>
       </p:sp>
@@ -2943,7 +2894,7 @@
           <a:p>
             <a:pPr lvl="0"/>
             <a:r>
-              <a:rPr lang="en-US" smtClean="0"/>
+              <a:rPr lang="en-US"/>
               <a:t>Click to edit Master text styles</a:t>
             </a:r>
           </a:p>
@@ -2966,7 +2917,7 @@
           <a:p>
             <a:fld id="{5BCAD085-E8A6-8845-BD4E-CB4CCA059FC4}" type="datetimeFigureOut">
               <a:rPr lang="en-US" smtClean="0"/>
-              <a:t>1/27/13</a:t>
+              <a:t>9/7/2026</a:t>
             </a:fld>
             <a:endParaRPr lang="en-US"/>
           </a:p>
@@ -3060,10 +3011,9 @@
           <a:lstStyle/>
           <a:p>
             <a:r>
-              <a:rPr lang="en-US" smtClean="0"/>
+              <a:rPr lang="en-US"/>
               <a:t>Click to edit Master title style</a:t>
             </a:r>
-            <a:endParaRPr lang="en-US"/>
           </a:p>
         </p:txBody>
       </p:sp>
@@ -3117,38 +3067,37 @@
           <a:p>
             <a:pPr lvl="0"/>
             <a:r>
-              <a:rPr lang="en-US" smtClean="0"/>
+              <a:rPr lang="en-US"/>
               <a:t>Click to edit Master text styles</a:t>
             </a:r>
           </a:p>
           <a:p>
             <a:pPr lvl="1"/>
             <a:r>
-              <a:rPr lang="en-US" smtClean="0"/>
+              <a:rPr lang="en-US"/>
               <a:t>Second level</a:t>
             </a:r>
           </a:p>
           <a:p>
             <a:pPr lvl="2"/>
             <a:r>
-              <a:rPr lang="en-US" smtClean="0"/>
+              <a:rPr lang="en-US"/>
               <a:t>Third level</a:t>
             </a:r>
           </a:p>
           <a:p>
             <a:pPr lvl="3"/>
             <a:r>
-              <a:rPr lang="en-US" smtClean="0"/>
+              <a:rPr lang="en-US"/>
               <a:t>Fourth level</a:t>
             </a:r>
           </a:p>
           <a:p>
             <a:pPr lvl="4"/>
             <a:r>
-              <a:rPr lang="en-US" smtClean="0"/>
+              <a:rPr lang="en-US"/>
               <a:t>Fifth level</a:t>
             </a:r>
-            <a:endParaRPr lang="en-US"/>
           </a:p>
         </p:txBody>
       </p:sp>
@@ -3202,38 +3151,37 @@
           <a:p>
             <a:pPr lvl="0"/>
             <a:r>
-              <a:rPr lang="en-US" smtClean="0"/>
+              <a:rPr lang="en-US"/>
               <a:t>Click to edit Master text styles</a:t>
             </a:r>
           </a:p>
           <a:p>
             <a:pPr lvl="1"/>
             <a:r>
-              <a:rPr lang="en-US" smtClean="0"/>
+              <a:rPr lang="en-US"/>
               <a:t>Second level</a:t>
             </a:r>
           </a:p>
           <a:p>
             <a:pPr lvl="2"/>
             <a:r>
-              <a:rPr lang="en-US" smtClean="0"/>
+              <a:rPr lang="en-US"/>
               <a:t>Third level</a:t>
             </a:r>
           </a:p>
           <a:p>
             <a:pPr lvl="3"/>
             <a:r>
-              <a:rPr lang="en-US" smtClean="0"/>
+              <a:rPr lang="en-US"/>
               <a:t>Fourth level</a:t>
             </a:r>
           </a:p>
           <a:p>
             <a:pPr lvl="4"/>
             <a:r>
-              <a:rPr lang="en-US" smtClean="0"/>
+              <a:rPr lang="en-US"/>
               <a:t>Fifth level</a:t>
             </a:r>
-            <a:endParaRPr lang="en-US"/>
           </a:p>
         </p:txBody>
       </p:sp>
@@ -3254,7 +3202,7 @@
           <a:p>
             <a:fld id="{5BCAD085-E8A6-8845-BD4E-CB4CCA059FC4}" type="datetimeFigureOut">
               <a:rPr lang="en-US" smtClean="0"/>
-              <a:t>1/27/13</a:t>
+              <a:t>9/7/2026</a:t>
             </a:fld>
             <a:endParaRPr lang="en-US"/>
           </a:p>
@@ -3352,10 +3300,9 @@
           </a:lstStyle>
           <a:p>
             <a:r>
-              <a:rPr lang="en-US" smtClean="0"/>
+              <a:rPr lang="en-US"/>
               <a:t>Click to edit Master title style</a:t>
             </a:r>
-            <a:endParaRPr lang="en-US"/>
           </a:p>
         </p:txBody>
       </p:sp>
@@ -3418,7 +3365,7 @@
           <a:p>
             <a:pPr lvl="0"/>
             <a:r>
-              <a:rPr lang="en-US" smtClean="0"/>
+              <a:rPr lang="en-US"/>
               <a:t>Click to edit Master text styles</a:t>
             </a:r>
           </a:p>
@@ -3474,38 +3421,37 @@
           <a:p>
             <a:pPr lvl="0"/>
             <a:r>
-              <a:rPr lang="en-US" smtClean="0"/>
+              <a:rPr lang="en-US"/>
               <a:t>Click to edit Master text styles</a:t>
             </a:r>
           </a:p>
           <a:p>
             <a:pPr lvl="1"/>
             <a:r>
-              <a:rPr lang="en-US" smtClean="0"/>
+              <a:rPr lang="en-US"/>
               <a:t>Second level</a:t>
             </a:r>
           </a:p>
           <a:p>
             <a:pPr lvl="2"/>
             <a:r>
-              <a:rPr lang="en-US" smtClean="0"/>
+              <a:rPr lang="en-US"/>
               <a:t>Third level</a:t>
             </a:r>
           </a:p>
           <a:p>
             <a:pPr lvl="3"/>
             <a:r>
-              <a:rPr lang="en-US" smtClean="0"/>
+              <a:rPr lang="en-US"/>
               <a:t>Fourth level</a:t>
             </a:r>
           </a:p>
           <a:p>
             <a:pPr lvl="4"/>
             <a:r>
-              <a:rPr lang="en-US" smtClean="0"/>
+              <a:rPr lang="en-US"/>
               <a:t>Fifth level</a:t>
             </a:r>
-            <a:endParaRPr lang="en-US"/>
           </a:p>
         </p:txBody>
       </p:sp>
@@ -3568,7 +3514,7 @@
           <a:p>
             <a:pPr lvl="0"/>
             <a:r>
-              <a:rPr lang="en-US" smtClean="0"/>
+              <a:rPr lang="en-US"/>
               <a:t>Click to edit Master text styles</a:t>
             </a:r>
           </a:p>
@@ -3624,38 +3570,37 @@
           <a:p>
             <a:pPr lvl="0"/>
             <a:r>
-              <a:rPr lang="en-US" smtClean="0"/>
+              <a:rPr lang="en-US"/>
               <a:t>Click to edit Master text styles</a:t>
             </a:r>
           </a:p>
           <a:p>
             <a:pPr lvl="1"/>
             <a:r>
-              <a:rPr lang="en-US" smtClean="0"/>
+              <a:rPr lang="en-US"/>
               <a:t>Second level</a:t>
             </a:r>
           </a:p>
           <a:p>
             <a:pPr lvl="2"/>
             <a:r>
-              <a:rPr lang="en-US" smtClean="0"/>
+              <a:rPr lang="en-US"/>
               <a:t>Third level</a:t>
             </a:r>
           </a:p>
           <a:p>
             <a:pPr lvl="3"/>
             <a:r>
-              <a:rPr lang="en-US" smtClean="0"/>
+              <a:rPr lang="en-US"/>
               <a:t>Fourth level</a:t>
             </a:r>
           </a:p>
           <a:p>
             <a:pPr lvl="4"/>
             <a:r>
-              <a:rPr lang="en-US" smtClean="0"/>
+              <a:rPr lang="en-US"/>
               <a:t>Fifth level</a:t>
             </a:r>
-            <a:endParaRPr lang="en-US"/>
           </a:p>
         </p:txBody>
       </p:sp>
@@ -3676,7 +3621,7 @@
           <a:p>
             <a:fld id="{5BCAD085-E8A6-8845-BD4E-CB4CCA059FC4}" type="datetimeFigureOut">
               <a:rPr lang="en-US" smtClean="0"/>
-              <a:t>1/27/13</a:t>
+              <a:t>9/7/2026</a:t>
             </a:fld>
             <a:endParaRPr lang="en-US"/>
           </a:p>
@@ -3770,10 +3715,9 @@
           <a:lstStyle/>
           <a:p>
             <a:r>
-              <a:rPr lang="en-US" smtClean="0"/>
+              <a:rPr lang="en-US"/>
               <a:t>Click to edit Master title style</a:t>
             </a:r>
-            <a:endParaRPr lang="en-US"/>
           </a:p>
         </p:txBody>
       </p:sp>
@@ -3794,7 +3738,7 @@
           <a:p>
             <a:fld id="{5BCAD085-E8A6-8845-BD4E-CB4CCA059FC4}" type="datetimeFigureOut">
               <a:rPr lang="en-US" smtClean="0"/>
-              <a:t>1/27/13</a:t>
+              <a:t>9/7/2026</a:t>
             </a:fld>
             <a:endParaRPr lang="en-US"/>
           </a:p>
@@ -3889,7 +3833,7 @@
           <a:p>
             <a:fld id="{5BCAD085-E8A6-8845-BD4E-CB4CCA059FC4}" type="datetimeFigureOut">
               <a:rPr lang="en-US" smtClean="0"/>
-              <a:t>1/27/13</a:t>
+              <a:t>9/7/2026</a:t>
             </a:fld>
             <a:endParaRPr lang="en-US"/>
           </a:p>
@@ -3992,10 +3936,9 @@
           </a:lstStyle>
           <a:p>
             <a:r>
-              <a:rPr lang="en-US" smtClean="0"/>
+              <a:rPr lang="en-US"/>
               <a:t>Click to edit Master title style</a:t>
             </a:r>
-            <a:endParaRPr lang="en-US"/>
           </a:p>
         </p:txBody>
       </p:sp>
@@ -4049,38 +3992,37 @@
           <a:p>
             <a:pPr lvl="0"/>
             <a:r>
-              <a:rPr lang="en-US" smtClean="0"/>
+              <a:rPr lang="en-US"/>
               <a:t>Click to edit Master text styles</a:t>
             </a:r>
           </a:p>
           <a:p>
             <a:pPr lvl="1"/>
             <a:r>
-              <a:rPr lang="en-US" smtClean="0"/>
+              <a:rPr lang="en-US"/>
               <a:t>Second level</a:t>
             </a:r>
           </a:p>
           <a:p>
             <a:pPr lvl="2"/>
             <a:r>
-              <a:rPr lang="en-US" smtClean="0"/>
+              <a:rPr lang="en-US"/>
               <a:t>Third level</a:t>
             </a:r>
           </a:p>
           <a:p>
             <a:pPr lvl="3"/>
             <a:r>
-              <a:rPr lang="en-US" smtClean="0"/>
+              <a:rPr lang="en-US"/>
               <a:t>Fourth level</a:t>
             </a:r>
           </a:p>
           <a:p>
             <a:pPr lvl="4"/>
             <a:r>
-              <a:rPr lang="en-US" smtClean="0"/>
+              <a:rPr lang="en-US"/>
               <a:t>Fifth level</a:t>
             </a:r>
-            <a:endParaRPr lang="en-US"/>
           </a:p>
         </p:txBody>
       </p:sp>
@@ -4143,7 +4085,7 @@
           <a:p>
             <a:pPr lvl="0"/>
             <a:r>
-              <a:rPr lang="en-US" smtClean="0"/>
+              <a:rPr lang="en-US"/>
               <a:t>Click to edit Master text styles</a:t>
             </a:r>
           </a:p>
@@ -4166,7 +4108,7 @@
           <a:p>
             <a:fld id="{5BCAD085-E8A6-8845-BD4E-CB4CCA059FC4}" type="datetimeFigureOut">
               <a:rPr lang="en-US" smtClean="0"/>
-              <a:t>1/27/13</a:t>
+              <a:t>9/7/2026</a:t>
             </a:fld>
             <a:endParaRPr lang="en-US"/>
           </a:p>
@@ -4269,10 +4211,9 @@
           </a:lstStyle>
           <a:p>
             <a:r>
-              <a:rPr lang="en-US" smtClean="0"/>
+              <a:rPr lang="en-US"/>
               <a:t>Click to edit Master title style</a:t>
             </a:r>
-            <a:endParaRPr lang="en-US"/>
           </a:p>
         </p:txBody>
       </p:sp>
@@ -4396,7 +4337,7 @@
           <a:p>
             <a:pPr lvl="0"/>
             <a:r>
-              <a:rPr lang="en-US" smtClean="0"/>
+              <a:rPr lang="en-US"/>
               <a:t>Click to edit Master text styles</a:t>
             </a:r>
           </a:p>
@@ -4419,7 +4360,7 @@
           <a:p>
             <a:fld id="{5BCAD085-E8A6-8845-BD4E-CB4CCA059FC4}" type="datetimeFigureOut">
               <a:rPr lang="en-US" smtClean="0"/>
-              <a:t>1/27/13</a:t>
+              <a:t>9/7/2026</a:t>
             </a:fld>
             <a:endParaRPr lang="en-US"/>
           </a:p>
@@ -4528,10 +4469,9 @@
           <a:lstStyle/>
           <a:p>
             <a:r>
-              <a:rPr lang="en-US" smtClean="0"/>
+              <a:rPr lang="en-US"/>
               <a:t>Click to edit Master title style</a:t>
             </a:r>
-            <a:endParaRPr lang="en-US"/>
           </a:p>
         </p:txBody>
       </p:sp>
@@ -4562,38 +4502,37 @@
           <a:p>
             <a:pPr lvl="0"/>
             <a:r>
-              <a:rPr lang="en-US" smtClean="0"/>
+              <a:rPr lang="en-US"/>
               <a:t>Click to edit Master text styles</a:t>
             </a:r>
           </a:p>
           <a:p>
             <a:pPr lvl="1"/>
             <a:r>
-              <a:rPr lang="en-US" smtClean="0"/>
+              <a:rPr lang="en-US"/>
               <a:t>Second level</a:t>
             </a:r>
           </a:p>
           <a:p>
             <a:pPr lvl="2"/>
             <a:r>
-              <a:rPr lang="en-US" smtClean="0"/>
+              <a:rPr lang="en-US"/>
               <a:t>Third level</a:t>
             </a:r>
           </a:p>
           <a:p>
             <a:pPr lvl="3"/>
             <a:r>
-              <a:rPr lang="en-US" smtClean="0"/>
+              <a:rPr lang="en-US"/>
               <a:t>Fourth level</a:t>
             </a:r>
           </a:p>
           <a:p>
             <a:pPr lvl="4"/>
             <a:r>
-              <a:rPr lang="en-US" smtClean="0"/>
+              <a:rPr lang="en-US"/>
               <a:t>Fifth level</a:t>
             </a:r>
-            <a:endParaRPr lang="en-US"/>
           </a:p>
         </p:txBody>
       </p:sp>
@@ -4632,7 +4571,7 @@
           <a:p>
             <a:fld id="{5BCAD085-E8A6-8845-BD4E-CB4CCA059FC4}" type="datetimeFigureOut">
               <a:rPr lang="en-US" smtClean="0"/>
-              <a:t>1/27/13</a:t>
+              <a:t>9/7/2026</a:t>
             </a:fld>
             <a:endParaRPr lang="en-US"/>
           </a:p>
@@ -4991,7 +4930,7 @@
 </file>
 
 <file path=ppt/slides/slide1.xml><?xml version="1.0" encoding="utf-8"?>
-<p:sld xmlns:a="http://schemas.openxmlformats.org/drawingml/2006/main" xmlns:p="http://schemas.openxmlformats.org/presentationml/2006/main" xmlns:r="http://schemas.openxmlformats.org/officeDocument/2006/relationships">
+<p:sld xmlns:a="http://schemas.openxmlformats.org/drawingml/2006/main" xmlns:r="http://schemas.openxmlformats.org/officeDocument/2006/relationships" xmlns:p="http://schemas.openxmlformats.org/presentationml/2006/main">
   <p:cSld>
     <p:bg>
       <p:bgPr>
@@ -5007,7 +4946,14 @@
         <p:cNvGrpSpPr/>
         <p:nvPr/>
       </p:nvGrpSpPr>
-      <p:grpSpPr/>
+      <p:grpSpPr>
+        <a:xfrm>
+          <a:off x="0" y="0"/>
+          <a:ext cx="0" cy="0"/>
+          <a:chOff x="0" y="0"/>
+          <a:chExt cx="0" cy="0"/>
+        </a:xfrm>
+      </p:grpSpPr>
       <p:sp>
         <p:nvSpPr>
           <p:cNvPr id="2" name="Parallelogram 1"/>
@@ -5051,6 +4997,7 @@
           <a:lstStyle/>
           <a:p>
             <a:pPr algn="ctr"/>
+            <a:endParaRPr/>
           </a:p>
         </p:txBody>
       </p:sp>
@@ -5097,6 +5044,7 @@
           <a:lstStyle/>
           <a:p>
             <a:pPr algn="ctr"/>
+            <a:endParaRPr/>
           </a:p>
         </p:txBody>
       </p:sp>
@@ -5143,6 +5091,7 @@
           <a:lstStyle/>
           <a:p>
             <a:pPr algn="ctr"/>
+            <a:endParaRPr/>
           </a:p>
         </p:txBody>
       </p:sp>
@@ -5163,7 +5112,7 @@
           <a:noFill/>
         </p:spPr>
         <p:txBody>
-          <a:bodyPr wrap="square" anchor="t" lIns="0" rIns="0" tIns="0" bIns="0">
+          <a:bodyPr wrap="square" lIns="0" tIns="0" rIns="0" bIns="0" anchor="t">
             <a:spAutoFit/>
           </a:bodyPr>
           <a:lstStyle/>
@@ -5220,7 +5169,7 @@
           <a:noFill/>
         </p:spPr>
         <p:txBody>
-          <a:bodyPr wrap="square" anchor="t" lIns="0" rIns="0" tIns="0" bIns="0">
+          <a:bodyPr wrap="square" lIns="0" tIns="0" rIns="0" bIns="0" anchor="t">
             <a:spAutoFit/>
           </a:bodyPr>
           <a:lstStyle/>
@@ -5273,7 +5222,7 @@
           <a:noFill/>
         </p:spPr>
         <p:txBody>
-          <a:bodyPr wrap="square" anchor="t" lIns="0" rIns="0" tIns="0" bIns="0">
+          <a:bodyPr wrap="square" lIns="0" tIns="0" rIns="0" bIns="0" anchor="t">
             <a:spAutoFit/>
           </a:bodyPr>
           <a:lstStyle/>
@@ -5301,7 +5250,7 @@
           <p:nvPr/>
         </p:nvPicPr>
         <p:blipFill>
-          <a:blip r:embed="rId2"/>
+          <a:blip r:embed="rId3"/>
           <a:stretch>
             <a:fillRect/>
           </a:stretch>
@@ -5325,7 +5274,7 @@
 </file>
 
 <file path=ppt/slides/slide10.xml><?xml version="1.0" encoding="utf-8"?>
-<p:sld xmlns:a="http://schemas.openxmlformats.org/drawingml/2006/main" xmlns:p="http://schemas.openxmlformats.org/presentationml/2006/main" xmlns:r="http://schemas.openxmlformats.org/officeDocument/2006/relationships">
+<p:sld xmlns:a="http://schemas.openxmlformats.org/drawingml/2006/main" xmlns:r="http://schemas.openxmlformats.org/officeDocument/2006/relationships" xmlns:p="http://schemas.openxmlformats.org/presentationml/2006/main">
   <p:cSld>
     <p:bg>
       <p:bgPr>
@@ -5341,7 +5290,14 @@
         <p:cNvGrpSpPr/>
         <p:nvPr/>
       </p:nvGrpSpPr>
-      <p:grpSpPr/>
+      <p:grpSpPr>
+        <a:xfrm>
+          <a:off x="0" y="0"/>
+          <a:ext cx="0" cy="0"/>
+          <a:chOff x="0" y="0"/>
+          <a:chExt cx="0" cy="0"/>
+        </a:xfrm>
+      </p:grpSpPr>
       <p:sp>
         <p:nvSpPr>
           <p:cNvPr id="2" name="TextBox 1"/>
@@ -5359,7 +5315,7 @@
           <a:noFill/>
         </p:spPr>
         <p:txBody>
-          <a:bodyPr wrap="square" anchor="t" lIns="0" rIns="0" tIns="0" bIns="0">
+          <a:bodyPr wrap="square" lIns="0" tIns="0" rIns="0" bIns="0" anchor="t">
             <a:spAutoFit/>
           </a:bodyPr>
           <a:lstStyle/>
@@ -5419,6 +5375,7 @@
           <a:lstStyle/>
           <a:p>
             <a:pPr algn="ctr"/>
+            <a:endParaRPr/>
           </a:p>
         </p:txBody>
       </p:sp>
@@ -5439,7 +5396,7 @@
           <a:noFill/>
         </p:spPr>
         <p:txBody>
-          <a:bodyPr wrap="square" anchor="t" lIns="0" rIns="0" tIns="0" bIns="0">
+          <a:bodyPr wrap="square" lIns="0" tIns="0" rIns="0" bIns="0" anchor="t">
             <a:spAutoFit/>
           </a:bodyPr>
           <a:lstStyle/>
@@ -5471,7 +5428,7 @@
           <p:nvPr/>
         </p:nvPicPr>
         <p:blipFill>
-          <a:blip r:embed="rId2"/>
+          <a:blip r:embed="rId3"/>
           <a:stretch>
             <a:fillRect/>
           </a:stretch>
@@ -5503,7 +5460,7 @@
           <a:noFill/>
         </p:spPr>
         <p:txBody>
-          <a:bodyPr wrap="square" anchor="t" lIns="0" rIns="0" tIns="0" bIns="0">
+          <a:bodyPr wrap="square" lIns="0" tIns="0" rIns="0" bIns="0" anchor="t">
             <a:spAutoFit/>
           </a:bodyPr>
           <a:lstStyle/>
@@ -5536,7 +5493,7 @@
         </p:xfrm>
         <a:graphic>
           <a:graphicData uri="http://schemas.openxmlformats.org/drawingml/2006/chart">
-            <c:chart xmlns:c="http://schemas.openxmlformats.org/drawingml/2006/chart" r:id="rId3"/>
+            <c:chart xmlns:c="http://schemas.openxmlformats.org/drawingml/2006/chart" xmlns:r="http://schemas.openxmlformats.org/officeDocument/2006/relationships" r:id="rId4"/>
           </a:graphicData>
         </a:graphic>
       </p:graphicFrame>
@@ -5557,7 +5514,7 @@
           <a:noFill/>
         </p:spPr>
         <p:txBody>
-          <a:bodyPr wrap="square" anchor="t" lIns="0" rIns="0" tIns="0" bIns="0">
+          <a:bodyPr wrap="square" lIns="0" tIns="0" rIns="0" bIns="0" anchor="t">
             <a:spAutoFit/>
           </a:bodyPr>
           <a:lstStyle/>
@@ -5634,6 +5591,7 @@
           <a:lstStyle/>
           <a:p>
             <a:pPr algn="ctr"/>
+            <a:endParaRPr/>
           </a:p>
         </p:txBody>
       </p:sp>
@@ -5654,7 +5612,7 @@
           <a:noFill/>
         </p:spPr>
         <p:txBody>
-          <a:bodyPr wrap="square" anchor="ctr" lIns="0" rIns="0" tIns="0" bIns="0">
+          <a:bodyPr wrap="square" lIns="0" tIns="0" rIns="0" bIns="0" anchor="ctr">
             <a:spAutoFit/>
           </a:bodyPr>
           <a:lstStyle/>
@@ -5714,6 +5672,7 @@
           <a:lstStyle/>
           <a:p>
             <a:pPr algn="ctr"/>
+            <a:endParaRPr/>
           </a:p>
         </p:txBody>
       </p:sp>
@@ -5758,6 +5717,7 @@
           <a:lstStyle/>
           <a:p>
             <a:pPr algn="ctr"/>
+            <a:endParaRPr/>
           </a:p>
         </p:txBody>
       </p:sp>
@@ -5778,7 +5738,7 @@
           <a:noFill/>
         </p:spPr>
         <p:txBody>
-          <a:bodyPr wrap="square" anchor="ctr" lIns="0" rIns="0" tIns="0" bIns="0">
+          <a:bodyPr wrap="square" lIns="0" tIns="0" rIns="0" bIns="0" anchor="ctr">
             <a:spAutoFit/>
           </a:bodyPr>
           <a:lstStyle/>
@@ -5814,7 +5774,7 @@
           <a:noFill/>
         </p:spPr>
         <p:txBody>
-          <a:bodyPr wrap="square" anchor="ctr" lIns="0" rIns="0" tIns="0" bIns="0">
+          <a:bodyPr wrap="square" lIns="0" tIns="0" rIns="0" bIns="0" anchor="ctr">
             <a:spAutoFit/>
           </a:bodyPr>
           <a:lstStyle/>
@@ -5878,6 +5838,7 @@
           <a:lstStyle/>
           <a:p>
             <a:pPr algn="ctr"/>
+            <a:endParaRPr/>
           </a:p>
         </p:txBody>
       </p:sp>
@@ -5922,6 +5883,7 @@
           <a:lstStyle/>
           <a:p>
             <a:pPr algn="ctr"/>
+            <a:endParaRPr/>
           </a:p>
         </p:txBody>
       </p:sp>
@@ -5942,7 +5904,7 @@
           <a:noFill/>
         </p:spPr>
         <p:txBody>
-          <a:bodyPr wrap="square" anchor="ctr" lIns="0" rIns="0" tIns="0" bIns="0">
+          <a:bodyPr wrap="square" lIns="0" tIns="0" rIns="0" bIns="0" anchor="ctr">
             <a:spAutoFit/>
           </a:bodyPr>
           <a:lstStyle/>
@@ -5978,7 +5940,7 @@
           <a:noFill/>
         </p:spPr>
         <p:txBody>
-          <a:bodyPr wrap="square" anchor="ctr" lIns="0" rIns="0" tIns="0" bIns="0">
+          <a:bodyPr wrap="square" lIns="0" tIns="0" rIns="0" bIns="0" anchor="ctr">
             <a:spAutoFit/>
           </a:bodyPr>
           <a:lstStyle/>
@@ -6042,6 +6004,7 @@
           <a:lstStyle/>
           <a:p>
             <a:pPr algn="ctr"/>
+            <a:endParaRPr/>
           </a:p>
         </p:txBody>
       </p:sp>
@@ -6086,6 +6049,7 @@
           <a:lstStyle/>
           <a:p>
             <a:pPr algn="ctr"/>
+            <a:endParaRPr/>
           </a:p>
         </p:txBody>
       </p:sp>
@@ -6106,7 +6070,7 @@
           <a:noFill/>
         </p:spPr>
         <p:txBody>
-          <a:bodyPr wrap="square" anchor="ctr" lIns="0" rIns="0" tIns="0" bIns="0">
+          <a:bodyPr wrap="square" lIns="0" tIns="0" rIns="0" bIns="0" anchor="ctr">
             <a:spAutoFit/>
           </a:bodyPr>
           <a:lstStyle/>
@@ -6142,7 +6106,7 @@
           <a:noFill/>
         </p:spPr>
         <p:txBody>
-          <a:bodyPr wrap="square" anchor="ctr" lIns="0" rIns="0" tIns="0" bIns="0">
+          <a:bodyPr wrap="square" lIns="0" tIns="0" rIns="0" bIns="0" anchor="ctr">
             <a:spAutoFit/>
           </a:bodyPr>
           <a:lstStyle/>
@@ -6206,6 +6170,7 @@
           <a:lstStyle/>
           <a:p>
             <a:pPr algn="ctr"/>
+            <a:endParaRPr/>
           </a:p>
         </p:txBody>
       </p:sp>
@@ -6250,6 +6215,7 @@
           <a:lstStyle/>
           <a:p>
             <a:pPr algn="ctr"/>
+            <a:endParaRPr/>
           </a:p>
         </p:txBody>
       </p:sp>
@@ -6270,7 +6236,7 @@
           <a:noFill/>
         </p:spPr>
         <p:txBody>
-          <a:bodyPr wrap="square" anchor="ctr" lIns="0" rIns="0" tIns="0" bIns="0">
+          <a:bodyPr wrap="square" lIns="0" tIns="0" rIns="0" bIns="0" anchor="ctr">
             <a:spAutoFit/>
           </a:bodyPr>
           <a:lstStyle/>
@@ -6306,7 +6272,7 @@
           <a:noFill/>
         </p:spPr>
         <p:txBody>
-          <a:bodyPr wrap="square" anchor="ctr" lIns="0" rIns="0" tIns="0" bIns="0">
+          <a:bodyPr wrap="square" lIns="0" tIns="0" rIns="0" bIns="0" anchor="ctr">
             <a:spAutoFit/>
           </a:bodyPr>
           <a:lstStyle/>
@@ -6338,7 +6304,7 @@
 </file>
 
 <file path=ppt/slides/slide11.xml><?xml version="1.0" encoding="utf-8"?>
-<p:sld xmlns:a="http://schemas.openxmlformats.org/drawingml/2006/main" xmlns:p="http://schemas.openxmlformats.org/presentationml/2006/main" xmlns:r="http://schemas.openxmlformats.org/officeDocument/2006/relationships">
+<p:sld xmlns:a="http://schemas.openxmlformats.org/drawingml/2006/main" xmlns:r="http://schemas.openxmlformats.org/officeDocument/2006/relationships" xmlns:p="http://schemas.openxmlformats.org/presentationml/2006/main">
   <p:cSld>
     <p:bg>
       <p:bgPr>
@@ -6354,7 +6320,14 @@
         <p:cNvGrpSpPr/>
         <p:nvPr/>
       </p:nvGrpSpPr>
-      <p:grpSpPr/>
+      <p:grpSpPr>
+        <a:xfrm>
+          <a:off x="0" y="0"/>
+          <a:ext cx="0" cy="0"/>
+          <a:chOff x="0" y="0"/>
+          <a:chExt cx="0" cy="0"/>
+        </a:xfrm>
+      </p:grpSpPr>
       <p:sp>
         <p:nvSpPr>
           <p:cNvPr id="2" name="TextBox 1"/>
@@ -6372,7 +6345,7 @@
           <a:noFill/>
         </p:spPr>
         <p:txBody>
-          <a:bodyPr wrap="square" anchor="t" lIns="0" rIns="0" tIns="0" bIns="0">
+          <a:bodyPr wrap="square" lIns="0" tIns="0" rIns="0" bIns="0" anchor="t">
             <a:spAutoFit/>
           </a:bodyPr>
           <a:lstStyle/>
@@ -6432,6 +6405,7 @@
           <a:lstStyle/>
           <a:p>
             <a:pPr algn="ctr"/>
+            <a:endParaRPr/>
           </a:p>
         </p:txBody>
       </p:sp>
@@ -6452,7 +6426,7 @@
           <a:noFill/>
         </p:spPr>
         <p:txBody>
-          <a:bodyPr wrap="square" anchor="t" lIns="0" rIns="0" tIns="0" bIns="0">
+          <a:bodyPr wrap="square" lIns="0" tIns="0" rIns="0" bIns="0" anchor="t">
             <a:spAutoFit/>
           </a:bodyPr>
           <a:lstStyle/>
@@ -6484,7 +6458,7 @@
           <p:nvPr/>
         </p:nvPicPr>
         <p:blipFill>
-          <a:blip r:embed="rId2"/>
+          <a:blip r:embed="rId3"/>
           <a:stretch>
             <a:fillRect/>
           </a:stretch>
@@ -6516,7 +6490,7 @@
           <a:noFill/>
         </p:spPr>
         <p:txBody>
-          <a:bodyPr wrap="square" anchor="t" lIns="0" rIns="0" tIns="0" bIns="0">
+          <a:bodyPr wrap="square" lIns="0" tIns="0" rIns="0" bIns="0" anchor="t">
             <a:spAutoFit/>
           </a:bodyPr>
           <a:lstStyle/>
@@ -6576,6 +6550,7 @@
           <a:lstStyle/>
           <a:p>
             <a:pPr algn="ctr"/>
+            <a:endParaRPr/>
           </a:p>
         </p:txBody>
       </p:sp>
@@ -6588,7 +6563,7 @@
           <p:nvPr/>
         </p:nvPicPr>
         <p:blipFill>
-          <a:blip r:embed="rId3"/>
+          <a:blip r:embed="rId4"/>
           <a:stretch>
             <a:fillRect/>
           </a:stretch>
@@ -6620,7 +6595,7 @@
           <a:noFill/>
         </p:spPr>
         <p:txBody>
-          <a:bodyPr wrap="square" anchor="t" lIns="0" rIns="0" tIns="0" bIns="0">
+          <a:bodyPr wrap="square" lIns="0" tIns="0" rIns="0" bIns="0" anchor="t">
             <a:spAutoFit/>
           </a:bodyPr>
           <a:lstStyle/>
@@ -6680,6 +6655,7 @@
           <a:lstStyle/>
           <a:p>
             <a:pPr algn="ctr"/>
+            <a:endParaRPr/>
           </a:p>
         </p:txBody>
       </p:sp>
@@ -6692,7 +6668,7 @@
           <p:nvPr/>
         </p:nvPicPr>
         <p:blipFill>
-          <a:blip r:embed="rId4"/>
+          <a:blip r:embed="rId5"/>
           <a:stretch>
             <a:fillRect/>
           </a:stretch>
@@ -6724,7 +6700,7 @@
           <a:noFill/>
         </p:spPr>
         <p:txBody>
-          <a:bodyPr wrap="square" anchor="t" lIns="0" rIns="0" tIns="0" bIns="0">
+          <a:bodyPr wrap="square" lIns="0" tIns="0" rIns="0" bIns="0" anchor="t">
             <a:spAutoFit/>
           </a:bodyPr>
           <a:lstStyle/>
@@ -6760,7 +6736,7 @@
           <a:noFill/>
         </p:spPr>
         <p:txBody>
-          <a:bodyPr wrap="square" anchor="t" lIns="0" rIns="0" tIns="0" bIns="0">
+          <a:bodyPr wrap="square" lIns="0" tIns="0" rIns="0" bIns="0" anchor="t">
             <a:spAutoFit/>
           </a:bodyPr>
           <a:lstStyle/>
@@ -6820,6 +6796,7 @@
           <a:lstStyle/>
           <a:p>
             <a:pPr algn="ctr"/>
+            <a:endParaRPr/>
           </a:p>
         </p:txBody>
       </p:sp>
@@ -6840,7 +6817,7 @@
           <a:noFill/>
         </p:spPr>
         <p:txBody>
-          <a:bodyPr wrap="square" anchor="ctr" lIns="0" rIns="0" tIns="0" bIns="0">
+          <a:bodyPr wrap="square" lIns="0" tIns="0" rIns="0" bIns="0" anchor="ctr">
             <a:spAutoFit/>
           </a:bodyPr>
           <a:lstStyle/>
@@ -6868,7 +6845,7 @@
 </file>
 
 <file path=ppt/slides/slide12.xml><?xml version="1.0" encoding="utf-8"?>
-<p:sld xmlns:a="http://schemas.openxmlformats.org/drawingml/2006/main" xmlns:p="http://schemas.openxmlformats.org/presentationml/2006/main" xmlns:r="http://schemas.openxmlformats.org/officeDocument/2006/relationships">
+<p:sld xmlns:a="http://schemas.openxmlformats.org/drawingml/2006/main" xmlns:r="http://schemas.openxmlformats.org/officeDocument/2006/relationships" xmlns:p="http://schemas.openxmlformats.org/presentationml/2006/main">
   <p:cSld>
     <p:bg>
       <p:bgPr>
@@ -6884,7 +6861,14 @@
         <p:cNvGrpSpPr/>
         <p:nvPr/>
       </p:nvGrpSpPr>
-      <p:grpSpPr/>
+      <p:grpSpPr>
+        <a:xfrm>
+          <a:off x="0" y="0"/>
+          <a:ext cx="0" cy="0"/>
+          <a:chOff x="0" y="0"/>
+          <a:chExt cx="0" cy="0"/>
+        </a:xfrm>
+      </p:grpSpPr>
       <p:sp>
         <p:nvSpPr>
           <p:cNvPr id="2" name="TextBox 1"/>
@@ -6902,7 +6886,7 @@
           <a:noFill/>
         </p:spPr>
         <p:txBody>
-          <a:bodyPr wrap="square" anchor="t" lIns="0" rIns="0" tIns="0" bIns="0">
+          <a:bodyPr wrap="square" lIns="0" tIns="0" rIns="0" bIns="0" anchor="t">
             <a:spAutoFit/>
           </a:bodyPr>
           <a:lstStyle/>
@@ -6962,6 +6946,7 @@
           <a:lstStyle/>
           <a:p>
             <a:pPr algn="ctr"/>
+            <a:endParaRPr/>
           </a:p>
         </p:txBody>
       </p:sp>
@@ -6982,7 +6967,7 @@
           <a:noFill/>
         </p:spPr>
         <p:txBody>
-          <a:bodyPr wrap="square" anchor="t" lIns="0" rIns="0" tIns="0" bIns="0">
+          <a:bodyPr wrap="square" lIns="0" tIns="0" rIns="0" bIns="0" anchor="t">
             <a:spAutoFit/>
           </a:bodyPr>
           <a:lstStyle/>
@@ -7014,7 +6999,7 @@
           <p:nvPr/>
         </p:nvPicPr>
         <p:blipFill>
-          <a:blip r:embed="rId2"/>
+          <a:blip r:embed="rId3"/>
           <a:stretch>
             <a:fillRect/>
           </a:stretch>
@@ -7046,7 +7031,7 @@
           <a:noFill/>
         </p:spPr>
         <p:txBody>
-          <a:bodyPr wrap="square" anchor="t" lIns="0" rIns="0" tIns="0" bIns="0">
+          <a:bodyPr wrap="square" lIns="0" tIns="0" rIns="0" bIns="0" anchor="t">
             <a:spAutoFit/>
           </a:bodyPr>
           <a:lstStyle/>
@@ -7106,6 +7091,7 @@
           <a:lstStyle/>
           <a:p>
             <a:pPr algn="ctr"/>
+            <a:endParaRPr/>
           </a:p>
         </p:txBody>
       </p:sp>
@@ -7126,7 +7112,7 @@
           <a:noFill/>
         </p:spPr>
         <p:txBody>
-          <a:bodyPr wrap="square" anchor="ctr" lIns="0" rIns="0" tIns="0" bIns="0">
+          <a:bodyPr wrap="square" lIns="0" tIns="0" rIns="0" bIns="0" anchor="ctr">
             <a:spAutoFit/>
           </a:bodyPr>
           <a:lstStyle/>
@@ -7186,6 +7172,7 @@
           <a:lstStyle/>
           <a:p>
             <a:pPr algn="ctr"/>
+            <a:endParaRPr/>
           </a:p>
         </p:txBody>
       </p:sp>
@@ -7206,7 +7193,7 @@
           <a:noFill/>
         </p:spPr>
         <p:txBody>
-          <a:bodyPr wrap="square" anchor="t" lIns="0" rIns="0" tIns="0" bIns="0">
+          <a:bodyPr wrap="square" lIns="0" tIns="0" rIns="0" bIns="0" anchor="t">
             <a:spAutoFit/>
           </a:bodyPr>
           <a:lstStyle/>
@@ -7343,6 +7330,7 @@
           <a:lstStyle/>
           <a:p>
             <a:pPr algn="ctr"/>
+            <a:endParaRPr/>
           </a:p>
         </p:txBody>
       </p:sp>
@@ -7363,7 +7351,7 @@
           <a:noFill/>
         </p:spPr>
         <p:txBody>
-          <a:bodyPr wrap="square" anchor="ctr" lIns="0" rIns="0" tIns="0" bIns="0">
+          <a:bodyPr wrap="square" lIns="0" tIns="0" rIns="0" bIns="0" anchor="ctr">
             <a:spAutoFit/>
           </a:bodyPr>
           <a:lstStyle/>
@@ -7423,6 +7411,7 @@
           <a:lstStyle/>
           <a:p>
             <a:pPr algn="ctr"/>
+            <a:endParaRPr/>
           </a:p>
         </p:txBody>
       </p:sp>
@@ -7443,7 +7432,7 @@
           <a:noFill/>
         </p:spPr>
         <p:txBody>
-          <a:bodyPr wrap="square" anchor="t" lIns="0" rIns="0" tIns="0" bIns="0">
+          <a:bodyPr wrap="square" lIns="0" tIns="0" rIns="0" bIns="0" anchor="t">
             <a:spAutoFit/>
           </a:bodyPr>
           <a:lstStyle/>
@@ -7464,17 +7453,7 @@
                 <a:latin typeface="Malgun Gothic"/>
                 <a:ea typeface="맑은 고딕"/>
               </a:rPr>
-              <a:t>■ </a:t>
-            </a:r>
-            <a:r>
-              <a:rPr sz="950" b="0" i="0">
-                <a:solidFill>
-                  <a:srgbClr val="000000"/>
-                </a:solidFill>
-                <a:latin typeface="Malgun Gothic"/>
-                <a:ea typeface="맑은 고딕"/>
-              </a:rPr>
-              <a:t>절대값 기반 관개 의사결정 — 논콩 임계값 캘리브레이션 필요</a:t>
+              <a:t>■ 절대값 기반 관개 의사결정 — 논콩 임계값 캘리브레이션 필요</a:t>
             </a:r>
           </a:p>
           <a:p>
@@ -7494,17 +7473,7 @@
                 <a:latin typeface="Malgun Gothic"/>
                 <a:ea typeface="맑은 고딕"/>
               </a:rPr>
-              <a:t>■ </a:t>
-            </a:r>
-            <a:r>
-              <a:rPr sz="950" b="0" i="0">
-                <a:solidFill>
-                  <a:srgbClr val="000000"/>
-                </a:solidFill>
-                <a:latin typeface="Malgun Gothic"/>
-                <a:ea typeface="맑은 고딕"/>
-              </a:rPr>
-              <a:t>필지 간·날짜 간 절대 비교 — NWSB(기상 연동) 도입 시</a:t>
+              <a:t>■ 필지 간·날짜 간 절대 비교 — NWSB(기상 연동) 도입 시</a:t>
             </a:r>
           </a:p>
         </p:txBody>
@@ -7550,6 +7519,7 @@
           <a:lstStyle/>
           <a:p>
             <a:pPr algn="ctr"/>
+            <a:endParaRPr/>
           </a:p>
         </p:txBody>
       </p:sp>
@@ -7570,7 +7540,7 @@
           <a:noFill/>
         </p:spPr>
         <p:txBody>
-          <a:bodyPr wrap="square" anchor="ctr" lIns="0" rIns="0" tIns="0" bIns="0">
+          <a:bodyPr wrap="square" lIns="0" tIns="0" rIns="0" bIns="0" anchor="ctr">
             <a:spAutoFit/>
           </a:bodyPr>
           <a:lstStyle/>
@@ -7630,6 +7600,7 @@
           <a:lstStyle/>
           <a:p>
             <a:pPr algn="ctr"/>
+            <a:endParaRPr/>
           </a:p>
         </p:txBody>
       </p:sp>
@@ -7650,7 +7621,7 @@
           <a:noFill/>
         </p:spPr>
         <p:txBody>
-          <a:bodyPr wrap="square" anchor="t" lIns="0" rIns="0" tIns="0" bIns="0">
+          <a:bodyPr wrap="square" lIns="0" tIns="0" rIns="0" bIns="0" anchor="t">
             <a:spAutoFit/>
           </a:bodyPr>
           <a:lstStyle/>
@@ -7787,6 +7758,7 @@
           <a:lstStyle/>
           <a:p>
             <a:pPr algn="ctr"/>
+            <a:endParaRPr/>
           </a:p>
         </p:txBody>
       </p:sp>
@@ -7807,7 +7779,7 @@
           <a:noFill/>
         </p:spPr>
         <p:txBody>
-          <a:bodyPr wrap="square" anchor="ctr" lIns="0" rIns="0" tIns="0" bIns="0">
+          <a:bodyPr wrap="square" lIns="0" tIns="0" rIns="0" bIns="0" anchor="ctr">
             <a:spAutoFit/>
           </a:bodyPr>
           <a:lstStyle/>
@@ -7841,14 +7813,38 @@
         <a:graphic>
           <a:graphicData uri="http://schemas.openxmlformats.org/drawingml/2006/table">
             <a:tbl>
-              <a:tblPr firstRow="0" bandRow="0">
+              <a:tblPr>
                 <a:tableStyleId>{5C22544A-7EE6-4342-B048-85BDC9FD1C3A}</a:tableStyleId>
               </a:tblPr>
               <a:tblGrid>
-                <a:gridCol w="457200"/>
-                <a:gridCol w="1417320"/>
-                <a:gridCol w="3383280"/>
-                <a:gridCol w="3822191"/>
+                <a:gridCol w="457200">
+                  <a:extLst>
+                    <a:ext uri="{9D8B030D-6E8A-4147-A177-3AD203B41FA5}">
+                      <a16:colId xmlns:a16="http://schemas.microsoft.com/office/drawing/2014/main" val="20000"/>
+                    </a:ext>
+                  </a:extLst>
+                </a:gridCol>
+                <a:gridCol w="1417320">
+                  <a:extLst>
+                    <a:ext uri="{9D8B030D-6E8A-4147-A177-3AD203B41FA5}">
+                      <a16:colId xmlns:a16="http://schemas.microsoft.com/office/drawing/2014/main" val="20001"/>
+                    </a:ext>
+                  </a:extLst>
+                </a:gridCol>
+                <a:gridCol w="3383280">
+                  <a:extLst>
+                    <a:ext uri="{9D8B030D-6E8A-4147-A177-3AD203B41FA5}">
+                      <a16:colId xmlns:a16="http://schemas.microsoft.com/office/drawing/2014/main" val="20002"/>
+                    </a:ext>
+                  </a:extLst>
+                </a:gridCol>
+                <a:gridCol w="3822191">
+                  <a:extLst>
+                    <a:ext uri="{9D8B030D-6E8A-4147-A177-3AD203B41FA5}">
+                      <a16:colId xmlns:a16="http://schemas.microsoft.com/office/drawing/2014/main" val="20003"/>
+                    </a:ext>
+                  </a:extLst>
+                </a:gridCol>
               </a:tblGrid>
               <a:tr h="365760">
                 <a:tc>
@@ -7944,6 +7940,11 @@
                     </a:solidFill>
                   </a:tcPr>
                 </a:tc>
+                <a:extLst>
+                  <a:ext uri="{0D108BD9-81ED-4DB2-BD59-A6C34878D82A}">
+                    <a16:rowId xmlns:a16="http://schemas.microsoft.com/office/drawing/2014/main" val="10000"/>
+                  </a:ext>
+                </a:extLst>
               </a:tr>
               <a:tr h="365760">
                 <a:tc>
@@ -8039,6 +8040,11 @@
                     </a:solidFill>
                   </a:tcPr>
                 </a:tc>
+                <a:extLst>
+                  <a:ext uri="{0D108BD9-81ED-4DB2-BD59-A6C34878D82A}">
+                    <a16:rowId xmlns:a16="http://schemas.microsoft.com/office/drawing/2014/main" val="10001"/>
+                  </a:ext>
+                </a:extLst>
               </a:tr>
               <a:tr h="365760">
                 <a:tc>
@@ -8134,6 +8140,11 @@
                     </a:solidFill>
                   </a:tcPr>
                 </a:tc>
+                <a:extLst>
+                  <a:ext uri="{0D108BD9-81ED-4DB2-BD59-A6C34878D82A}">
+                    <a16:rowId xmlns:a16="http://schemas.microsoft.com/office/drawing/2014/main" val="10002"/>
+                  </a:ext>
+                </a:extLst>
               </a:tr>
               <a:tr h="365760">
                 <a:tc>
@@ -8229,6 +8240,11 @@
                     </a:solidFill>
                   </a:tcPr>
                 </a:tc>
+                <a:extLst>
+                  <a:ext uri="{0D108BD9-81ED-4DB2-BD59-A6C34878D82A}">
+                    <a16:rowId xmlns:a16="http://schemas.microsoft.com/office/drawing/2014/main" val="10003"/>
+                  </a:ext>
+                </a:extLst>
               </a:tr>
               <a:tr h="365760">
                 <a:tc>
@@ -8324,6 +8340,11 @@
                     </a:solidFill>
                   </a:tcPr>
                 </a:tc>
+                <a:extLst>
+                  <a:ext uri="{0D108BD9-81ED-4DB2-BD59-A6C34878D82A}">
+                    <a16:rowId xmlns:a16="http://schemas.microsoft.com/office/drawing/2014/main" val="10004"/>
+                  </a:ext>
+                </a:extLst>
               </a:tr>
               <a:tr h="365760">
                 <a:tc>
@@ -8419,6 +8440,11 @@
                     </a:solidFill>
                   </a:tcPr>
                 </a:tc>
+                <a:extLst>
+                  <a:ext uri="{0D108BD9-81ED-4DB2-BD59-A6C34878D82A}">
+                    <a16:rowId xmlns:a16="http://schemas.microsoft.com/office/drawing/2014/main" val="10005"/>
+                  </a:ext>
+                </a:extLst>
               </a:tr>
             </a:tbl>
           </a:graphicData>
@@ -8433,7 +8459,7 @@
 </file>
 
 <file path=ppt/slides/slide13.xml><?xml version="1.0" encoding="utf-8"?>
-<p:sld xmlns:a="http://schemas.openxmlformats.org/drawingml/2006/main" xmlns:p="http://schemas.openxmlformats.org/presentationml/2006/main" xmlns:r="http://schemas.openxmlformats.org/officeDocument/2006/relationships">
+<p:sld xmlns:a="http://schemas.openxmlformats.org/drawingml/2006/main" xmlns:r="http://schemas.openxmlformats.org/officeDocument/2006/relationships" xmlns:p="http://schemas.openxmlformats.org/presentationml/2006/main">
   <p:cSld>
     <p:bg>
       <p:bgPr>
@@ -8449,7 +8475,14 @@
         <p:cNvGrpSpPr/>
         <p:nvPr/>
       </p:nvGrpSpPr>
-      <p:grpSpPr/>
+      <p:grpSpPr>
+        <a:xfrm>
+          <a:off x="0" y="0"/>
+          <a:ext cx="0" cy="0"/>
+          <a:chOff x="0" y="0"/>
+          <a:chExt cx="0" cy="0"/>
+        </a:xfrm>
+      </p:grpSpPr>
       <p:sp>
         <p:nvSpPr>
           <p:cNvPr id="2" name="TextBox 1"/>
@@ -8467,7 +8500,7 @@
           <a:noFill/>
         </p:spPr>
         <p:txBody>
-          <a:bodyPr wrap="square" anchor="t" lIns="0" rIns="0" tIns="0" bIns="0">
+          <a:bodyPr wrap="square" lIns="0" tIns="0" rIns="0" bIns="0" anchor="t">
             <a:spAutoFit/>
           </a:bodyPr>
           <a:lstStyle/>
@@ -8527,6 +8560,7 @@
           <a:lstStyle/>
           <a:p>
             <a:pPr algn="ctr"/>
+            <a:endParaRPr/>
           </a:p>
         </p:txBody>
       </p:sp>
@@ -8547,7 +8581,7 @@
           <a:noFill/>
         </p:spPr>
         <p:txBody>
-          <a:bodyPr wrap="square" anchor="t" lIns="0" rIns="0" tIns="0" bIns="0">
+          <a:bodyPr wrap="square" lIns="0" tIns="0" rIns="0" bIns="0" anchor="t">
             <a:spAutoFit/>
           </a:bodyPr>
           <a:lstStyle/>
@@ -8579,7 +8613,7 @@
           <p:nvPr/>
         </p:nvPicPr>
         <p:blipFill>
-          <a:blip r:embed="rId2"/>
+          <a:blip r:embed="rId3"/>
           <a:stretch>
             <a:fillRect/>
           </a:stretch>
@@ -8611,7 +8645,7 @@
           <a:noFill/>
         </p:spPr>
         <p:txBody>
-          <a:bodyPr wrap="square" anchor="t" lIns="0" rIns="0" tIns="0" bIns="0">
+          <a:bodyPr wrap="square" lIns="0" tIns="0" rIns="0" bIns="0" anchor="t">
             <a:spAutoFit/>
           </a:bodyPr>
           <a:lstStyle/>
@@ -8671,6 +8705,7 @@
           <a:lstStyle/>
           <a:p>
             <a:pPr algn="ctr"/>
+            <a:endParaRPr/>
           </a:p>
         </p:txBody>
       </p:sp>
@@ -8691,7 +8726,7 @@
           <a:noFill/>
         </p:spPr>
         <p:txBody>
-          <a:bodyPr wrap="square" anchor="ctr" lIns="0" rIns="0" tIns="0" bIns="0">
+          <a:bodyPr wrap="square" lIns="0" tIns="0" rIns="0" bIns="0" anchor="ctr">
             <a:spAutoFit/>
           </a:bodyPr>
           <a:lstStyle/>
@@ -8751,6 +8786,7 @@
           <a:lstStyle/>
           <a:p>
             <a:pPr algn="ctr"/>
+            <a:endParaRPr/>
           </a:p>
         </p:txBody>
       </p:sp>
@@ -8771,7 +8807,7 @@
           <a:noFill/>
         </p:spPr>
         <p:txBody>
-          <a:bodyPr wrap="square" anchor="t" lIns="0" rIns="0" tIns="0" bIns="0">
+          <a:bodyPr wrap="square" lIns="0" tIns="0" rIns="0" bIns="0" anchor="t">
             <a:spAutoFit/>
           </a:bodyPr>
           <a:lstStyle/>
@@ -8965,6 +9001,7 @@
           <a:lstStyle/>
           <a:p>
             <a:pPr algn="ctr"/>
+            <a:endParaRPr/>
           </a:p>
         </p:txBody>
       </p:sp>
@@ -8985,7 +9022,7 @@
           <a:noFill/>
         </p:spPr>
         <p:txBody>
-          <a:bodyPr wrap="square" anchor="ctr" lIns="0" rIns="0" tIns="0" bIns="0">
+          <a:bodyPr wrap="square" lIns="0" tIns="0" rIns="0" bIns="0" anchor="ctr">
             <a:spAutoFit/>
           </a:bodyPr>
           <a:lstStyle/>
@@ -9019,13 +9056,31 @@
         <a:graphic>
           <a:graphicData uri="http://schemas.openxmlformats.org/drawingml/2006/table">
             <a:tbl>
-              <a:tblPr firstRow="0" bandRow="0">
+              <a:tblPr>
                 <a:tableStyleId>{5C22544A-7EE6-4342-B048-85BDC9FD1C3A}</a:tableStyleId>
               </a:tblPr>
               <a:tblGrid>
-                <a:gridCol w="2148840"/>
-                <a:gridCol w="685800"/>
-                <a:gridCol w="3410712"/>
+                <a:gridCol w="2148840">
+                  <a:extLst>
+                    <a:ext uri="{9D8B030D-6E8A-4147-A177-3AD203B41FA5}">
+                      <a16:colId xmlns:a16="http://schemas.microsoft.com/office/drawing/2014/main" val="20000"/>
+                    </a:ext>
+                  </a:extLst>
+                </a:gridCol>
+                <a:gridCol w="685800">
+                  <a:extLst>
+                    <a:ext uri="{9D8B030D-6E8A-4147-A177-3AD203B41FA5}">
+                      <a16:colId xmlns:a16="http://schemas.microsoft.com/office/drawing/2014/main" val="20001"/>
+                    </a:ext>
+                  </a:extLst>
+                </a:gridCol>
+                <a:gridCol w="3410712">
+                  <a:extLst>
+                    <a:ext uri="{9D8B030D-6E8A-4147-A177-3AD203B41FA5}">
+                      <a16:colId xmlns:a16="http://schemas.microsoft.com/office/drawing/2014/main" val="20002"/>
+                    </a:ext>
+                  </a:extLst>
+                </a:gridCol>
               </a:tblGrid>
               <a:tr h="434340">
                 <a:tc>
@@ -9097,6 +9152,11 @@
                     </a:solidFill>
                   </a:tcPr>
                 </a:tc>
+                <a:extLst>
+                  <a:ext uri="{0D108BD9-81ED-4DB2-BD59-A6C34878D82A}">
+                    <a16:rowId xmlns:a16="http://schemas.microsoft.com/office/drawing/2014/main" val="10000"/>
+                  </a:ext>
+                </a:extLst>
               </a:tr>
               <a:tr h="434340">
                 <a:tc>
@@ -9168,6 +9228,11 @@
                     </a:solidFill>
                   </a:tcPr>
                 </a:tc>
+                <a:extLst>
+                  <a:ext uri="{0D108BD9-81ED-4DB2-BD59-A6C34878D82A}">
+                    <a16:rowId xmlns:a16="http://schemas.microsoft.com/office/drawing/2014/main" val="10001"/>
+                  </a:ext>
+                </a:extLst>
               </a:tr>
               <a:tr h="434340">
                 <a:tc>
@@ -9239,6 +9304,11 @@
                     </a:solidFill>
                   </a:tcPr>
                 </a:tc>
+                <a:extLst>
+                  <a:ext uri="{0D108BD9-81ED-4DB2-BD59-A6C34878D82A}">
+                    <a16:rowId xmlns:a16="http://schemas.microsoft.com/office/drawing/2014/main" val="10002"/>
+                  </a:ext>
+                </a:extLst>
               </a:tr>
               <a:tr h="434340">
                 <a:tc>
@@ -9310,6 +9380,11 @@
                     </a:solidFill>
                   </a:tcPr>
                 </a:tc>
+                <a:extLst>
+                  <a:ext uri="{0D108BD9-81ED-4DB2-BD59-A6C34878D82A}">
+                    <a16:rowId xmlns:a16="http://schemas.microsoft.com/office/drawing/2014/main" val="10003"/>
+                  </a:ext>
+                </a:extLst>
               </a:tr>
               <a:tr h="434340">
                 <a:tc>
@@ -9381,6 +9456,11 @@
                     </a:solidFill>
                   </a:tcPr>
                 </a:tc>
+                <a:extLst>
+                  <a:ext uri="{0D108BD9-81ED-4DB2-BD59-A6C34878D82A}">
+                    <a16:rowId xmlns:a16="http://schemas.microsoft.com/office/drawing/2014/main" val="10004"/>
+                  </a:ext>
+                </a:extLst>
               </a:tr>
               <a:tr h="434340">
                 <a:tc>
@@ -9452,6 +9532,11 @@
                     </a:solidFill>
                   </a:tcPr>
                 </a:tc>
+                <a:extLst>
+                  <a:ext uri="{0D108BD9-81ED-4DB2-BD59-A6C34878D82A}">
+                    <a16:rowId xmlns:a16="http://schemas.microsoft.com/office/drawing/2014/main" val="10005"/>
+                  </a:ext>
+                </a:extLst>
               </a:tr>
               <a:tr h="434340">
                 <a:tc>
@@ -9523,6 +9608,11 @@
                     </a:solidFill>
                   </a:tcPr>
                 </a:tc>
+                <a:extLst>
+                  <a:ext uri="{0D108BD9-81ED-4DB2-BD59-A6C34878D82A}">
+                    <a16:rowId xmlns:a16="http://schemas.microsoft.com/office/drawing/2014/main" val="10006"/>
+                  </a:ext>
+                </a:extLst>
               </a:tr>
               <a:tr h="434340">
                 <a:tc>
@@ -9594,6 +9684,11 @@
                     </a:solidFill>
                   </a:tcPr>
                 </a:tc>
+                <a:extLst>
+                  <a:ext uri="{0D108BD9-81ED-4DB2-BD59-A6C34878D82A}">
+                    <a16:rowId xmlns:a16="http://schemas.microsoft.com/office/drawing/2014/main" val="10007"/>
+                  </a:ext>
+                </a:extLst>
               </a:tr>
               <a:tr h="434340">
                 <a:tc>
@@ -9665,6 +9760,11 @@
                     </a:solidFill>
                   </a:tcPr>
                 </a:tc>
+                <a:extLst>
+                  <a:ext uri="{0D108BD9-81ED-4DB2-BD59-A6C34878D82A}">
+                    <a16:rowId xmlns:a16="http://schemas.microsoft.com/office/drawing/2014/main" val="10008"/>
+                  </a:ext>
+                </a:extLst>
               </a:tr>
               <a:tr h="434340">
                 <a:tc>
@@ -9736,6 +9836,11 @@
                     </a:solidFill>
                   </a:tcPr>
                 </a:tc>
+                <a:extLst>
+                  <a:ext uri="{0D108BD9-81ED-4DB2-BD59-A6C34878D82A}">
+                    <a16:rowId xmlns:a16="http://schemas.microsoft.com/office/drawing/2014/main" val="10009"/>
+                  </a:ext>
+                </a:extLst>
               </a:tr>
             </a:tbl>
           </a:graphicData>
@@ -9750,7 +9855,7 @@
 </file>
 
 <file path=ppt/slides/slide14.xml><?xml version="1.0" encoding="utf-8"?>
-<p:sld xmlns:a="http://schemas.openxmlformats.org/drawingml/2006/main" xmlns:p="http://schemas.openxmlformats.org/presentationml/2006/main" xmlns:r="http://schemas.openxmlformats.org/officeDocument/2006/relationships">
+<p:sld xmlns:a="http://schemas.openxmlformats.org/drawingml/2006/main" xmlns:r="http://schemas.openxmlformats.org/officeDocument/2006/relationships" xmlns:p="http://schemas.openxmlformats.org/presentationml/2006/main">
   <p:cSld>
     <p:bg>
       <p:bgPr>
@@ -9766,7 +9871,14 @@
         <p:cNvGrpSpPr/>
         <p:nvPr/>
       </p:nvGrpSpPr>
-      <p:grpSpPr/>
+      <p:grpSpPr>
+        <a:xfrm>
+          <a:off x="0" y="0"/>
+          <a:ext cx="0" cy="0"/>
+          <a:chOff x="0" y="0"/>
+          <a:chExt cx="0" cy="0"/>
+        </a:xfrm>
+      </p:grpSpPr>
       <p:sp>
         <p:nvSpPr>
           <p:cNvPr id="2" name="TextBox 1"/>
@@ -9784,7 +9896,7 @@
           <a:noFill/>
         </p:spPr>
         <p:txBody>
-          <a:bodyPr wrap="square" anchor="t" lIns="0" rIns="0" tIns="0" bIns="0">
+          <a:bodyPr wrap="square" lIns="0" tIns="0" rIns="0" bIns="0" anchor="t">
             <a:spAutoFit/>
           </a:bodyPr>
           <a:lstStyle/>
@@ -9844,6 +9956,7 @@
           <a:lstStyle/>
           <a:p>
             <a:pPr algn="ctr"/>
+            <a:endParaRPr/>
           </a:p>
         </p:txBody>
       </p:sp>
@@ -9864,7 +9977,7 @@
           <a:noFill/>
         </p:spPr>
         <p:txBody>
-          <a:bodyPr wrap="square" anchor="t" lIns="0" rIns="0" tIns="0" bIns="0">
+          <a:bodyPr wrap="square" lIns="0" tIns="0" rIns="0" bIns="0" anchor="t">
             <a:spAutoFit/>
           </a:bodyPr>
           <a:lstStyle/>
@@ -9896,7 +10009,7 @@
           <p:nvPr/>
         </p:nvPicPr>
         <p:blipFill>
-          <a:blip r:embed="rId2"/>
+          <a:blip r:embed="rId3"/>
           <a:stretch>
             <a:fillRect/>
           </a:stretch>
@@ -9928,7 +10041,7 @@
           <a:noFill/>
         </p:spPr>
         <p:txBody>
-          <a:bodyPr wrap="square" anchor="t" lIns="0" rIns="0" tIns="0" bIns="0">
+          <a:bodyPr wrap="square" lIns="0" tIns="0" rIns="0" bIns="0" anchor="t">
             <a:spAutoFit/>
           </a:bodyPr>
           <a:lstStyle/>
@@ -9988,6 +10101,7 @@
           <a:lstStyle/>
           <a:p>
             <a:pPr algn="ctr"/>
+            <a:endParaRPr/>
           </a:p>
         </p:txBody>
       </p:sp>
@@ -10008,7 +10122,7 @@
           <a:noFill/>
         </p:spPr>
         <p:txBody>
-          <a:bodyPr wrap="square" anchor="ctr" lIns="0" rIns="0" tIns="0" bIns="0">
+          <a:bodyPr wrap="square" lIns="0" tIns="0" rIns="0" bIns="0" anchor="ctr">
             <a:spAutoFit/>
           </a:bodyPr>
           <a:lstStyle/>
@@ -10068,6 +10182,7 @@
           <a:lstStyle/>
           <a:p>
             <a:pPr algn="ctr"/>
+            <a:endParaRPr/>
           </a:p>
         </p:txBody>
       </p:sp>
@@ -10088,7 +10203,7 @@
           <a:noFill/>
         </p:spPr>
         <p:txBody>
-          <a:bodyPr wrap="square" anchor="t" lIns="0" rIns="0" tIns="0" bIns="0">
+          <a:bodyPr wrap="square" lIns="0" tIns="0" rIns="0" bIns="0" anchor="t">
             <a:spAutoFit/>
           </a:bodyPr>
           <a:lstStyle/>
@@ -10318,6 +10433,7 @@
           <a:lstStyle/>
           <a:p>
             <a:pPr algn="ctr"/>
+            <a:endParaRPr/>
           </a:p>
         </p:txBody>
       </p:sp>
@@ -10338,7 +10454,7 @@
           <a:noFill/>
         </p:spPr>
         <p:txBody>
-          <a:bodyPr wrap="square" anchor="ctr" lIns="0" rIns="0" tIns="0" bIns="0">
+          <a:bodyPr wrap="square" lIns="0" tIns="0" rIns="0" bIns="0" anchor="ctr">
             <a:spAutoFit/>
           </a:bodyPr>
           <a:lstStyle/>
@@ -10374,7 +10490,7 @@
           <a:noFill/>
         </p:spPr>
         <p:txBody>
-          <a:bodyPr wrap="square" anchor="t" lIns="0" rIns="0" tIns="0" bIns="0">
+          <a:bodyPr wrap="square" lIns="0" tIns="0" rIns="0" bIns="0" anchor="t">
             <a:spAutoFit/>
           </a:bodyPr>
           <a:lstStyle/>
@@ -10568,6 +10684,7 @@
           <a:lstStyle/>
           <a:p>
             <a:pPr algn="ctr"/>
+            <a:endParaRPr/>
           </a:p>
         </p:txBody>
       </p:sp>
@@ -10588,7 +10705,7 @@
           <a:noFill/>
         </p:spPr>
         <p:txBody>
-          <a:bodyPr wrap="square" anchor="ctr" lIns="0" rIns="0" tIns="0" bIns="0">
+          <a:bodyPr wrap="square" lIns="0" tIns="0" rIns="0" bIns="0" anchor="ctr">
             <a:spAutoFit/>
           </a:bodyPr>
           <a:lstStyle/>
@@ -10616,7 +10733,7 @@
 </file>
 
 <file path=ppt/slides/slide15.xml><?xml version="1.0" encoding="utf-8"?>
-<p:sld xmlns:a="http://schemas.openxmlformats.org/drawingml/2006/main" xmlns:p="http://schemas.openxmlformats.org/presentationml/2006/main" xmlns:r="http://schemas.openxmlformats.org/officeDocument/2006/relationships">
+<p:sld xmlns:a="http://schemas.openxmlformats.org/drawingml/2006/main" xmlns:r="http://schemas.openxmlformats.org/officeDocument/2006/relationships" xmlns:p="http://schemas.openxmlformats.org/presentationml/2006/main">
   <p:cSld>
     <p:bg>
       <p:bgPr>
@@ -10632,7 +10749,14 @@
         <p:cNvGrpSpPr/>
         <p:nvPr/>
       </p:nvGrpSpPr>
-      <p:grpSpPr/>
+      <p:grpSpPr>
+        <a:xfrm>
+          <a:off x="0" y="0"/>
+          <a:ext cx="0" cy="0"/>
+          <a:chOff x="0" y="0"/>
+          <a:chExt cx="0" cy="0"/>
+        </a:xfrm>
+      </p:grpSpPr>
       <p:sp>
         <p:nvSpPr>
           <p:cNvPr id="2" name="TextBox 1"/>
@@ -10650,7 +10774,7 @@
           <a:noFill/>
         </p:spPr>
         <p:txBody>
-          <a:bodyPr wrap="square" anchor="t" lIns="0" rIns="0" tIns="0" bIns="0">
+          <a:bodyPr wrap="square" lIns="0" tIns="0" rIns="0" bIns="0" anchor="t">
             <a:spAutoFit/>
           </a:bodyPr>
           <a:lstStyle/>
@@ -10710,6 +10834,7 @@
           <a:lstStyle/>
           <a:p>
             <a:pPr algn="ctr"/>
+            <a:endParaRPr/>
           </a:p>
         </p:txBody>
       </p:sp>
@@ -10730,7 +10855,7 @@
           <a:noFill/>
         </p:spPr>
         <p:txBody>
-          <a:bodyPr wrap="square" anchor="t" lIns="0" rIns="0" tIns="0" bIns="0">
+          <a:bodyPr wrap="square" lIns="0" tIns="0" rIns="0" bIns="0" anchor="t">
             <a:spAutoFit/>
           </a:bodyPr>
           <a:lstStyle/>
@@ -10762,7 +10887,7 @@
           <p:nvPr/>
         </p:nvPicPr>
         <p:blipFill>
-          <a:blip r:embed="rId2"/>
+          <a:blip r:embed="rId3"/>
           <a:stretch>
             <a:fillRect/>
           </a:stretch>
@@ -10794,7 +10919,7 @@
           <a:noFill/>
         </p:spPr>
         <p:txBody>
-          <a:bodyPr wrap="square" anchor="t" lIns="0" rIns="0" tIns="0" bIns="0">
+          <a:bodyPr wrap="square" lIns="0" tIns="0" rIns="0" bIns="0" anchor="t">
             <a:spAutoFit/>
           </a:bodyPr>
           <a:lstStyle/>
@@ -10854,6 +10979,7 @@
           <a:lstStyle/>
           <a:p>
             <a:pPr algn="ctr"/>
+            <a:endParaRPr/>
           </a:p>
         </p:txBody>
       </p:sp>
@@ -10874,7 +11000,7 @@
           <a:noFill/>
         </p:spPr>
         <p:txBody>
-          <a:bodyPr wrap="square" anchor="ctr" lIns="0" rIns="0" tIns="0" bIns="0">
+          <a:bodyPr wrap="square" lIns="0" tIns="0" rIns="0" bIns="0" anchor="ctr">
             <a:spAutoFit/>
           </a:bodyPr>
           <a:lstStyle/>
@@ -10934,6 +11060,7 @@
           <a:lstStyle/>
           <a:p>
             <a:pPr algn="ctr"/>
+            <a:endParaRPr/>
           </a:p>
         </p:txBody>
       </p:sp>
@@ -10954,7 +11081,7 @@
           <a:noFill/>
         </p:spPr>
         <p:txBody>
-          <a:bodyPr wrap="square" anchor="t" lIns="0" rIns="0" tIns="0" bIns="0">
+          <a:bodyPr wrap="square" lIns="0" tIns="0" rIns="0" bIns="0" anchor="t">
             <a:spAutoFit/>
           </a:bodyPr>
           <a:lstStyle/>
@@ -11167,6 +11294,7 @@
           <a:lstStyle/>
           <a:p>
             <a:pPr algn="ctr"/>
+            <a:endParaRPr/>
           </a:p>
         </p:txBody>
       </p:sp>
@@ -11187,7 +11315,7 @@
           <a:noFill/>
         </p:spPr>
         <p:txBody>
-          <a:bodyPr wrap="square" anchor="ctr" lIns="0" rIns="0" tIns="0" bIns="0">
+          <a:bodyPr wrap="square" lIns="0" tIns="0" rIns="0" bIns="0" anchor="ctr">
             <a:spAutoFit/>
           </a:bodyPr>
           <a:lstStyle/>
@@ -11223,7 +11351,7 @@
           <a:noFill/>
         </p:spPr>
         <p:txBody>
-          <a:bodyPr wrap="square" anchor="t" lIns="0" rIns="0" tIns="0" bIns="0">
+          <a:bodyPr wrap="square" lIns="0" tIns="0" rIns="0" bIns="0" anchor="t">
             <a:spAutoFit/>
           </a:bodyPr>
           <a:lstStyle/>
@@ -11417,6 +11545,7 @@
           <a:lstStyle/>
           <a:p>
             <a:pPr algn="ctr"/>
+            <a:endParaRPr/>
           </a:p>
         </p:txBody>
       </p:sp>
@@ -11437,7 +11566,7 @@
           <a:noFill/>
         </p:spPr>
         <p:txBody>
-          <a:bodyPr wrap="square" anchor="ctr" lIns="0" rIns="0" tIns="0" bIns="0">
+          <a:bodyPr wrap="square" lIns="0" tIns="0" rIns="0" bIns="0" anchor="ctr">
             <a:spAutoFit/>
           </a:bodyPr>
           <a:lstStyle/>
@@ -11465,7 +11594,7 @@
 </file>
 
 <file path=ppt/slides/slide16.xml><?xml version="1.0" encoding="utf-8"?>
-<p:sld xmlns:a="http://schemas.openxmlformats.org/drawingml/2006/main" xmlns:p="http://schemas.openxmlformats.org/presentationml/2006/main" xmlns:r="http://schemas.openxmlformats.org/officeDocument/2006/relationships">
+<p:sld xmlns:a="http://schemas.openxmlformats.org/drawingml/2006/main" xmlns:r="http://schemas.openxmlformats.org/officeDocument/2006/relationships" xmlns:p="http://schemas.openxmlformats.org/presentationml/2006/main">
   <p:cSld>
     <p:bg>
       <p:bgPr>
@@ -11481,7 +11610,14 @@
         <p:cNvGrpSpPr/>
         <p:nvPr/>
       </p:nvGrpSpPr>
-      <p:grpSpPr/>
+      <p:grpSpPr>
+        <a:xfrm>
+          <a:off x="0" y="0"/>
+          <a:ext cx="0" cy="0"/>
+          <a:chOff x="0" y="0"/>
+          <a:chExt cx="0" cy="0"/>
+        </a:xfrm>
+      </p:grpSpPr>
       <p:sp>
         <p:nvSpPr>
           <p:cNvPr id="2" name="TextBox 1"/>
@@ -11499,7 +11635,7 @@
           <a:noFill/>
         </p:spPr>
         <p:txBody>
-          <a:bodyPr wrap="square" anchor="t" lIns="0" rIns="0" tIns="0" bIns="0">
+          <a:bodyPr wrap="square" lIns="0" tIns="0" rIns="0" bIns="0" anchor="t">
             <a:spAutoFit/>
           </a:bodyPr>
           <a:lstStyle/>
@@ -11559,6 +11695,7 @@
           <a:lstStyle/>
           <a:p>
             <a:pPr algn="ctr"/>
+            <a:endParaRPr/>
           </a:p>
         </p:txBody>
       </p:sp>
@@ -11579,7 +11716,7 @@
           <a:noFill/>
         </p:spPr>
         <p:txBody>
-          <a:bodyPr wrap="square" anchor="t" lIns="0" rIns="0" tIns="0" bIns="0">
+          <a:bodyPr wrap="square" lIns="0" tIns="0" rIns="0" bIns="0" anchor="t">
             <a:spAutoFit/>
           </a:bodyPr>
           <a:lstStyle/>
@@ -11611,7 +11748,7 @@
           <p:nvPr/>
         </p:nvPicPr>
         <p:blipFill>
-          <a:blip r:embed="rId2"/>
+          <a:blip r:embed="rId3"/>
           <a:stretch>
             <a:fillRect/>
           </a:stretch>
@@ -11643,7 +11780,7 @@
           <a:noFill/>
         </p:spPr>
         <p:txBody>
-          <a:bodyPr wrap="square" anchor="t" lIns="0" rIns="0" tIns="0" bIns="0">
+          <a:bodyPr wrap="square" lIns="0" tIns="0" rIns="0" bIns="0" anchor="t">
             <a:spAutoFit/>
           </a:bodyPr>
           <a:lstStyle/>
@@ -11703,6 +11840,7 @@
           <a:lstStyle/>
           <a:p>
             <a:pPr algn="ctr"/>
+            <a:endParaRPr/>
           </a:p>
         </p:txBody>
       </p:sp>
@@ -11723,7 +11861,7 @@
           <a:noFill/>
         </p:spPr>
         <p:txBody>
-          <a:bodyPr wrap="square" anchor="ctr" lIns="0" rIns="0" tIns="0" bIns="0">
+          <a:bodyPr wrap="square" lIns="0" tIns="0" rIns="0" bIns="0" anchor="ctr">
             <a:spAutoFit/>
           </a:bodyPr>
           <a:lstStyle/>
@@ -11783,6 +11921,7 @@
           <a:lstStyle/>
           <a:p>
             <a:pPr algn="ctr"/>
+            <a:endParaRPr/>
           </a:p>
         </p:txBody>
       </p:sp>
@@ -11803,7 +11942,7 @@
           <a:noFill/>
         </p:spPr>
         <p:txBody>
-          <a:bodyPr wrap="square" anchor="t" lIns="0" rIns="0" tIns="0" bIns="0">
+          <a:bodyPr wrap="square" lIns="0" tIns="0" rIns="0" bIns="0" anchor="t">
             <a:spAutoFit/>
           </a:bodyPr>
           <a:lstStyle/>
@@ -11914,6 +12053,7 @@
           <a:lstStyle/>
           <a:p>
             <a:pPr algn="ctr"/>
+            <a:endParaRPr/>
           </a:p>
         </p:txBody>
       </p:sp>
@@ -11934,7 +12074,7 @@
           <a:noFill/>
         </p:spPr>
         <p:txBody>
-          <a:bodyPr wrap="square" anchor="t" lIns="0" rIns="0" tIns="0" bIns="0">
+          <a:bodyPr wrap="square" lIns="0" tIns="0" rIns="0" bIns="0" anchor="t">
             <a:spAutoFit/>
           </a:bodyPr>
           <a:lstStyle/>
@@ -12004,7 +12144,7 @@
           <a:noFill/>
         </p:spPr>
         <p:txBody>
-          <a:bodyPr wrap="square" anchor="t" lIns="0" rIns="0" tIns="0" bIns="0">
+          <a:bodyPr wrap="square" lIns="0" tIns="0" rIns="0" bIns="0" anchor="t">
             <a:spAutoFit/>
           </a:bodyPr>
           <a:lstStyle/>
@@ -12101,6 +12241,7 @@
           <a:lstStyle/>
           <a:p>
             <a:pPr algn="ctr"/>
+            <a:endParaRPr/>
           </a:p>
         </p:txBody>
       </p:sp>
@@ -12121,7 +12262,7 @@
           <a:noFill/>
         </p:spPr>
         <p:txBody>
-          <a:bodyPr wrap="square" anchor="ctr" lIns="0" rIns="0" tIns="0" bIns="0">
+          <a:bodyPr wrap="square" lIns="0" tIns="0" rIns="0" bIns="0" anchor="ctr">
             <a:spAutoFit/>
           </a:bodyPr>
           <a:lstStyle/>
@@ -12155,13 +12296,31 @@
         <a:graphic>
           <a:graphicData uri="http://schemas.openxmlformats.org/drawingml/2006/table">
             <a:tbl>
-              <a:tblPr firstRow="0" bandRow="0">
+              <a:tblPr>
                 <a:tableStyleId>{5C22544A-7EE6-4342-B048-85BDC9FD1C3A}</a:tableStyleId>
               </a:tblPr>
               <a:tblGrid>
-                <a:gridCol w="1691640"/>
-                <a:gridCol w="685800"/>
-                <a:gridCol w="1993392"/>
+                <a:gridCol w="1691640">
+                  <a:extLst>
+                    <a:ext uri="{9D8B030D-6E8A-4147-A177-3AD203B41FA5}">
+                      <a16:colId xmlns:a16="http://schemas.microsoft.com/office/drawing/2014/main" val="20000"/>
+                    </a:ext>
+                  </a:extLst>
+                </a:gridCol>
+                <a:gridCol w="685800">
+                  <a:extLst>
+                    <a:ext uri="{9D8B030D-6E8A-4147-A177-3AD203B41FA5}">
+                      <a16:colId xmlns:a16="http://schemas.microsoft.com/office/drawing/2014/main" val="20001"/>
+                    </a:ext>
+                  </a:extLst>
+                </a:gridCol>
+                <a:gridCol w="1993392">
+                  <a:extLst>
+                    <a:ext uri="{9D8B030D-6E8A-4147-A177-3AD203B41FA5}">
+                      <a16:colId xmlns:a16="http://schemas.microsoft.com/office/drawing/2014/main" val="20002"/>
+                    </a:ext>
+                  </a:extLst>
+                </a:gridCol>
               </a:tblGrid>
               <a:tr h="338328">
                 <a:tc>
@@ -12233,6 +12392,11 @@
                     </a:solidFill>
                   </a:tcPr>
                 </a:tc>
+                <a:extLst>
+                  <a:ext uri="{0D108BD9-81ED-4DB2-BD59-A6C34878D82A}">
+                    <a16:rowId xmlns:a16="http://schemas.microsoft.com/office/drawing/2014/main" val="10000"/>
+                  </a:ext>
+                </a:extLst>
               </a:tr>
               <a:tr h="338328">
                 <a:tc>
@@ -12304,6 +12468,11 @@
                     </a:solidFill>
                   </a:tcPr>
                 </a:tc>
+                <a:extLst>
+                  <a:ext uri="{0D108BD9-81ED-4DB2-BD59-A6C34878D82A}">
+                    <a16:rowId xmlns:a16="http://schemas.microsoft.com/office/drawing/2014/main" val="10001"/>
+                  </a:ext>
+                </a:extLst>
               </a:tr>
               <a:tr h="338328">
                 <a:tc>
@@ -12375,6 +12544,11 @@
                     </a:solidFill>
                   </a:tcPr>
                 </a:tc>
+                <a:extLst>
+                  <a:ext uri="{0D108BD9-81ED-4DB2-BD59-A6C34878D82A}">
+                    <a16:rowId xmlns:a16="http://schemas.microsoft.com/office/drawing/2014/main" val="10002"/>
+                  </a:ext>
+                </a:extLst>
               </a:tr>
               <a:tr h="338328">
                 <a:tc>
@@ -12446,6 +12620,11 @@
                     </a:solidFill>
                   </a:tcPr>
                 </a:tc>
+                <a:extLst>
+                  <a:ext uri="{0D108BD9-81ED-4DB2-BD59-A6C34878D82A}">
+                    <a16:rowId xmlns:a16="http://schemas.microsoft.com/office/drawing/2014/main" val="10003"/>
+                  </a:ext>
+                </a:extLst>
               </a:tr>
               <a:tr h="338328">
                 <a:tc>
@@ -12517,6 +12696,11 @@
                     </a:solidFill>
                   </a:tcPr>
                 </a:tc>
+                <a:extLst>
+                  <a:ext uri="{0D108BD9-81ED-4DB2-BD59-A6C34878D82A}">
+                    <a16:rowId xmlns:a16="http://schemas.microsoft.com/office/drawing/2014/main" val="10004"/>
+                  </a:ext>
+                </a:extLst>
               </a:tr>
               <a:tr h="338328">
                 <a:tc>
@@ -12588,6 +12772,11 @@
                     </a:solidFill>
                   </a:tcPr>
                 </a:tc>
+                <a:extLst>
+                  <a:ext uri="{0D108BD9-81ED-4DB2-BD59-A6C34878D82A}">
+                    <a16:rowId xmlns:a16="http://schemas.microsoft.com/office/drawing/2014/main" val="10005"/>
+                  </a:ext>
+                </a:extLst>
               </a:tr>
             </a:tbl>
           </a:graphicData>
@@ -12634,6 +12823,7 @@
           <a:lstStyle/>
           <a:p>
             <a:pPr algn="ctr"/>
+            <a:endParaRPr/>
           </a:p>
         </p:txBody>
       </p:sp>
@@ -12654,7 +12844,7 @@
           <a:noFill/>
         </p:spPr>
         <p:txBody>
-          <a:bodyPr wrap="square" anchor="ctr" lIns="0" rIns="0" tIns="0" bIns="0">
+          <a:bodyPr wrap="square" lIns="0" tIns="0" rIns="0" bIns="0" anchor="ctr">
             <a:spAutoFit/>
           </a:bodyPr>
           <a:lstStyle/>
@@ -12690,7 +12880,7 @@
           <a:noFill/>
         </p:spPr>
         <p:txBody>
-          <a:bodyPr wrap="square" anchor="t" lIns="0" rIns="0" tIns="0" bIns="0">
+          <a:bodyPr wrap="square" lIns="0" tIns="0" rIns="0" bIns="0" anchor="t">
             <a:spAutoFit/>
           </a:bodyPr>
           <a:lstStyle/>
@@ -12754,6 +12944,7 @@
           <a:lstStyle/>
           <a:p>
             <a:pPr algn="ctr"/>
+            <a:endParaRPr/>
           </a:p>
         </p:txBody>
       </p:sp>
@@ -12774,7 +12965,7 @@
           <a:noFill/>
         </p:spPr>
         <p:txBody>
-          <a:bodyPr wrap="square" anchor="t" lIns="0" rIns="0" tIns="0" bIns="0">
+          <a:bodyPr wrap="square" lIns="0" tIns="0" rIns="0" bIns="0" anchor="t">
             <a:spAutoFit/>
           </a:bodyPr>
           <a:lstStyle/>
@@ -12827,7 +13018,7 @@
           <a:noFill/>
         </p:spPr>
         <p:txBody>
-          <a:bodyPr wrap="square" anchor="t" lIns="0" rIns="0" tIns="0" bIns="0">
+          <a:bodyPr wrap="square" lIns="0" tIns="0" rIns="0" bIns="0" anchor="t">
             <a:spAutoFit/>
           </a:bodyPr>
           <a:lstStyle/>
@@ -12855,7 +13046,7 @@
 </file>
 
 <file path=ppt/slides/slide17.xml><?xml version="1.0" encoding="utf-8"?>
-<p:sld xmlns:a="http://schemas.openxmlformats.org/drawingml/2006/main" xmlns:p="http://schemas.openxmlformats.org/presentationml/2006/main" xmlns:r="http://schemas.openxmlformats.org/officeDocument/2006/relationships">
+<p:sld xmlns:a="http://schemas.openxmlformats.org/drawingml/2006/main" xmlns:r="http://schemas.openxmlformats.org/officeDocument/2006/relationships" xmlns:p="http://schemas.openxmlformats.org/presentationml/2006/main">
   <p:cSld>
     <p:bg>
       <p:bgPr>
@@ -12871,7 +13062,14 @@
         <p:cNvGrpSpPr/>
         <p:nvPr/>
       </p:nvGrpSpPr>
-      <p:grpSpPr/>
+      <p:grpSpPr>
+        <a:xfrm>
+          <a:off x="0" y="0"/>
+          <a:ext cx="0" cy="0"/>
+          <a:chOff x="0" y="0"/>
+          <a:chExt cx="0" cy="0"/>
+        </a:xfrm>
+      </p:grpSpPr>
       <p:sp>
         <p:nvSpPr>
           <p:cNvPr id="2" name="TextBox 1"/>
@@ -12889,7 +13087,7 @@
           <a:noFill/>
         </p:spPr>
         <p:txBody>
-          <a:bodyPr wrap="square" anchor="t" lIns="0" rIns="0" tIns="0" bIns="0">
+          <a:bodyPr wrap="square" lIns="0" tIns="0" rIns="0" bIns="0" anchor="t">
             <a:spAutoFit/>
           </a:bodyPr>
           <a:lstStyle/>
@@ -12949,6 +13147,7 @@
           <a:lstStyle/>
           <a:p>
             <a:pPr algn="ctr"/>
+            <a:endParaRPr/>
           </a:p>
         </p:txBody>
       </p:sp>
@@ -12969,7 +13168,7 @@
           <a:noFill/>
         </p:spPr>
         <p:txBody>
-          <a:bodyPr wrap="square" anchor="t" lIns="0" rIns="0" tIns="0" bIns="0">
+          <a:bodyPr wrap="square" lIns="0" tIns="0" rIns="0" bIns="0" anchor="t">
             <a:spAutoFit/>
           </a:bodyPr>
           <a:lstStyle/>
@@ -13001,7 +13200,7 @@
           <p:nvPr/>
         </p:nvPicPr>
         <p:blipFill>
-          <a:blip r:embed="rId2"/>
+          <a:blip r:embed="rId3"/>
           <a:stretch>
             <a:fillRect/>
           </a:stretch>
@@ -13033,7 +13232,7 @@
           <a:noFill/>
         </p:spPr>
         <p:txBody>
-          <a:bodyPr wrap="square" anchor="t" lIns="0" rIns="0" tIns="0" bIns="0">
+          <a:bodyPr wrap="square" lIns="0" tIns="0" rIns="0" bIns="0" anchor="t">
             <a:spAutoFit/>
           </a:bodyPr>
           <a:lstStyle/>
@@ -13093,6 +13292,7 @@
           <a:lstStyle/>
           <a:p>
             <a:pPr algn="ctr"/>
+            <a:endParaRPr/>
           </a:p>
         </p:txBody>
       </p:sp>
@@ -13113,7 +13313,7 @@
           <a:noFill/>
         </p:spPr>
         <p:txBody>
-          <a:bodyPr wrap="square" anchor="ctr" lIns="0" rIns="0" tIns="0" bIns="0">
+          <a:bodyPr wrap="square" lIns="0" tIns="0" rIns="0" bIns="0" anchor="ctr">
             <a:spAutoFit/>
           </a:bodyPr>
           <a:lstStyle/>
@@ -13173,6 +13373,7 @@
           <a:lstStyle/>
           <a:p>
             <a:pPr algn="ctr"/>
+            <a:endParaRPr/>
           </a:p>
         </p:txBody>
       </p:sp>
@@ -13193,7 +13394,7 @@
           <a:noFill/>
         </p:spPr>
         <p:txBody>
-          <a:bodyPr wrap="square" anchor="ctr" lIns="0" rIns="0" tIns="0" bIns="0">
+          <a:bodyPr wrap="square" lIns="0" tIns="0" rIns="0" bIns="0" anchor="ctr">
             <a:spAutoFit/>
           </a:bodyPr>
           <a:lstStyle/>
@@ -13253,6 +13454,7 @@
           <a:lstStyle/>
           <a:p>
             <a:pPr algn="ctr"/>
+            <a:endParaRPr/>
           </a:p>
         </p:txBody>
       </p:sp>
@@ -13273,7 +13475,7 @@
           <a:noFill/>
         </p:spPr>
         <p:txBody>
-          <a:bodyPr wrap="square" anchor="t" lIns="0" rIns="0" tIns="0" bIns="0">
+          <a:bodyPr wrap="square" lIns="0" tIns="0" rIns="0" bIns="0" anchor="t">
             <a:spAutoFit/>
           </a:bodyPr>
           <a:lstStyle/>
@@ -13410,6 +13612,7 @@
           <a:lstStyle/>
           <a:p>
             <a:pPr algn="ctr"/>
+            <a:endParaRPr/>
           </a:p>
         </p:txBody>
       </p:sp>
@@ -13430,7 +13633,7 @@
           <a:noFill/>
         </p:spPr>
         <p:txBody>
-          <a:bodyPr wrap="square" anchor="ctr" lIns="0" rIns="0" tIns="0" bIns="0">
+          <a:bodyPr wrap="square" lIns="0" tIns="0" rIns="0" bIns="0" anchor="ctr">
             <a:spAutoFit/>
           </a:bodyPr>
           <a:lstStyle/>
@@ -13470,7 +13673,7 @@
           <a:noFill/>
         </p:spPr>
         <p:txBody>
-          <a:bodyPr wrap="square" anchor="t" lIns="0" rIns="0" tIns="0" bIns="0">
+          <a:bodyPr wrap="square" lIns="0" tIns="0" rIns="0" bIns="0" anchor="t">
             <a:spAutoFit/>
           </a:bodyPr>
           <a:lstStyle/>
@@ -13530,6 +13733,7 @@
           <a:lstStyle/>
           <a:p>
             <a:pPr algn="ctr"/>
+            <a:endParaRPr/>
           </a:p>
         </p:txBody>
       </p:sp>
@@ -13550,7 +13754,7 @@
           <a:noFill/>
         </p:spPr>
         <p:txBody>
-          <a:bodyPr wrap="square" anchor="ctr" lIns="0" rIns="0" tIns="0" bIns="0">
+          <a:bodyPr wrap="square" lIns="0" tIns="0" rIns="0" bIns="0" anchor="ctr">
             <a:spAutoFit/>
           </a:bodyPr>
           <a:lstStyle/>
@@ -13610,6 +13814,7 @@
           <a:lstStyle/>
           <a:p>
             <a:pPr algn="ctr"/>
+            <a:endParaRPr/>
           </a:p>
         </p:txBody>
       </p:sp>
@@ -13630,7 +13835,7 @@
           <a:noFill/>
         </p:spPr>
         <p:txBody>
-          <a:bodyPr wrap="square" anchor="ctr" lIns="0" rIns="0" tIns="0" bIns="0">
+          <a:bodyPr wrap="square" lIns="0" tIns="0" rIns="0" bIns="0" anchor="ctr">
             <a:spAutoFit/>
           </a:bodyPr>
           <a:lstStyle/>
@@ -13692,6 +13897,7 @@
           <a:lstStyle/>
           <a:p>
             <a:pPr algn="ctr"/>
+            <a:endParaRPr/>
           </a:p>
         </p:txBody>
       </p:sp>
@@ -13712,7 +13918,7 @@
           <a:noFill/>
         </p:spPr>
         <p:txBody>
-          <a:bodyPr wrap="square" anchor="t" lIns="0" rIns="0" tIns="0" bIns="0">
+          <a:bodyPr wrap="square" lIns="0" tIns="0" rIns="0" bIns="0" anchor="t">
             <a:spAutoFit/>
           </a:bodyPr>
           <a:lstStyle/>
@@ -13849,6 +14055,7 @@
           <a:lstStyle/>
           <a:p>
             <a:pPr algn="ctr"/>
+            <a:endParaRPr/>
           </a:p>
         </p:txBody>
       </p:sp>
@@ -13869,7 +14076,7 @@
           <a:noFill/>
         </p:spPr>
         <p:txBody>
-          <a:bodyPr wrap="square" anchor="ctr" lIns="0" rIns="0" tIns="0" bIns="0">
+          <a:bodyPr wrap="square" lIns="0" tIns="0" rIns="0" bIns="0" anchor="ctr">
             <a:spAutoFit/>
           </a:bodyPr>
           <a:lstStyle/>
@@ -13909,7 +14116,7 @@
           <a:noFill/>
         </p:spPr>
         <p:txBody>
-          <a:bodyPr wrap="square" anchor="t" lIns="0" rIns="0" tIns="0" bIns="0">
+          <a:bodyPr wrap="square" lIns="0" tIns="0" rIns="0" bIns="0" anchor="t">
             <a:spAutoFit/>
           </a:bodyPr>
           <a:lstStyle/>
@@ -13969,6 +14176,7 @@
           <a:lstStyle/>
           <a:p>
             <a:pPr algn="ctr"/>
+            <a:endParaRPr/>
           </a:p>
         </p:txBody>
       </p:sp>
@@ -13989,7 +14197,7 @@
           <a:noFill/>
         </p:spPr>
         <p:txBody>
-          <a:bodyPr wrap="square" anchor="ctr" lIns="0" rIns="0" tIns="0" bIns="0">
+          <a:bodyPr wrap="square" lIns="0" tIns="0" rIns="0" bIns="0" anchor="ctr">
             <a:spAutoFit/>
           </a:bodyPr>
           <a:lstStyle/>
@@ -14049,6 +14257,7 @@
           <a:lstStyle/>
           <a:p>
             <a:pPr algn="ctr"/>
+            <a:endParaRPr/>
           </a:p>
         </p:txBody>
       </p:sp>
@@ -14069,7 +14278,7 @@
           <a:noFill/>
         </p:spPr>
         <p:txBody>
-          <a:bodyPr wrap="square" anchor="ctr" lIns="0" rIns="0" tIns="0" bIns="0">
+          <a:bodyPr wrap="square" lIns="0" tIns="0" rIns="0" bIns="0" anchor="ctr">
             <a:spAutoFit/>
           </a:bodyPr>
           <a:lstStyle/>
@@ -14129,6 +14338,7 @@
           <a:lstStyle/>
           <a:p>
             <a:pPr algn="ctr"/>
+            <a:endParaRPr/>
           </a:p>
         </p:txBody>
       </p:sp>
@@ -14149,7 +14359,7 @@
           <a:noFill/>
         </p:spPr>
         <p:txBody>
-          <a:bodyPr wrap="square" anchor="t" lIns="0" rIns="0" tIns="0" bIns="0">
+          <a:bodyPr wrap="square" lIns="0" tIns="0" rIns="0" bIns="0" anchor="t">
             <a:spAutoFit/>
           </a:bodyPr>
           <a:lstStyle/>
@@ -14286,6 +14496,7 @@
           <a:lstStyle/>
           <a:p>
             <a:pPr algn="ctr"/>
+            <a:endParaRPr/>
           </a:p>
         </p:txBody>
       </p:sp>
@@ -14306,7 +14517,7 @@
           <a:noFill/>
         </p:spPr>
         <p:txBody>
-          <a:bodyPr wrap="square" anchor="ctr" lIns="0" rIns="0" tIns="0" bIns="0">
+          <a:bodyPr wrap="square" lIns="0" tIns="0" rIns="0" bIns="0" anchor="ctr">
             <a:spAutoFit/>
           </a:bodyPr>
           <a:lstStyle/>
@@ -14346,7 +14557,7 @@
           <a:noFill/>
         </p:spPr>
         <p:txBody>
-          <a:bodyPr wrap="square" anchor="t" lIns="0" rIns="0" tIns="0" bIns="0">
+          <a:bodyPr wrap="square" lIns="0" tIns="0" rIns="0" bIns="0" anchor="t">
             <a:spAutoFit/>
           </a:bodyPr>
           <a:lstStyle/>
@@ -14406,6 +14617,7 @@
           <a:lstStyle/>
           <a:p>
             <a:pPr algn="ctr"/>
+            <a:endParaRPr/>
           </a:p>
         </p:txBody>
       </p:sp>
@@ -14426,7 +14638,7 @@
           <a:noFill/>
         </p:spPr>
         <p:txBody>
-          <a:bodyPr wrap="square" anchor="ctr" lIns="0" rIns="0" tIns="0" bIns="0">
+          <a:bodyPr wrap="square" lIns="0" tIns="0" rIns="0" bIns="0" anchor="ctr">
             <a:spAutoFit/>
           </a:bodyPr>
           <a:lstStyle/>
@@ -14486,6 +14698,7 @@
           <a:lstStyle/>
           <a:p>
             <a:pPr algn="ctr"/>
+            <a:endParaRPr/>
           </a:p>
         </p:txBody>
       </p:sp>
@@ -14506,7 +14719,7 @@
           <a:noFill/>
         </p:spPr>
         <p:txBody>
-          <a:bodyPr wrap="square" anchor="ctr" lIns="0" rIns="0" tIns="0" bIns="0">
+          <a:bodyPr wrap="square" lIns="0" tIns="0" rIns="0" bIns="0" anchor="ctr">
             <a:spAutoFit/>
           </a:bodyPr>
           <a:lstStyle/>
@@ -14568,6 +14781,7 @@
           <a:lstStyle/>
           <a:p>
             <a:pPr algn="ctr"/>
+            <a:endParaRPr/>
           </a:p>
         </p:txBody>
       </p:sp>
@@ -14588,7 +14802,7 @@
           <a:noFill/>
         </p:spPr>
         <p:txBody>
-          <a:bodyPr wrap="square" anchor="t" lIns="0" rIns="0" tIns="0" bIns="0">
+          <a:bodyPr wrap="square" lIns="0" tIns="0" rIns="0" bIns="0" anchor="t">
             <a:spAutoFit/>
           </a:bodyPr>
           <a:lstStyle/>
@@ -14725,6 +14939,7 @@
           <a:lstStyle/>
           <a:p>
             <a:pPr algn="ctr"/>
+            <a:endParaRPr/>
           </a:p>
         </p:txBody>
       </p:sp>
@@ -14745,7 +14960,7 @@
           <a:noFill/>
         </p:spPr>
         <p:txBody>
-          <a:bodyPr wrap="square" anchor="ctr" lIns="0" rIns="0" tIns="0" bIns="0">
+          <a:bodyPr wrap="square" lIns="0" tIns="0" rIns="0" bIns="0" anchor="ctr">
             <a:spAutoFit/>
           </a:bodyPr>
           <a:lstStyle/>
@@ -14809,6 +15024,7 @@
           <a:lstStyle/>
           <a:p>
             <a:pPr algn="ctr"/>
+            <a:endParaRPr/>
           </a:p>
         </p:txBody>
       </p:sp>
@@ -14829,7 +15045,7 @@
           <a:noFill/>
         </p:spPr>
         <p:txBody>
-          <a:bodyPr wrap="square" anchor="ctr" lIns="0" rIns="0" tIns="0" bIns="0">
+          <a:bodyPr wrap="square" lIns="0" tIns="0" rIns="0" bIns="0" anchor="ctr">
             <a:spAutoFit/>
           </a:bodyPr>
           <a:lstStyle/>
@@ -14861,7 +15077,7 @@
 </file>
 
 <file path=ppt/slides/slide2.xml><?xml version="1.0" encoding="utf-8"?>
-<p:sld xmlns:a="http://schemas.openxmlformats.org/drawingml/2006/main" xmlns:p="http://schemas.openxmlformats.org/presentationml/2006/main" xmlns:r="http://schemas.openxmlformats.org/officeDocument/2006/relationships">
+<p:sld xmlns:a="http://schemas.openxmlformats.org/drawingml/2006/main" xmlns:r="http://schemas.openxmlformats.org/officeDocument/2006/relationships" xmlns:p="http://schemas.openxmlformats.org/presentationml/2006/main">
   <p:cSld>
     <p:bg>
       <p:bgPr>
@@ -14877,7 +15093,14 @@
         <p:cNvGrpSpPr/>
         <p:nvPr/>
       </p:nvGrpSpPr>
-      <p:grpSpPr/>
+      <p:grpSpPr>
+        <a:xfrm>
+          <a:off x="0" y="0"/>
+          <a:ext cx="0" cy="0"/>
+          <a:chOff x="0" y="0"/>
+          <a:chExt cx="0" cy="0"/>
+        </a:xfrm>
+      </p:grpSpPr>
       <p:sp>
         <p:nvSpPr>
           <p:cNvPr id="2" name="TextBox 1"/>
@@ -14895,7 +15118,7 @@
           <a:noFill/>
         </p:spPr>
         <p:txBody>
-          <a:bodyPr wrap="square" anchor="t" lIns="0" rIns="0" tIns="0" bIns="0">
+          <a:bodyPr wrap="square" lIns="0" tIns="0" rIns="0" bIns="0" anchor="t">
             <a:spAutoFit/>
           </a:bodyPr>
           <a:lstStyle/>
@@ -14931,7 +15154,7 @@
           <a:noFill/>
         </p:spPr>
         <p:txBody>
-          <a:bodyPr wrap="square" anchor="t" lIns="0" rIns="0" tIns="0" bIns="0">
+          <a:bodyPr wrap="square" lIns="0" tIns="0" rIns="0" bIns="0" anchor="t">
             <a:spAutoFit/>
           </a:bodyPr>
           <a:lstStyle/>
@@ -14991,6 +15214,7 @@
           <a:lstStyle/>
           <a:p>
             <a:pPr algn="ctr"/>
+            <a:endParaRPr/>
           </a:p>
         </p:txBody>
       </p:sp>
@@ -15035,6 +15259,7 @@
           <a:lstStyle/>
           <a:p>
             <a:pPr algn="ctr"/>
+            <a:endParaRPr/>
           </a:p>
         </p:txBody>
       </p:sp>
@@ -15055,7 +15280,7 @@
           <a:noFill/>
         </p:spPr>
         <p:txBody>
-          <a:bodyPr wrap="square" anchor="t" lIns="0" rIns="0" tIns="0" bIns="0">
+          <a:bodyPr wrap="square" lIns="0" tIns="0" rIns="0" bIns="0" anchor="t">
             <a:spAutoFit/>
           </a:bodyPr>
           <a:lstStyle/>
@@ -15340,7 +15565,7 @@
           <a:noFill/>
         </p:spPr>
         <p:txBody>
-          <a:bodyPr wrap="square" anchor="t" lIns="0" rIns="0" tIns="0" bIns="0">
+          <a:bodyPr wrap="square" lIns="0" tIns="0" rIns="0" bIns="0" anchor="t">
             <a:spAutoFit/>
           </a:bodyPr>
           <a:lstStyle/>
@@ -15368,7 +15593,7 @@
 </file>
 
 <file path=ppt/slides/slide3.xml><?xml version="1.0" encoding="utf-8"?>
-<p:sld xmlns:a="http://schemas.openxmlformats.org/drawingml/2006/main" xmlns:p="http://schemas.openxmlformats.org/presentationml/2006/main" xmlns:r="http://schemas.openxmlformats.org/officeDocument/2006/relationships">
+<p:sld xmlns:a="http://schemas.openxmlformats.org/drawingml/2006/main" xmlns:r="http://schemas.openxmlformats.org/officeDocument/2006/relationships" xmlns:p="http://schemas.openxmlformats.org/presentationml/2006/main">
   <p:cSld>
     <p:bg>
       <p:bgPr>
@@ -15384,7 +15609,14 @@
         <p:cNvGrpSpPr/>
         <p:nvPr/>
       </p:nvGrpSpPr>
-      <p:grpSpPr/>
+      <p:grpSpPr>
+        <a:xfrm>
+          <a:off x="0" y="0"/>
+          <a:ext cx="0" cy="0"/>
+          <a:chOff x="0" y="0"/>
+          <a:chExt cx="0" cy="0"/>
+        </a:xfrm>
+      </p:grpSpPr>
       <p:sp>
         <p:nvSpPr>
           <p:cNvPr id="2" name="TextBox 1"/>
@@ -15402,7 +15634,7 @@
           <a:noFill/>
         </p:spPr>
         <p:txBody>
-          <a:bodyPr wrap="square" anchor="t" lIns="0" rIns="0" tIns="0" bIns="0">
+          <a:bodyPr wrap="square" lIns="0" tIns="0" rIns="0" bIns="0" anchor="t">
             <a:spAutoFit/>
           </a:bodyPr>
           <a:lstStyle/>
@@ -15462,6 +15694,7 @@
           <a:lstStyle/>
           <a:p>
             <a:pPr algn="ctr"/>
+            <a:endParaRPr/>
           </a:p>
         </p:txBody>
       </p:sp>
@@ -15482,7 +15715,7 @@
           <a:noFill/>
         </p:spPr>
         <p:txBody>
-          <a:bodyPr wrap="square" anchor="t" lIns="0" rIns="0" tIns="0" bIns="0">
+          <a:bodyPr wrap="square" lIns="0" tIns="0" rIns="0" bIns="0" anchor="t">
             <a:spAutoFit/>
           </a:bodyPr>
           <a:lstStyle/>
@@ -15514,7 +15747,7 @@
           <p:nvPr/>
         </p:nvPicPr>
         <p:blipFill>
-          <a:blip r:embed="rId2"/>
+          <a:blip r:embed="rId3"/>
           <a:stretch>
             <a:fillRect/>
           </a:stretch>
@@ -15546,7 +15779,7 @@
           <a:noFill/>
         </p:spPr>
         <p:txBody>
-          <a:bodyPr wrap="square" anchor="t" lIns="0" rIns="0" tIns="0" bIns="0">
+          <a:bodyPr wrap="square" lIns="0" tIns="0" rIns="0" bIns="0" anchor="t">
             <a:spAutoFit/>
           </a:bodyPr>
           <a:lstStyle/>
@@ -15606,6 +15839,7 @@
           <a:lstStyle/>
           <a:p>
             <a:pPr algn="ctr"/>
+            <a:endParaRPr/>
           </a:p>
         </p:txBody>
       </p:sp>
@@ -15626,7 +15860,7 @@
           <a:noFill/>
         </p:spPr>
         <p:txBody>
-          <a:bodyPr wrap="square" anchor="ctr" lIns="0" rIns="0" tIns="0" bIns="0">
+          <a:bodyPr wrap="square" lIns="0" tIns="0" rIns="0" bIns="0" anchor="ctr">
             <a:spAutoFit/>
           </a:bodyPr>
           <a:lstStyle/>
@@ -15686,6 +15920,7 @@
           <a:lstStyle/>
           <a:p>
             <a:pPr algn="ctr"/>
+            <a:endParaRPr/>
           </a:p>
         </p:txBody>
       </p:sp>
@@ -15706,7 +15941,7 @@
           <a:noFill/>
         </p:spPr>
         <p:txBody>
-          <a:bodyPr wrap="square" anchor="t" lIns="0" rIns="0" tIns="0" bIns="0">
+          <a:bodyPr wrap="square" lIns="0" tIns="0" rIns="0" bIns="0" anchor="t">
             <a:spAutoFit/>
           </a:bodyPr>
           <a:lstStyle/>
@@ -15742,7 +15977,7 @@
           <a:noFill/>
         </p:spPr>
         <p:txBody>
-          <a:bodyPr wrap="square" anchor="t" lIns="0" rIns="0" tIns="0" bIns="0">
+          <a:bodyPr wrap="square" lIns="0" tIns="0" rIns="0" bIns="0" anchor="t">
             <a:spAutoFit/>
           </a:bodyPr>
           <a:lstStyle/>
@@ -15802,6 +16037,7 @@
           <a:lstStyle/>
           <a:p>
             <a:pPr algn="ctr"/>
+            <a:endParaRPr/>
           </a:p>
         </p:txBody>
       </p:sp>
@@ -15822,7 +16058,7 @@
           <a:noFill/>
         </p:spPr>
         <p:txBody>
-          <a:bodyPr wrap="square" anchor="t" lIns="0" rIns="0" tIns="0" bIns="0">
+          <a:bodyPr wrap="square" lIns="0" tIns="0" rIns="0" bIns="0" anchor="t">
             <a:spAutoFit/>
           </a:bodyPr>
           <a:lstStyle/>
@@ -15858,7 +16094,7 @@
           <a:noFill/>
         </p:spPr>
         <p:txBody>
-          <a:bodyPr wrap="square" anchor="t" lIns="0" rIns="0" tIns="0" bIns="0">
+          <a:bodyPr wrap="square" lIns="0" tIns="0" rIns="0" bIns="0" anchor="t">
             <a:spAutoFit/>
           </a:bodyPr>
           <a:lstStyle/>
@@ -15918,6 +16154,7 @@
           <a:lstStyle/>
           <a:p>
             <a:pPr algn="ctr"/>
+            <a:endParaRPr/>
           </a:p>
         </p:txBody>
       </p:sp>
@@ -15938,7 +16175,7 @@
           <a:noFill/>
         </p:spPr>
         <p:txBody>
-          <a:bodyPr wrap="square" anchor="t" lIns="0" rIns="0" tIns="0" bIns="0">
+          <a:bodyPr wrap="square" lIns="0" tIns="0" rIns="0" bIns="0" anchor="t">
             <a:spAutoFit/>
           </a:bodyPr>
           <a:lstStyle/>
@@ -15974,7 +16211,7 @@
           <a:noFill/>
         </p:spPr>
         <p:txBody>
-          <a:bodyPr wrap="square" anchor="t" lIns="0" rIns="0" tIns="0" bIns="0">
+          <a:bodyPr wrap="square" lIns="0" tIns="0" rIns="0" bIns="0" anchor="t">
             <a:spAutoFit/>
           </a:bodyPr>
           <a:lstStyle/>
@@ -16034,6 +16271,7 @@
           <a:lstStyle/>
           <a:p>
             <a:pPr algn="ctr"/>
+            <a:endParaRPr/>
           </a:p>
         </p:txBody>
       </p:sp>
@@ -16054,7 +16292,7 @@
           <a:noFill/>
         </p:spPr>
         <p:txBody>
-          <a:bodyPr wrap="square" anchor="t" lIns="0" rIns="0" tIns="0" bIns="0">
+          <a:bodyPr wrap="square" lIns="0" tIns="0" rIns="0" bIns="0" anchor="t">
             <a:spAutoFit/>
           </a:bodyPr>
           <a:lstStyle/>
@@ -16090,7 +16328,7 @@
           <a:noFill/>
         </p:spPr>
         <p:txBody>
-          <a:bodyPr wrap="square" anchor="t" lIns="0" rIns="0" tIns="0" bIns="0">
+          <a:bodyPr wrap="square" lIns="0" tIns="0" rIns="0" bIns="0" anchor="t">
             <a:spAutoFit/>
           </a:bodyPr>
           <a:lstStyle/>
@@ -16150,6 +16388,7 @@
           <a:lstStyle/>
           <a:p>
             <a:pPr algn="ctr"/>
+            <a:endParaRPr/>
           </a:p>
         </p:txBody>
       </p:sp>
@@ -16170,7 +16409,7 @@
           <a:noFill/>
         </p:spPr>
         <p:txBody>
-          <a:bodyPr wrap="square" anchor="ctr" lIns="0" rIns="0" tIns="0" bIns="0">
+          <a:bodyPr wrap="square" lIns="0" tIns="0" rIns="0" bIns="0" anchor="ctr">
             <a:spAutoFit/>
           </a:bodyPr>
           <a:lstStyle/>
@@ -16206,7 +16445,7 @@
           <a:noFill/>
         </p:spPr>
         <p:txBody>
-          <a:bodyPr wrap="square" anchor="t" lIns="0" rIns="0" tIns="0" bIns="0">
+          <a:bodyPr wrap="square" lIns="0" tIns="0" rIns="0" bIns="0" anchor="t">
             <a:spAutoFit/>
           </a:bodyPr>
           <a:lstStyle/>
@@ -16278,17 +16517,7 @@
                 <a:latin typeface="Malgun Gothic"/>
                 <a:ea typeface="맑은 고딕"/>
               </a:rPr>
-              <a:t>  </a:t>
-            </a:r>
-            <a:r>
-              <a:rPr sz="1050" b="1" i="0">
-                <a:solidFill>
-                  <a:srgbClr val="000000"/>
-                </a:solidFill>
-                <a:latin typeface="Malgun Gothic"/>
-                <a:ea typeface="맑은 고딕"/>
-              </a:rPr>
-              <a:t>8/14 (전체 24필지)</a:t>
+              <a:t>  8/14 (전체 24필지)</a:t>
             </a:r>
           </a:p>
           <a:p>
@@ -16301,17 +16530,7 @@
                 <a:latin typeface="Malgun Gothic"/>
                 <a:ea typeface="맑은 고딕"/>
               </a:rPr>
-              <a:t>• </a:t>
-            </a:r>
-            <a:r>
-              <a:rPr sz="1000" b="0" i="0">
-                <a:solidFill>
-                  <a:srgbClr val="595959"/>
-                </a:solidFill>
-                <a:latin typeface="Malgun Gothic"/>
-                <a:ea typeface="맑은 고딕"/>
-              </a:rPr>
-              <a:t>기온: temp_data.csv (촬영일별, ΔT용)</a:t>
+              <a:t>• 기온: temp_data.csv (촬영일별, ΔT용)</a:t>
             </a:r>
           </a:p>
         </p:txBody>
@@ -16357,6 +16576,7 @@
           <a:lstStyle/>
           <a:p>
             <a:pPr algn="ctr"/>
+            <a:endParaRPr/>
           </a:p>
         </p:txBody>
       </p:sp>
@@ -16377,7 +16597,7 @@
           <a:noFill/>
         </p:spPr>
         <p:txBody>
-          <a:bodyPr wrap="square" anchor="ctr" lIns="0" rIns="0" tIns="0" bIns="0">
+          <a:bodyPr wrap="square" lIns="0" tIns="0" rIns="0" bIns="0" anchor="ctr">
             <a:spAutoFit/>
           </a:bodyPr>
           <a:lstStyle/>
@@ -16411,12 +16631,24 @@
         <a:graphic>
           <a:graphicData uri="http://schemas.openxmlformats.org/drawingml/2006/table">
             <a:tbl>
-              <a:tblPr firstRow="0" bandRow="0">
+              <a:tblPr>
                 <a:tableStyleId>{5C22544A-7EE6-4342-B048-85BDC9FD1C3A}</a:tableStyleId>
               </a:tblPr>
               <a:tblGrid>
-                <a:gridCol w="1600200"/>
-                <a:gridCol w="3502152"/>
+                <a:gridCol w="1600200">
+                  <a:extLst>
+                    <a:ext uri="{9D8B030D-6E8A-4147-A177-3AD203B41FA5}">
+                      <a16:colId xmlns:a16="http://schemas.microsoft.com/office/drawing/2014/main" val="20000"/>
+                    </a:ext>
+                  </a:extLst>
+                </a:gridCol>
+                <a:gridCol w="3502152">
+                  <a:extLst>
+                    <a:ext uri="{9D8B030D-6E8A-4147-A177-3AD203B41FA5}">
+                      <a16:colId xmlns:a16="http://schemas.microsoft.com/office/drawing/2014/main" val="20001"/>
+                    </a:ext>
+                  </a:extLst>
+                </a:gridCol>
               </a:tblGrid>
               <a:tr h="420624">
                 <a:tc>
@@ -16465,6 +16697,11 @@
                     </a:solidFill>
                   </a:tcPr>
                 </a:tc>
+                <a:extLst>
+                  <a:ext uri="{0D108BD9-81ED-4DB2-BD59-A6C34878D82A}">
+                    <a16:rowId xmlns:a16="http://schemas.microsoft.com/office/drawing/2014/main" val="10000"/>
+                  </a:ext>
+                </a:extLst>
               </a:tr>
               <a:tr h="420624">
                 <a:tc>
@@ -16513,6 +16750,11 @@
                     </a:solidFill>
                   </a:tcPr>
                 </a:tc>
+                <a:extLst>
+                  <a:ext uri="{0D108BD9-81ED-4DB2-BD59-A6C34878D82A}">
+                    <a16:rowId xmlns:a16="http://schemas.microsoft.com/office/drawing/2014/main" val="10001"/>
+                  </a:ext>
+                </a:extLst>
               </a:tr>
               <a:tr h="420624">
                 <a:tc>
@@ -16561,6 +16803,11 @@
                     </a:solidFill>
                   </a:tcPr>
                 </a:tc>
+                <a:extLst>
+                  <a:ext uri="{0D108BD9-81ED-4DB2-BD59-A6C34878D82A}">
+                    <a16:rowId xmlns:a16="http://schemas.microsoft.com/office/drawing/2014/main" val="10002"/>
+                  </a:ext>
+                </a:extLst>
               </a:tr>
               <a:tr h="420624">
                 <a:tc>
@@ -16609,6 +16856,11 @@
                     </a:solidFill>
                   </a:tcPr>
                 </a:tc>
+                <a:extLst>
+                  <a:ext uri="{0D108BD9-81ED-4DB2-BD59-A6C34878D82A}">
+                    <a16:rowId xmlns:a16="http://schemas.microsoft.com/office/drawing/2014/main" val="10003"/>
+                  </a:ext>
+                </a:extLst>
               </a:tr>
               <a:tr h="420624">
                 <a:tc>
@@ -16657,6 +16909,11 @@
                     </a:solidFill>
                   </a:tcPr>
                 </a:tc>
+                <a:extLst>
+                  <a:ext uri="{0D108BD9-81ED-4DB2-BD59-A6C34878D82A}">
+                    <a16:rowId xmlns:a16="http://schemas.microsoft.com/office/drawing/2014/main" val="10004"/>
+                  </a:ext>
+                </a:extLst>
               </a:tr>
               <a:tr h="420624">
                 <a:tc>
@@ -16705,6 +16962,11 @@
                     </a:solidFill>
                   </a:tcPr>
                 </a:tc>
+                <a:extLst>
+                  <a:ext uri="{0D108BD9-81ED-4DB2-BD59-A6C34878D82A}">
+                    <a16:rowId xmlns:a16="http://schemas.microsoft.com/office/drawing/2014/main" val="10005"/>
+                  </a:ext>
+                </a:extLst>
               </a:tr>
             </a:tbl>
           </a:graphicData>
@@ -16751,6 +17013,7 @@
           <a:lstStyle/>
           <a:p>
             <a:pPr algn="ctr"/>
+            <a:endParaRPr/>
           </a:p>
         </p:txBody>
       </p:sp>
@@ -16771,7 +17034,7 @@
           <a:noFill/>
         </p:spPr>
         <p:txBody>
-          <a:bodyPr wrap="square" anchor="ctr" lIns="0" rIns="0" tIns="0" bIns="0">
+          <a:bodyPr wrap="square" lIns="0" tIns="0" rIns="0" bIns="0" anchor="ctr">
             <a:spAutoFit/>
           </a:bodyPr>
           <a:lstStyle/>
@@ -16799,7 +17062,7 @@
 </file>
 
 <file path=ppt/slides/slide4.xml><?xml version="1.0" encoding="utf-8"?>
-<p:sld xmlns:a="http://schemas.openxmlformats.org/drawingml/2006/main" xmlns:p="http://schemas.openxmlformats.org/presentationml/2006/main" xmlns:r="http://schemas.openxmlformats.org/officeDocument/2006/relationships">
+<p:sld xmlns:a="http://schemas.openxmlformats.org/drawingml/2006/main" xmlns:r="http://schemas.openxmlformats.org/officeDocument/2006/relationships" xmlns:p="http://schemas.openxmlformats.org/presentationml/2006/main">
   <p:cSld>
     <p:bg>
       <p:bgPr>
@@ -16815,7 +17078,14 @@
         <p:cNvGrpSpPr/>
         <p:nvPr/>
       </p:nvGrpSpPr>
-      <p:grpSpPr/>
+      <p:grpSpPr>
+        <a:xfrm>
+          <a:off x="0" y="0"/>
+          <a:ext cx="0" cy="0"/>
+          <a:chOff x="0" y="0"/>
+          <a:chExt cx="0" cy="0"/>
+        </a:xfrm>
+      </p:grpSpPr>
       <p:sp>
         <p:nvSpPr>
           <p:cNvPr id="2" name="TextBox 1"/>
@@ -16833,7 +17103,7 @@
           <a:noFill/>
         </p:spPr>
         <p:txBody>
-          <a:bodyPr wrap="square" anchor="t" lIns="0" rIns="0" tIns="0" bIns="0">
+          <a:bodyPr wrap="square" lIns="0" tIns="0" rIns="0" bIns="0" anchor="t">
             <a:spAutoFit/>
           </a:bodyPr>
           <a:lstStyle/>
@@ -16893,6 +17163,7 @@
           <a:lstStyle/>
           <a:p>
             <a:pPr algn="ctr"/>
+            <a:endParaRPr/>
           </a:p>
         </p:txBody>
       </p:sp>
@@ -16913,7 +17184,7 @@
           <a:noFill/>
         </p:spPr>
         <p:txBody>
-          <a:bodyPr wrap="square" anchor="t" lIns="0" rIns="0" tIns="0" bIns="0">
+          <a:bodyPr wrap="square" lIns="0" tIns="0" rIns="0" bIns="0" anchor="t">
             <a:spAutoFit/>
           </a:bodyPr>
           <a:lstStyle/>
@@ -16945,7 +17216,7 @@
           <p:nvPr/>
         </p:nvPicPr>
         <p:blipFill>
-          <a:blip r:embed="rId2"/>
+          <a:blip r:embed="rId3"/>
           <a:stretch>
             <a:fillRect/>
           </a:stretch>
@@ -16977,7 +17248,7 @@
           <a:noFill/>
         </p:spPr>
         <p:txBody>
-          <a:bodyPr wrap="square" anchor="t" lIns="0" rIns="0" tIns="0" bIns="0">
+          <a:bodyPr wrap="square" lIns="0" tIns="0" rIns="0" bIns="0" anchor="t">
             <a:spAutoFit/>
           </a:bodyPr>
           <a:lstStyle/>
@@ -17002,7 +17273,13 @@
           <p:cNvGraphicFramePr>
             <a:graphicFrameLocks noGrp="1"/>
           </p:cNvGraphicFramePr>
-          <p:nvPr/>
+          <p:nvPr>
+            <p:extLst>
+              <p:ext uri="{D42A27DB-BD31-4B8C-83A1-F6EECF244321}">
+                <p14:modId xmlns:p14="http://schemas.microsoft.com/office/powerpoint/2010/main" val="3640198972"/>
+              </p:ext>
+            </p:extLst>
+          </p:nvPr>
         </p:nvGraphicFramePr>
         <p:xfrm>
           <a:off x="411480" y="1389888"/>
@@ -17011,15 +17288,45 @@
         <a:graphic>
           <a:graphicData uri="http://schemas.openxmlformats.org/drawingml/2006/table">
             <a:tbl>
-              <a:tblPr firstRow="0" bandRow="0">
+              <a:tblPr>
                 <a:tableStyleId>{5C22544A-7EE6-4342-B048-85BDC9FD1C3A}</a:tableStyleId>
               </a:tblPr>
               <a:tblGrid>
-                <a:gridCol w="292608"/>
-                <a:gridCol w="1737360"/>
-                <a:gridCol w="3291840"/>
-                <a:gridCol w="2148840"/>
-                <a:gridCol w="1609344"/>
+                <a:gridCol w="292608">
+                  <a:extLst>
+                    <a:ext uri="{9D8B030D-6E8A-4147-A177-3AD203B41FA5}">
+                      <a16:colId xmlns:a16="http://schemas.microsoft.com/office/drawing/2014/main" val="20000"/>
+                    </a:ext>
+                  </a:extLst>
+                </a:gridCol>
+                <a:gridCol w="1737360">
+                  <a:extLst>
+                    <a:ext uri="{9D8B030D-6E8A-4147-A177-3AD203B41FA5}">
+                      <a16:colId xmlns:a16="http://schemas.microsoft.com/office/drawing/2014/main" val="20001"/>
+                    </a:ext>
+                  </a:extLst>
+                </a:gridCol>
+                <a:gridCol w="3291840">
+                  <a:extLst>
+                    <a:ext uri="{9D8B030D-6E8A-4147-A177-3AD203B41FA5}">
+                      <a16:colId xmlns:a16="http://schemas.microsoft.com/office/drawing/2014/main" val="20002"/>
+                    </a:ext>
+                  </a:extLst>
+                </a:gridCol>
+                <a:gridCol w="2148840">
+                  <a:extLst>
+                    <a:ext uri="{9D8B030D-6E8A-4147-A177-3AD203B41FA5}">
+                      <a16:colId xmlns:a16="http://schemas.microsoft.com/office/drawing/2014/main" val="20003"/>
+                    </a:ext>
+                  </a:extLst>
+                </a:gridCol>
+                <a:gridCol w="1609344">
+                  <a:extLst>
+                    <a:ext uri="{9D8B030D-6E8A-4147-A177-3AD203B41FA5}">
+                      <a16:colId xmlns:a16="http://schemas.microsoft.com/office/drawing/2014/main" val="20004"/>
+                    </a:ext>
+                  </a:extLst>
+                </a:gridCol>
               </a:tblGrid>
               <a:tr h="502920">
                 <a:tc>
@@ -17138,6 +17445,11 @@
                     </a:solidFill>
                   </a:tcPr>
                 </a:tc>
+                <a:extLst>
+                  <a:ext uri="{0D108BD9-81ED-4DB2-BD59-A6C34878D82A}">
+                    <a16:rowId xmlns:a16="http://schemas.microsoft.com/office/drawing/2014/main" val="10000"/>
+                  </a:ext>
+                </a:extLst>
               </a:tr>
               <a:tr h="502920">
                 <a:tc>
@@ -17256,6 +17568,11 @@
                     </a:solidFill>
                   </a:tcPr>
                 </a:tc>
+                <a:extLst>
+                  <a:ext uri="{0D108BD9-81ED-4DB2-BD59-A6C34878D82A}">
+                    <a16:rowId xmlns:a16="http://schemas.microsoft.com/office/drawing/2014/main" val="10001"/>
+                  </a:ext>
+                </a:extLst>
               </a:tr>
               <a:tr h="502920">
                 <a:tc>
@@ -17265,10 +17582,13 @@
                     <a:p>
                       <a:pPr algn="ctr"/>
                       <a:r>
-                        <a:rPr sz="850" b="0" i="0">
+                        <a:rPr sz="850" b="1" i="0">
                           <a:solidFill>
                             <a:srgbClr val="000000"/>
                           </a:solidFill>
+                          <a:highlight>
+                            <a:srgbClr val="FFFF00"/>
+                          </a:highlight>
                           <a:latin typeface="Malgun Gothic"/>
                           <a:ea typeface="맑은 고딕"/>
                         </a:rPr>
@@ -17278,7 +17598,7 @@
                   </a:txBody>
                   <a:tcPr marL="64008" marR="64008" marT="18288" marB="18288" anchor="ctr">
                     <a:solidFill>
-                      <a:srgbClr val="F2F2F2"/>
+                      <a:srgbClr val="FFFF00"/>
                     </a:solidFill>
                   </a:tcPr>
                 </a:tc>
@@ -17288,10 +17608,13 @@
                     <a:lstStyle/>
                     <a:p>
                       <a:r>
-                        <a:rPr sz="850" b="0" i="0">
+                        <a:rPr sz="850" b="1" i="0">
                           <a:solidFill>
                             <a:srgbClr val="000000"/>
                           </a:solidFill>
+                          <a:highlight>
+                            <a:srgbClr val="FFFF00"/>
+                          </a:highlight>
                           <a:latin typeface="Malgun Gothic"/>
                           <a:ea typeface="맑은 고딕"/>
                         </a:rPr>
@@ -17301,7 +17624,7 @@
                   </a:txBody>
                   <a:tcPr marL="64008" marR="64008" marT="18288" marB="18288" anchor="ctr">
                     <a:solidFill>
-                      <a:srgbClr val="F2F2F2"/>
+                      <a:srgbClr val="FFFF00"/>
                     </a:solidFill>
                   </a:tcPr>
                 </a:tc>
@@ -17311,10 +17634,13 @@
                     <a:lstStyle/>
                     <a:p>
                       <a:r>
-                        <a:rPr sz="850" b="0" i="0">
+                        <a:rPr sz="850" b="1" i="0">
                           <a:solidFill>
                             <a:srgbClr val="000000"/>
                           </a:solidFill>
+                          <a:highlight>
+                            <a:srgbClr val="FFFF00"/>
+                          </a:highlight>
                           <a:latin typeface="Malgun Gothic"/>
                           <a:ea typeface="맑은 고딕"/>
                         </a:rPr>
@@ -17324,7 +17650,7 @@
                   </a:txBody>
                   <a:tcPr marL="64008" marR="64008" marT="18288" marB="18288" anchor="ctr">
                     <a:solidFill>
-                      <a:srgbClr val="F2F2F2"/>
+                      <a:srgbClr val="FFFF00"/>
                     </a:solidFill>
                   </a:tcPr>
                 </a:tc>
@@ -17334,10 +17660,13 @@
                     <a:lstStyle/>
                     <a:p>
                       <a:r>
-                        <a:rPr sz="850" b="0" i="0">
+                        <a:rPr sz="850" b="1" i="0">
                           <a:solidFill>
                             <a:srgbClr val="000000"/>
                           </a:solidFill>
+                          <a:highlight>
+                            <a:srgbClr val="FFFF00"/>
+                          </a:highlight>
                           <a:latin typeface="Malgun Gothic"/>
                           <a:ea typeface="맑은 고딕"/>
                         </a:rPr>
@@ -17347,7 +17676,7 @@
                   </a:txBody>
                   <a:tcPr marL="64008" marR="64008" marT="18288" marB="18288" anchor="ctr">
                     <a:solidFill>
-                      <a:srgbClr val="F2F2F2"/>
+                      <a:srgbClr val="FFFF00"/>
                     </a:solidFill>
                   </a:tcPr>
                 </a:tc>
@@ -17357,10 +17686,13 @@
                     <a:lstStyle/>
                     <a:p>
                       <a:r>
-                        <a:rPr sz="850" b="0" i="0">
+                        <a:rPr sz="850" b="1" i="0">
                           <a:solidFill>
                             <a:srgbClr val="000000"/>
                           </a:solidFill>
+                          <a:highlight>
+                            <a:srgbClr val="FFFF00"/>
+                          </a:highlight>
                           <a:latin typeface="Malgun Gothic"/>
                           <a:ea typeface="맑은 고딕"/>
                         </a:rPr>
@@ -17370,10 +17702,15 @@
                   </a:txBody>
                   <a:tcPr marL="64008" marR="64008" marT="18288" marB="18288" anchor="ctr">
                     <a:solidFill>
-                      <a:srgbClr val="F2F2F2"/>
+                      <a:srgbClr val="FFFF00"/>
                     </a:solidFill>
                   </a:tcPr>
                 </a:tc>
+                <a:extLst>
+                  <a:ext uri="{0D108BD9-81ED-4DB2-BD59-A6C34878D82A}">
+                    <a16:rowId xmlns:a16="http://schemas.microsoft.com/office/drawing/2014/main" val="10002"/>
+                  </a:ext>
+                </a:extLst>
               </a:tr>
               <a:tr h="502920">
                 <a:tc>
@@ -17492,6 +17829,11 @@
                     </a:solidFill>
                   </a:tcPr>
                 </a:tc>
+                <a:extLst>
+                  <a:ext uri="{0D108BD9-81ED-4DB2-BD59-A6C34878D82A}">
+                    <a16:rowId xmlns:a16="http://schemas.microsoft.com/office/drawing/2014/main" val="10003"/>
+                  </a:ext>
+                </a:extLst>
               </a:tr>
               <a:tr h="502920">
                 <a:tc>
@@ -17501,7 +17843,7 @@
                     <a:p>
                       <a:pPr algn="ctr"/>
                       <a:r>
-                        <a:rPr sz="850" b="0" i="0">
+                        <a:rPr sz="850" b="1" i="0">
                           <a:solidFill>
                             <a:srgbClr val="000000"/>
                           </a:solidFill>
@@ -17514,7 +17856,7 @@
                   </a:txBody>
                   <a:tcPr marL="64008" marR="64008" marT="18288" marB="18288" anchor="ctr">
                     <a:solidFill>
-                      <a:srgbClr val="F2F2F2"/>
+                      <a:srgbClr val="FFFF00"/>
                     </a:solidFill>
                   </a:tcPr>
                 </a:tc>
@@ -17524,7 +17866,7 @@
                     <a:lstStyle/>
                     <a:p>
                       <a:r>
-                        <a:rPr sz="850" b="0" i="0">
+                        <a:rPr sz="850" b="1" i="0">
                           <a:solidFill>
                             <a:srgbClr val="000000"/>
                           </a:solidFill>
@@ -17537,7 +17879,7 @@
                   </a:txBody>
                   <a:tcPr marL="64008" marR="64008" marT="18288" marB="18288" anchor="ctr">
                     <a:solidFill>
-                      <a:srgbClr val="F2F2F2"/>
+                      <a:srgbClr val="FFFF00"/>
                     </a:solidFill>
                   </a:tcPr>
                 </a:tc>
@@ -17547,7 +17889,7 @@
                     <a:lstStyle/>
                     <a:p>
                       <a:r>
-                        <a:rPr sz="850" b="0" i="0">
+                        <a:rPr sz="850" b="1" i="0">
                           <a:solidFill>
                             <a:srgbClr val="000000"/>
                           </a:solidFill>
@@ -17560,7 +17902,7 @@
                   </a:txBody>
                   <a:tcPr marL="64008" marR="64008" marT="18288" marB="18288" anchor="ctr">
                     <a:solidFill>
-                      <a:srgbClr val="F2F2F2"/>
+                      <a:srgbClr val="FFFF00"/>
                     </a:solidFill>
                   </a:tcPr>
                 </a:tc>
@@ -17570,7 +17912,7 @@
                     <a:lstStyle/>
                     <a:p>
                       <a:r>
-                        <a:rPr sz="850" b="0" i="0">
+                        <a:rPr sz="850" b="1" i="0">
                           <a:solidFill>
                             <a:srgbClr val="000000"/>
                           </a:solidFill>
@@ -17583,7 +17925,7 @@
                   </a:txBody>
                   <a:tcPr marL="64008" marR="64008" marT="18288" marB="18288" anchor="ctr">
                     <a:solidFill>
-                      <a:srgbClr val="F2F2F2"/>
+                      <a:srgbClr val="FFFF00"/>
                     </a:solidFill>
                   </a:tcPr>
                 </a:tc>
@@ -17593,7 +17935,7 @@
                     <a:lstStyle/>
                     <a:p>
                       <a:r>
-                        <a:rPr sz="850" b="0" i="0">
+                        <a:rPr sz="850" b="1" i="0">
                           <a:solidFill>
                             <a:srgbClr val="000000"/>
                           </a:solidFill>
@@ -17606,10 +17948,15 @@
                   </a:txBody>
                   <a:tcPr marL="64008" marR="64008" marT="18288" marB="18288" anchor="ctr">
                     <a:solidFill>
-                      <a:srgbClr val="F2F2F2"/>
+                      <a:srgbClr val="FFFF00"/>
                     </a:solidFill>
                   </a:tcPr>
                 </a:tc>
+                <a:extLst>
+                  <a:ext uri="{0D108BD9-81ED-4DB2-BD59-A6C34878D82A}">
+                    <a16:rowId xmlns:a16="http://schemas.microsoft.com/office/drawing/2014/main" val="10004"/>
+                  </a:ext>
+                </a:extLst>
               </a:tr>
               <a:tr h="502920">
                 <a:tc>
@@ -17728,6 +18075,11 @@
                     </a:solidFill>
                   </a:tcPr>
                 </a:tc>
+                <a:extLst>
+                  <a:ext uri="{0D108BD9-81ED-4DB2-BD59-A6C34878D82A}">
+                    <a16:rowId xmlns:a16="http://schemas.microsoft.com/office/drawing/2014/main" val="10005"/>
+                  </a:ext>
+                </a:extLst>
               </a:tr>
               <a:tr h="502920">
                 <a:tc>
@@ -17846,6 +18198,11 @@
                     </a:solidFill>
                   </a:tcPr>
                 </a:tc>
+                <a:extLst>
+                  <a:ext uri="{0D108BD9-81ED-4DB2-BD59-A6C34878D82A}">
+                    <a16:rowId xmlns:a16="http://schemas.microsoft.com/office/drawing/2014/main" val="10006"/>
+                  </a:ext>
+                </a:extLst>
               </a:tr>
               <a:tr h="502920">
                 <a:tc>
@@ -17964,6 +18321,11 @@
                     </a:solidFill>
                   </a:tcPr>
                 </a:tc>
+                <a:extLst>
+                  <a:ext uri="{0D108BD9-81ED-4DB2-BD59-A6C34878D82A}">
+                    <a16:rowId xmlns:a16="http://schemas.microsoft.com/office/drawing/2014/main" val="10007"/>
+                  </a:ext>
+                </a:extLst>
               </a:tr>
               <a:tr h="502920">
                 <a:tc>
@@ -18082,6 +18444,11 @@
                     </a:solidFill>
                   </a:tcPr>
                 </a:tc>
+                <a:extLst>
+                  <a:ext uri="{0D108BD9-81ED-4DB2-BD59-A6C34878D82A}">
+                    <a16:rowId xmlns:a16="http://schemas.microsoft.com/office/drawing/2014/main" val="10008"/>
+                  </a:ext>
+                </a:extLst>
               </a:tr>
             </a:tbl>
           </a:graphicData>
@@ -18128,6 +18495,7 @@
           <a:lstStyle/>
           <a:p>
             <a:pPr algn="ctr"/>
+            <a:endParaRPr/>
           </a:p>
         </p:txBody>
       </p:sp>
@@ -18148,7 +18516,7 @@
           <a:noFill/>
         </p:spPr>
         <p:txBody>
-          <a:bodyPr wrap="square" anchor="ctr" lIns="0" rIns="0" tIns="0" bIns="0">
+          <a:bodyPr wrap="square" lIns="0" tIns="0" rIns="0" bIns="0" anchor="ctr">
             <a:spAutoFit/>
           </a:bodyPr>
           <a:lstStyle/>
@@ -18176,7 +18544,7 @@
 </file>
 
 <file path=ppt/slides/slide5.xml><?xml version="1.0" encoding="utf-8"?>
-<p:sld xmlns:a="http://schemas.openxmlformats.org/drawingml/2006/main" xmlns:p="http://schemas.openxmlformats.org/presentationml/2006/main" xmlns:r="http://schemas.openxmlformats.org/officeDocument/2006/relationships">
+<p:sld xmlns:a="http://schemas.openxmlformats.org/drawingml/2006/main" xmlns:r="http://schemas.openxmlformats.org/officeDocument/2006/relationships" xmlns:p="http://schemas.openxmlformats.org/presentationml/2006/main">
   <p:cSld>
     <p:bg>
       <p:bgPr>
@@ -18192,7 +18560,14 @@
         <p:cNvGrpSpPr/>
         <p:nvPr/>
       </p:nvGrpSpPr>
-      <p:grpSpPr/>
+      <p:grpSpPr>
+        <a:xfrm>
+          <a:off x="0" y="0"/>
+          <a:ext cx="0" cy="0"/>
+          <a:chOff x="0" y="0"/>
+          <a:chExt cx="0" cy="0"/>
+        </a:xfrm>
+      </p:grpSpPr>
       <p:sp>
         <p:nvSpPr>
           <p:cNvPr id="2" name="TextBox 1"/>
@@ -18210,7 +18585,7 @@
           <a:noFill/>
         </p:spPr>
         <p:txBody>
-          <a:bodyPr wrap="square" anchor="t" lIns="0" rIns="0" tIns="0" bIns="0">
+          <a:bodyPr wrap="square" lIns="0" tIns="0" rIns="0" bIns="0" anchor="t">
             <a:spAutoFit/>
           </a:bodyPr>
           <a:lstStyle/>
@@ -18270,6 +18645,7 @@
           <a:lstStyle/>
           <a:p>
             <a:pPr algn="ctr"/>
+            <a:endParaRPr/>
           </a:p>
         </p:txBody>
       </p:sp>
@@ -18290,7 +18666,7 @@
           <a:noFill/>
         </p:spPr>
         <p:txBody>
-          <a:bodyPr wrap="square" anchor="t" lIns="0" rIns="0" tIns="0" bIns="0">
+          <a:bodyPr wrap="square" lIns="0" tIns="0" rIns="0" bIns="0" anchor="t">
             <a:spAutoFit/>
           </a:bodyPr>
           <a:lstStyle/>
@@ -18322,7 +18698,7 @@
           <p:nvPr/>
         </p:nvPicPr>
         <p:blipFill>
-          <a:blip r:embed="rId2"/>
+          <a:blip r:embed="rId3"/>
           <a:stretch>
             <a:fillRect/>
           </a:stretch>
@@ -18354,7 +18730,7 @@
           <a:noFill/>
         </p:spPr>
         <p:txBody>
-          <a:bodyPr wrap="square" anchor="t" lIns="0" rIns="0" tIns="0" bIns="0">
+          <a:bodyPr wrap="square" lIns="0" tIns="0" rIns="0" bIns="0" anchor="t">
             <a:spAutoFit/>
           </a:bodyPr>
           <a:lstStyle/>
@@ -18414,6 +18790,7 @@
           <a:lstStyle/>
           <a:p>
             <a:pPr algn="ctr"/>
+            <a:endParaRPr/>
           </a:p>
         </p:txBody>
       </p:sp>
@@ -18434,7 +18811,7 @@
           <a:noFill/>
         </p:spPr>
         <p:txBody>
-          <a:bodyPr wrap="square" anchor="ctr" lIns="0" rIns="0" tIns="0" bIns="0">
+          <a:bodyPr wrap="square" lIns="0" tIns="0" rIns="0" bIns="0" anchor="ctr">
             <a:spAutoFit/>
           </a:bodyPr>
           <a:lstStyle/>
@@ -18494,6 +18871,7 @@
           <a:lstStyle/>
           <a:p>
             <a:pPr algn="ctr"/>
+            <a:endParaRPr/>
           </a:p>
         </p:txBody>
       </p:sp>
@@ -18514,7 +18892,7 @@
           <a:noFill/>
         </p:spPr>
         <p:txBody>
-          <a:bodyPr wrap="square" anchor="t" lIns="0" rIns="0" tIns="0" bIns="0">
+          <a:bodyPr wrap="square" lIns="0" tIns="0" rIns="0" bIns="0" anchor="t">
             <a:spAutoFit/>
           </a:bodyPr>
           <a:lstStyle/>
@@ -18681,6 +19059,7 @@
           <a:lstStyle/>
           <a:p>
             <a:pPr algn="ctr"/>
+            <a:endParaRPr/>
           </a:p>
         </p:txBody>
       </p:sp>
@@ -18701,7 +19080,7 @@
           <a:noFill/>
         </p:spPr>
         <p:txBody>
-          <a:bodyPr wrap="square" anchor="ctr" lIns="0" rIns="0" tIns="0" bIns="0">
+          <a:bodyPr wrap="square" lIns="0" tIns="0" rIns="0" bIns="0" anchor="ctr">
             <a:spAutoFit/>
           </a:bodyPr>
           <a:lstStyle/>
@@ -18761,6 +19140,7 @@
           <a:lstStyle/>
           <a:p>
             <a:pPr algn="ctr"/>
+            <a:endParaRPr/>
           </a:p>
         </p:txBody>
       </p:sp>
@@ -18781,7 +19161,7 @@
           <a:noFill/>
         </p:spPr>
         <p:txBody>
-          <a:bodyPr wrap="square" anchor="t" lIns="0" rIns="0" tIns="0" bIns="0">
+          <a:bodyPr wrap="square" lIns="0" tIns="0" rIns="0" bIns="0" anchor="t">
             <a:spAutoFit/>
           </a:bodyPr>
           <a:lstStyle/>
@@ -18948,6 +19328,7 @@
           <a:lstStyle/>
           <a:p>
             <a:pPr algn="ctr"/>
+            <a:endParaRPr/>
           </a:p>
         </p:txBody>
       </p:sp>
@@ -18968,7 +19349,7 @@
           <a:noFill/>
         </p:spPr>
         <p:txBody>
-          <a:bodyPr wrap="square" anchor="ctr" lIns="0" rIns="0" tIns="0" bIns="0">
+          <a:bodyPr wrap="square" lIns="0" tIns="0" rIns="0" bIns="0" anchor="ctr">
             <a:spAutoFit/>
           </a:bodyPr>
           <a:lstStyle/>
@@ -19028,6 +19409,7 @@
           <a:lstStyle/>
           <a:p>
             <a:pPr algn="ctr"/>
+            <a:endParaRPr/>
           </a:p>
         </p:txBody>
       </p:sp>
@@ -19048,7 +19430,7 @@
           <a:noFill/>
         </p:spPr>
         <p:txBody>
-          <a:bodyPr wrap="square" anchor="t" lIns="0" rIns="0" tIns="0" bIns="0">
+          <a:bodyPr wrap="square" lIns="0" tIns="0" rIns="0" bIns="0" anchor="t">
             <a:spAutoFit/>
           </a:bodyPr>
           <a:lstStyle/>
@@ -19185,6 +19567,7 @@
           <a:lstStyle/>
           <a:p>
             <a:pPr algn="ctr"/>
+            <a:endParaRPr/>
           </a:p>
         </p:txBody>
       </p:sp>
@@ -19205,7 +19588,7 @@
           <a:noFill/>
         </p:spPr>
         <p:txBody>
-          <a:bodyPr wrap="square" anchor="ctr" lIns="0" rIns="0" tIns="0" bIns="0">
+          <a:bodyPr wrap="square" lIns="0" tIns="0" rIns="0" bIns="0" anchor="ctr">
             <a:spAutoFit/>
           </a:bodyPr>
           <a:lstStyle/>
@@ -19265,6 +19648,7 @@
           <a:lstStyle/>
           <a:p>
             <a:pPr algn="ctr"/>
+            <a:endParaRPr/>
           </a:p>
         </p:txBody>
       </p:sp>
@@ -19285,7 +19669,7 @@
           <a:noFill/>
         </p:spPr>
         <p:txBody>
-          <a:bodyPr wrap="square" anchor="t" lIns="0" rIns="0" tIns="0" bIns="0">
+          <a:bodyPr wrap="square" lIns="0" tIns="0" rIns="0" bIns="0" anchor="t">
             <a:spAutoFit/>
           </a:bodyPr>
           <a:lstStyle/>
@@ -19422,6 +19806,7 @@
           <a:lstStyle/>
           <a:p>
             <a:pPr algn="ctr"/>
+            <a:endParaRPr/>
           </a:p>
         </p:txBody>
       </p:sp>
@@ -19442,7 +19827,7 @@
           <a:noFill/>
         </p:spPr>
         <p:txBody>
-          <a:bodyPr wrap="square" anchor="ctr" lIns="0" rIns="0" tIns="0" bIns="0">
+          <a:bodyPr wrap="square" lIns="0" tIns="0" rIns="0" bIns="0" anchor="ctr">
             <a:spAutoFit/>
           </a:bodyPr>
           <a:lstStyle/>
@@ -19470,7 +19855,7 @@
 </file>
 
 <file path=ppt/slides/slide6.xml><?xml version="1.0" encoding="utf-8"?>
-<p:sld xmlns:a="http://schemas.openxmlformats.org/drawingml/2006/main" xmlns:p="http://schemas.openxmlformats.org/presentationml/2006/main" xmlns:r="http://schemas.openxmlformats.org/officeDocument/2006/relationships">
+<p:sld xmlns:a="http://schemas.openxmlformats.org/drawingml/2006/main" xmlns:r="http://schemas.openxmlformats.org/officeDocument/2006/relationships" xmlns:p="http://schemas.openxmlformats.org/presentationml/2006/main">
   <p:cSld>
     <p:bg>
       <p:bgPr>
@@ -19486,7 +19871,14 @@
         <p:cNvGrpSpPr/>
         <p:nvPr/>
       </p:nvGrpSpPr>
-      <p:grpSpPr/>
+      <p:grpSpPr>
+        <a:xfrm>
+          <a:off x="0" y="0"/>
+          <a:ext cx="0" cy="0"/>
+          <a:chOff x="0" y="0"/>
+          <a:chExt cx="0" cy="0"/>
+        </a:xfrm>
+      </p:grpSpPr>
       <p:sp>
         <p:nvSpPr>
           <p:cNvPr id="2" name="TextBox 1"/>
@@ -19504,7 +19896,7 @@
           <a:noFill/>
         </p:spPr>
         <p:txBody>
-          <a:bodyPr wrap="square" anchor="t" lIns="0" rIns="0" tIns="0" bIns="0">
+          <a:bodyPr wrap="square" lIns="0" tIns="0" rIns="0" bIns="0" anchor="t">
             <a:spAutoFit/>
           </a:bodyPr>
           <a:lstStyle/>
@@ -19564,6 +19956,7 @@
           <a:lstStyle/>
           <a:p>
             <a:pPr algn="ctr"/>
+            <a:endParaRPr/>
           </a:p>
         </p:txBody>
       </p:sp>
@@ -19584,7 +19977,7 @@
           <a:noFill/>
         </p:spPr>
         <p:txBody>
-          <a:bodyPr wrap="square" anchor="t" lIns="0" rIns="0" tIns="0" bIns="0">
+          <a:bodyPr wrap="square" lIns="0" tIns="0" rIns="0" bIns="0" anchor="t">
             <a:spAutoFit/>
           </a:bodyPr>
           <a:lstStyle/>
@@ -19616,7 +20009,7 @@
           <p:nvPr/>
         </p:nvPicPr>
         <p:blipFill>
-          <a:blip r:embed="rId2"/>
+          <a:blip r:embed="rId3"/>
           <a:stretch>
             <a:fillRect/>
           </a:stretch>
@@ -19648,7 +20041,7 @@
           <a:noFill/>
         </p:spPr>
         <p:txBody>
-          <a:bodyPr wrap="square" anchor="t" lIns="0" rIns="0" tIns="0" bIns="0">
+          <a:bodyPr wrap="square" lIns="0" tIns="0" rIns="0" bIns="0" anchor="t">
             <a:spAutoFit/>
           </a:bodyPr>
           <a:lstStyle/>
@@ -19708,6 +20101,7 @@
           <a:lstStyle/>
           <a:p>
             <a:pPr algn="ctr"/>
+            <a:endParaRPr/>
           </a:p>
         </p:txBody>
       </p:sp>
@@ -19752,6 +20146,7 @@
           <a:lstStyle/>
           <a:p>
             <a:pPr algn="ctr"/>
+            <a:endParaRPr/>
           </a:p>
         </p:txBody>
       </p:sp>
@@ -19772,7 +20167,7 @@
           <a:noFill/>
         </p:spPr>
         <p:txBody>
-          <a:bodyPr wrap="square" anchor="ctr" lIns="0" rIns="0" tIns="0" bIns="0">
+          <a:bodyPr wrap="square" lIns="0" tIns="0" rIns="0" bIns="0" anchor="ctr">
             <a:spAutoFit/>
           </a:bodyPr>
           <a:lstStyle/>
@@ -19808,7 +20203,7 @@
           <a:noFill/>
         </p:spPr>
         <p:txBody>
-          <a:bodyPr wrap="square" anchor="t" lIns="0" rIns="0" tIns="0" bIns="0">
+          <a:bodyPr wrap="square" lIns="0" tIns="0" rIns="0" bIns="0" anchor="t">
             <a:spAutoFit/>
           </a:bodyPr>
           <a:lstStyle/>
@@ -19848,7 +20243,7 @@
           <a:noFill/>
         </p:spPr>
         <p:txBody>
-          <a:bodyPr wrap="square" anchor="t" lIns="0" rIns="0" tIns="0" bIns="0">
+          <a:bodyPr wrap="square" lIns="0" tIns="0" rIns="0" bIns="0" anchor="t">
             <a:spAutoFit/>
           </a:bodyPr>
           <a:lstStyle/>
@@ -19908,6 +20303,7 @@
           <a:lstStyle/>
           <a:p>
             <a:pPr algn="ctr"/>
+            <a:endParaRPr/>
           </a:p>
         </p:txBody>
       </p:sp>
@@ -19952,6 +20348,7 @@
           <a:lstStyle/>
           <a:p>
             <a:pPr algn="ctr"/>
+            <a:endParaRPr/>
           </a:p>
         </p:txBody>
       </p:sp>
@@ -19972,7 +20369,7 @@
           <a:noFill/>
         </p:spPr>
         <p:txBody>
-          <a:bodyPr wrap="square" anchor="ctr" lIns="0" rIns="0" tIns="0" bIns="0">
+          <a:bodyPr wrap="square" lIns="0" tIns="0" rIns="0" bIns="0" anchor="ctr">
             <a:spAutoFit/>
           </a:bodyPr>
           <a:lstStyle/>
@@ -20008,7 +20405,7 @@
           <a:noFill/>
         </p:spPr>
         <p:txBody>
-          <a:bodyPr wrap="square" anchor="t" lIns="0" rIns="0" tIns="0" bIns="0">
+          <a:bodyPr wrap="square" lIns="0" tIns="0" rIns="0" bIns="0" anchor="t">
             <a:spAutoFit/>
           </a:bodyPr>
           <a:lstStyle/>
@@ -20072,6 +20469,7 @@
           <a:lstStyle/>
           <a:p>
             <a:pPr algn="ctr"/>
+            <a:endParaRPr/>
           </a:p>
         </p:txBody>
       </p:sp>
@@ -20116,6 +20514,7 @@
           <a:lstStyle/>
           <a:p>
             <a:pPr algn="ctr"/>
+            <a:endParaRPr/>
           </a:p>
         </p:txBody>
       </p:sp>
@@ -20136,7 +20535,7 @@
           <a:noFill/>
         </p:spPr>
         <p:txBody>
-          <a:bodyPr wrap="square" anchor="ctr" lIns="0" rIns="0" tIns="0" bIns="0">
+          <a:bodyPr wrap="square" lIns="0" tIns="0" rIns="0" bIns="0" anchor="ctr">
             <a:spAutoFit/>
           </a:bodyPr>
           <a:lstStyle/>
@@ -20172,7 +20571,7 @@
           <a:noFill/>
         </p:spPr>
         <p:txBody>
-          <a:bodyPr wrap="square" anchor="t" lIns="0" rIns="0" tIns="0" bIns="0">
+          <a:bodyPr wrap="square" lIns="0" tIns="0" rIns="0" bIns="0" anchor="t">
             <a:spAutoFit/>
           </a:bodyPr>
           <a:lstStyle/>
@@ -20212,7 +20611,7 @@
           <a:noFill/>
         </p:spPr>
         <p:txBody>
-          <a:bodyPr wrap="square" anchor="t" lIns="0" rIns="0" tIns="0" bIns="0">
+          <a:bodyPr wrap="square" lIns="0" tIns="0" rIns="0" bIns="0" anchor="t">
             <a:spAutoFit/>
           </a:bodyPr>
           <a:lstStyle/>
@@ -20272,6 +20671,7 @@
           <a:lstStyle/>
           <a:p>
             <a:pPr algn="ctr"/>
+            <a:endParaRPr/>
           </a:p>
         </p:txBody>
       </p:sp>
@@ -20316,6 +20716,7 @@
           <a:lstStyle/>
           <a:p>
             <a:pPr algn="ctr"/>
+            <a:endParaRPr/>
           </a:p>
         </p:txBody>
       </p:sp>
@@ -20336,7 +20737,7 @@
           <a:noFill/>
         </p:spPr>
         <p:txBody>
-          <a:bodyPr wrap="square" anchor="ctr" lIns="0" rIns="0" tIns="0" bIns="0">
+          <a:bodyPr wrap="square" lIns="0" tIns="0" rIns="0" bIns="0" anchor="ctr">
             <a:spAutoFit/>
           </a:bodyPr>
           <a:lstStyle/>
@@ -20372,7 +20773,7 @@
           <a:noFill/>
         </p:spPr>
         <p:txBody>
-          <a:bodyPr wrap="square" anchor="t" lIns="0" rIns="0" tIns="0" bIns="0">
+          <a:bodyPr wrap="square" lIns="0" tIns="0" rIns="0" bIns="0" anchor="t">
             <a:spAutoFit/>
           </a:bodyPr>
           <a:lstStyle/>
@@ -20436,6 +20837,7 @@
           <a:lstStyle/>
           <a:p>
             <a:pPr algn="ctr"/>
+            <a:endParaRPr/>
           </a:p>
         </p:txBody>
       </p:sp>
@@ -20480,6 +20882,7 @@
           <a:lstStyle/>
           <a:p>
             <a:pPr algn="ctr"/>
+            <a:endParaRPr/>
           </a:p>
         </p:txBody>
       </p:sp>
@@ -20500,7 +20903,7 @@
           <a:noFill/>
         </p:spPr>
         <p:txBody>
-          <a:bodyPr wrap="square" anchor="ctr" lIns="0" rIns="0" tIns="0" bIns="0">
+          <a:bodyPr wrap="square" lIns="0" tIns="0" rIns="0" bIns="0" anchor="ctr">
             <a:spAutoFit/>
           </a:bodyPr>
           <a:lstStyle/>
@@ -20536,7 +20939,7 @@
           <a:noFill/>
         </p:spPr>
         <p:txBody>
-          <a:bodyPr wrap="square" anchor="t" lIns="0" rIns="0" tIns="0" bIns="0">
+          <a:bodyPr wrap="square" lIns="0" tIns="0" rIns="0" bIns="0" anchor="t">
             <a:spAutoFit/>
           </a:bodyPr>
           <a:lstStyle/>
@@ -20576,7 +20979,7 @@
           <a:noFill/>
         </p:spPr>
         <p:txBody>
-          <a:bodyPr wrap="square" anchor="t" lIns="0" rIns="0" tIns="0" bIns="0">
+          <a:bodyPr wrap="square" lIns="0" tIns="0" rIns="0" bIns="0" anchor="t">
             <a:spAutoFit/>
           </a:bodyPr>
           <a:lstStyle/>
@@ -20636,6 +21039,7 @@
           <a:lstStyle/>
           <a:p>
             <a:pPr algn="ctr"/>
+            <a:endParaRPr/>
           </a:p>
         </p:txBody>
       </p:sp>
@@ -20680,6 +21084,7 @@
           <a:lstStyle/>
           <a:p>
             <a:pPr algn="ctr"/>
+            <a:endParaRPr/>
           </a:p>
         </p:txBody>
       </p:sp>
@@ -20700,7 +21105,7 @@
           <a:noFill/>
         </p:spPr>
         <p:txBody>
-          <a:bodyPr wrap="square" anchor="ctr" lIns="0" rIns="0" tIns="0" bIns="0">
+          <a:bodyPr wrap="square" lIns="0" tIns="0" rIns="0" bIns="0" anchor="ctr">
             <a:spAutoFit/>
           </a:bodyPr>
           <a:lstStyle/>
@@ -20736,7 +21141,7 @@
           <a:noFill/>
         </p:spPr>
         <p:txBody>
-          <a:bodyPr wrap="square" anchor="t" lIns="0" rIns="0" tIns="0" bIns="0">
+          <a:bodyPr wrap="square" lIns="0" tIns="0" rIns="0" bIns="0" anchor="t">
             <a:spAutoFit/>
           </a:bodyPr>
           <a:lstStyle/>
@@ -20800,6 +21205,7 @@
           <a:lstStyle/>
           <a:p>
             <a:pPr algn="ctr"/>
+            <a:endParaRPr/>
           </a:p>
         </p:txBody>
       </p:sp>
@@ -20820,7 +21226,7 @@
           <a:noFill/>
         </p:spPr>
         <p:txBody>
-          <a:bodyPr wrap="square" anchor="ctr" lIns="0" rIns="0" tIns="0" bIns="0">
+          <a:bodyPr wrap="square" lIns="0" tIns="0" rIns="0" bIns="0" anchor="ctr">
             <a:spAutoFit/>
           </a:bodyPr>
           <a:lstStyle/>
@@ -20856,7 +21262,7 @@
           <a:noFill/>
         </p:spPr>
         <p:txBody>
-          <a:bodyPr wrap="square" anchor="t" lIns="0" rIns="0" tIns="0" bIns="0">
+          <a:bodyPr wrap="square" lIns="0" tIns="0" rIns="0" bIns="0" anchor="t">
             <a:spAutoFit/>
           </a:bodyPr>
           <a:lstStyle/>
@@ -21005,17 +21411,7 @@
                 <a:latin typeface="Malgun Gothic"/>
                 <a:ea typeface="맑은 고딕"/>
               </a:rPr>
-              <a:t>• </a:t>
-            </a:r>
-            <a:r>
-              <a:rPr sz="1000" b="0" i="0">
-                <a:solidFill>
-                  <a:srgbClr val="595959"/>
-                </a:solidFill>
-                <a:latin typeface="Malgun Gothic"/>
-                <a:ea typeface="맑은 고딕"/>
-              </a:rPr>
-              <a:t>필지 코드 인자로 부분 재처리 지원</a:t>
+              <a:t>• 필지 코드 인자로 부분 재처리 지원</a:t>
             </a:r>
           </a:p>
         </p:txBody>
@@ -21061,6 +21457,7 @@
           <a:lstStyle/>
           <a:p>
             <a:pPr algn="ctr"/>
+            <a:endParaRPr/>
           </a:p>
         </p:txBody>
       </p:sp>
@@ -21081,7 +21478,7 @@
           <a:noFill/>
         </p:spPr>
         <p:txBody>
-          <a:bodyPr wrap="square" anchor="ctr" lIns="0" rIns="0" tIns="0" bIns="0">
+          <a:bodyPr wrap="square" lIns="0" tIns="0" rIns="0" bIns="0" anchor="ctr">
             <a:spAutoFit/>
           </a:bodyPr>
           <a:lstStyle/>
@@ -21109,7 +21506,7 @@
 </file>
 
 <file path=ppt/slides/slide7.xml><?xml version="1.0" encoding="utf-8"?>
-<p:sld xmlns:a="http://schemas.openxmlformats.org/drawingml/2006/main" xmlns:p="http://schemas.openxmlformats.org/presentationml/2006/main" xmlns:r="http://schemas.openxmlformats.org/officeDocument/2006/relationships">
+<p:sld xmlns:a="http://schemas.openxmlformats.org/drawingml/2006/main" xmlns:r="http://schemas.openxmlformats.org/officeDocument/2006/relationships" xmlns:p="http://schemas.openxmlformats.org/presentationml/2006/main">
   <p:cSld>
     <p:bg>
       <p:bgPr>
@@ -21125,7 +21522,14 @@
         <p:cNvGrpSpPr/>
         <p:nvPr/>
       </p:nvGrpSpPr>
-      <p:grpSpPr/>
+      <p:grpSpPr>
+        <a:xfrm>
+          <a:off x="0" y="0"/>
+          <a:ext cx="0" cy="0"/>
+          <a:chOff x="0" y="0"/>
+          <a:chExt cx="0" cy="0"/>
+        </a:xfrm>
+      </p:grpSpPr>
       <p:sp>
         <p:nvSpPr>
           <p:cNvPr id="2" name="TextBox 1"/>
@@ -21143,7 +21547,7 @@
           <a:noFill/>
         </p:spPr>
         <p:txBody>
-          <a:bodyPr wrap="square" anchor="t" lIns="0" rIns="0" tIns="0" bIns="0">
+          <a:bodyPr wrap="square" lIns="0" tIns="0" rIns="0" bIns="0" anchor="t">
             <a:spAutoFit/>
           </a:bodyPr>
           <a:lstStyle/>
@@ -21203,6 +21607,7 @@
           <a:lstStyle/>
           <a:p>
             <a:pPr algn="ctr"/>
+            <a:endParaRPr/>
           </a:p>
         </p:txBody>
       </p:sp>
@@ -21223,7 +21628,7 @@
           <a:noFill/>
         </p:spPr>
         <p:txBody>
-          <a:bodyPr wrap="square" anchor="t" lIns="0" rIns="0" tIns="0" bIns="0">
+          <a:bodyPr wrap="square" lIns="0" tIns="0" rIns="0" bIns="0" anchor="t">
             <a:spAutoFit/>
           </a:bodyPr>
           <a:lstStyle/>
@@ -21255,7 +21660,7 @@
           <p:nvPr/>
         </p:nvPicPr>
         <p:blipFill>
-          <a:blip r:embed="rId2"/>
+          <a:blip r:embed="rId3"/>
           <a:stretch>
             <a:fillRect/>
           </a:stretch>
@@ -21287,7 +21692,7 @@
           <a:noFill/>
         </p:spPr>
         <p:txBody>
-          <a:bodyPr wrap="square" anchor="t" lIns="0" rIns="0" tIns="0" bIns="0">
+          <a:bodyPr wrap="square" lIns="0" tIns="0" rIns="0" bIns="0" anchor="t">
             <a:spAutoFit/>
           </a:bodyPr>
           <a:lstStyle/>
@@ -21347,6 +21752,7 @@
           <a:lstStyle/>
           <a:p>
             <a:pPr algn="ctr"/>
+            <a:endParaRPr/>
           </a:p>
         </p:txBody>
       </p:sp>
@@ -21359,7 +21765,7 @@
           <p:nvPr/>
         </p:nvPicPr>
         <p:blipFill>
-          <a:blip r:embed="rId3"/>
+          <a:blip r:embed="rId4"/>
           <a:stretch>
             <a:fillRect/>
           </a:stretch>
@@ -21391,7 +21797,7 @@
           <a:noFill/>
         </p:spPr>
         <p:txBody>
-          <a:bodyPr wrap="square" anchor="t" lIns="0" rIns="0" tIns="0" bIns="0">
+          <a:bodyPr wrap="square" lIns="0" tIns="0" rIns="0" bIns="0" anchor="t">
             <a:spAutoFit/>
           </a:bodyPr>
           <a:lstStyle/>
@@ -21451,6 +21857,7 @@
           <a:lstStyle/>
           <a:p>
             <a:pPr algn="ctr"/>
+            <a:endParaRPr/>
           </a:p>
         </p:txBody>
       </p:sp>
@@ -21471,7 +21878,7 @@
           <a:noFill/>
         </p:spPr>
         <p:txBody>
-          <a:bodyPr wrap="square" anchor="t" lIns="0" rIns="0" tIns="0" bIns="0">
+          <a:bodyPr wrap="square" lIns="0" tIns="0" rIns="0" bIns="0" anchor="t">
             <a:spAutoFit/>
           </a:bodyPr>
           <a:lstStyle/>
@@ -21507,7 +21914,7 @@
           <a:noFill/>
         </p:spPr>
         <p:txBody>
-          <a:bodyPr wrap="square" anchor="t" lIns="0" rIns="0" tIns="0" bIns="0">
+          <a:bodyPr wrap="square" lIns="0" tIns="0" rIns="0" bIns="0" anchor="t">
             <a:spAutoFit/>
           </a:bodyPr>
           <a:lstStyle/>
@@ -21543,7 +21950,7 @@
           <a:noFill/>
         </p:spPr>
         <p:txBody>
-          <a:bodyPr wrap="square" anchor="t" lIns="0" rIns="0" tIns="0" bIns="0">
+          <a:bodyPr wrap="square" lIns="0" tIns="0" rIns="0" bIns="0" anchor="t">
             <a:spAutoFit/>
           </a:bodyPr>
           <a:lstStyle/>
@@ -21607,6 +22014,7 @@
           <a:lstStyle/>
           <a:p>
             <a:pPr algn="ctr"/>
+            <a:endParaRPr/>
           </a:p>
         </p:txBody>
       </p:sp>
@@ -21627,7 +22035,7 @@
           <a:noFill/>
         </p:spPr>
         <p:txBody>
-          <a:bodyPr wrap="square" anchor="t" lIns="0" rIns="0" tIns="0" bIns="0">
+          <a:bodyPr wrap="square" lIns="0" tIns="0" rIns="0" bIns="0" anchor="t">
             <a:spAutoFit/>
           </a:bodyPr>
           <a:lstStyle/>
@@ -21663,7 +22071,7 @@
           <a:noFill/>
         </p:spPr>
         <p:txBody>
-          <a:bodyPr wrap="square" anchor="t" lIns="0" rIns="0" tIns="0" bIns="0">
+          <a:bodyPr wrap="square" lIns="0" tIns="0" rIns="0" bIns="0" anchor="t">
             <a:spAutoFit/>
           </a:bodyPr>
           <a:lstStyle/>
@@ -21699,7 +22107,7 @@
           <a:noFill/>
         </p:spPr>
         <p:txBody>
-          <a:bodyPr wrap="square" anchor="t" lIns="0" rIns="0" tIns="0" bIns="0">
+          <a:bodyPr wrap="square" lIns="0" tIns="0" rIns="0" bIns="0" anchor="t">
             <a:spAutoFit/>
           </a:bodyPr>
           <a:lstStyle/>
@@ -21763,6 +22171,7 @@
           <a:lstStyle/>
           <a:p>
             <a:pPr algn="ctr"/>
+            <a:endParaRPr/>
           </a:p>
         </p:txBody>
       </p:sp>
@@ -21783,7 +22192,7 @@
           <a:noFill/>
         </p:spPr>
         <p:txBody>
-          <a:bodyPr wrap="square" anchor="t" lIns="0" rIns="0" tIns="0" bIns="0">
+          <a:bodyPr wrap="square" lIns="0" tIns="0" rIns="0" bIns="0" anchor="t">
             <a:spAutoFit/>
           </a:bodyPr>
           <a:lstStyle/>
@@ -21819,7 +22228,7 @@
           <a:noFill/>
         </p:spPr>
         <p:txBody>
-          <a:bodyPr wrap="square" anchor="t" lIns="0" rIns="0" tIns="0" bIns="0">
+          <a:bodyPr wrap="square" lIns="0" tIns="0" rIns="0" bIns="0" anchor="t">
             <a:spAutoFit/>
           </a:bodyPr>
           <a:lstStyle/>
@@ -21855,7 +22264,7 @@
           <a:noFill/>
         </p:spPr>
         <p:txBody>
-          <a:bodyPr wrap="square" anchor="t" lIns="0" rIns="0" tIns="0" bIns="0">
+          <a:bodyPr wrap="square" lIns="0" tIns="0" rIns="0" bIns="0" anchor="t">
             <a:spAutoFit/>
           </a:bodyPr>
           <a:lstStyle/>
@@ -21887,7 +22296,7 @@
 </file>
 
 <file path=ppt/slides/slide8.xml><?xml version="1.0" encoding="utf-8"?>
-<p:sld xmlns:a="http://schemas.openxmlformats.org/drawingml/2006/main" xmlns:p="http://schemas.openxmlformats.org/presentationml/2006/main" xmlns:r="http://schemas.openxmlformats.org/officeDocument/2006/relationships">
+<p:sld xmlns:a="http://schemas.openxmlformats.org/drawingml/2006/main" xmlns:r="http://schemas.openxmlformats.org/officeDocument/2006/relationships" xmlns:p="http://schemas.openxmlformats.org/presentationml/2006/main">
   <p:cSld>
     <p:bg>
       <p:bgPr>
@@ -21903,7 +22312,14 @@
         <p:cNvGrpSpPr/>
         <p:nvPr/>
       </p:nvGrpSpPr>
-      <p:grpSpPr/>
+      <p:grpSpPr>
+        <a:xfrm>
+          <a:off x="0" y="0"/>
+          <a:ext cx="0" cy="0"/>
+          <a:chOff x="0" y="0"/>
+          <a:chExt cx="0" cy="0"/>
+        </a:xfrm>
+      </p:grpSpPr>
       <p:sp>
         <p:nvSpPr>
           <p:cNvPr id="2" name="TextBox 1"/>
@@ -21921,7 +22337,7 @@
           <a:noFill/>
         </p:spPr>
         <p:txBody>
-          <a:bodyPr wrap="square" anchor="t" lIns="0" rIns="0" tIns="0" bIns="0">
+          <a:bodyPr wrap="square" lIns="0" tIns="0" rIns="0" bIns="0" anchor="t">
             <a:spAutoFit/>
           </a:bodyPr>
           <a:lstStyle/>
@@ -21981,6 +22397,7 @@
           <a:lstStyle/>
           <a:p>
             <a:pPr algn="ctr"/>
+            <a:endParaRPr/>
           </a:p>
         </p:txBody>
       </p:sp>
@@ -22001,7 +22418,7 @@
           <a:noFill/>
         </p:spPr>
         <p:txBody>
-          <a:bodyPr wrap="square" anchor="t" lIns="0" rIns="0" tIns="0" bIns="0">
+          <a:bodyPr wrap="square" lIns="0" tIns="0" rIns="0" bIns="0" anchor="t">
             <a:spAutoFit/>
           </a:bodyPr>
           <a:lstStyle/>
@@ -22033,7 +22450,7 @@
           <p:nvPr/>
         </p:nvPicPr>
         <p:blipFill>
-          <a:blip r:embed="rId2"/>
+          <a:blip r:embed="rId3"/>
           <a:stretch>
             <a:fillRect/>
           </a:stretch>
@@ -22065,7 +22482,7 @@
           <a:noFill/>
         </p:spPr>
         <p:txBody>
-          <a:bodyPr wrap="square" anchor="t" lIns="0" rIns="0" tIns="0" bIns="0">
+          <a:bodyPr wrap="square" lIns="0" tIns="0" rIns="0" bIns="0" anchor="t">
             <a:spAutoFit/>
           </a:bodyPr>
           <a:lstStyle/>
@@ -22098,7 +22515,7 @@
         </p:xfrm>
         <a:graphic>
           <a:graphicData uri="http://schemas.openxmlformats.org/drawingml/2006/chart">
-            <c:chart xmlns:c="http://schemas.openxmlformats.org/drawingml/2006/chart" r:id="rId3"/>
+            <c:chart xmlns:c="http://schemas.openxmlformats.org/drawingml/2006/chart" xmlns:r="http://schemas.openxmlformats.org/officeDocument/2006/relationships" r:id="rId4"/>
           </a:graphicData>
         </a:graphic>
       </p:graphicFrame>
@@ -22143,6 +22560,7 @@
           <a:lstStyle/>
           <a:p>
             <a:pPr algn="ctr"/>
+            <a:endParaRPr/>
           </a:p>
         </p:txBody>
       </p:sp>
@@ -22163,7 +22581,7 @@
           <a:noFill/>
         </p:spPr>
         <p:txBody>
-          <a:bodyPr wrap="square" anchor="ctr" lIns="0" rIns="0" tIns="0" bIns="0">
+          <a:bodyPr wrap="square" lIns="0" tIns="0" rIns="0" bIns="0" anchor="ctr">
             <a:spAutoFit/>
           </a:bodyPr>
           <a:lstStyle/>
@@ -22199,7 +22617,7 @@
           <a:noFill/>
         </p:spPr>
         <p:txBody>
-          <a:bodyPr wrap="square" anchor="t" lIns="0" rIns="0" tIns="0" bIns="0">
+          <a:bodyPr wrap="square" lIns="0" tIns="0" rIns="0" bIns="0" anchor="t">
             <a:spAutoFit/>
           </a:bodyPr>
           <a:lstStyle/>
@@ -22363,6 +22781,7 @@
           <a:lstStyle/>
           <a:p>
             <a:pPr algn="ctr"/>
+            <a:endParaRPr/>
           </a:p>
         </p:txBody>
       </p:sp>
@@ -22383,7 +22802,7 @@
           <a:noFill/>
         </p:spPr>
         <p:txBody>
-          <a:bodyPr wrap="square" anchor="t" lIns="0" rIns="0" tIns="0" bIns="0">
+          <a:bodyPr wrap="square" lIns="0" tIns="0" rIns="0" bIns="0" anchor="t">
             <a:spAutoFit/>
           </a:bodyPr>
           <a:lstStyle/>
@@ -22418,8 +22837,11 @@
                 <a:latin typeface="Malgun Gothic"/>
                 <a:ea typeface="맑은 고딕"/>
               </a:rPr>
-              <a:t>• </a:t>
-            </a:r>
+              <a:t>• 토양수분 실측 대비 R² 0.87~0.90</a:t>
+            </a:r>
+          </a:p>
+          <a:p>
+            <a:pPr algn="l"/>
             <a:r>
               <a:rPr sz="1000" b="0" i="0">
                 <a:solidFill>
@@ -22428,30 +22850,7 @@
                 <a:latin typeface="Malgun Gothic"/>
                 <a:ea typeface="맑은 고딕"/>
               </a:rPr>
-              <a:t>토양수분 실측 대비 R² 0.87~0.90</a:t>
-            </a:r>
-          </a:p>
-          <a:p>
-            <a:pPr algn="l"/>
-            <a:r>
-              <a:rPr sz="1000" b="0" i="0">
-                <a:solidFill>
-                  <a:srgbClr val="000000"/>
-                </a:solidFill>
-                <a:latin typeface="Malgun Gothic"/>
-                <a:ea typeface="맑은 고딕"/>
-              </a:rPr>
-              <a:t>• </a:t>
-            </a:r>
-            <a:r>
-              <a:rPr sz="1000" b="0" i="0">
-                <a:solidFill>
-                  <a:srgbClr val="000000"/>
-                </a:solidFill>
-                <a:latin typeface="Malgun Gothic"/>
-                <a:ea typeface="맑은 고딕"/>
-              </a:rPr>
-              <a:t>가뭄등급 판별 정확도 92.6% 검증</a:t>
+              <a:t>• 가뭄등급 판별 정확도 92.6% 검증</a:t>
             </a:r>
           </a:p>
         </p:txBody>
@@ -22497,6 +22896,7 @@
           <a:lstStyle/>
           <a:p>
             <a:pPr algn="ctr"/>
+            <a:endParaRPr/>
           </a:p>
         </p:txBody>
       </p:sp>
@@ -22517,7 +22917,7 @@
           <a:noFill/>
         </p:spPr>
         <p:txBody>
-          <a:bodyPr wrap="square" anchor="ctr" lIns="0" rIns="0" tIns="0" bIns="0">
+          <a:bodyPr wrap="square" lIns="0" tIns="0" rIns="0" bIns="0" anchor="ctr">
             <a:spAutoFit/>
           </a:bodyPr>
           <a:lstStyle/>
@@ -22545,7 +22945,7 @@
 </file>
 
 <file path=ppt/slides/slide9.xml><?xml version="1.0" encoding="utf-8"?>
-<p:sld xmlns:a="http://schemas.openxmlformats.org/drawingml/2006/main" xmlns:p="http://schemas.openxmlformats.org/presentationml/2006/main" xmlns:r="http://schemas.openxmlformats.org/officeDocument/2006/relationships">
+<p:sld xmlns:a="http://schemas.openxmlformats.org/drawingml/2006/main" xmlns:r="http://schemas.openxmlformats.org/officeDocument/2006/relationships" xmlns:p="http://schemas.openxmlformats.org/presentationml/2006/main">
   <p:cSld>
     <p:bg>
       <p:bgPr>
@@ -22561,7 +22961,14 @@
         <p:cNvGrpSpPr/>
         <p:nvPr/>
       </p:nvGrpSpPr>
-      <p:grpSpPr/>
+      <p:grpSpPr>
+        <a:xfrm>
+          <a:off x="0" y="0"/>
+          <a:ext cx="0" cy="0"/>
+          <a:chOff x="0" y="0"/>
+          <a:chExt cx="0" cy="0"/>
+        </a:xfrm>
+      </p:grpSpPr>
       <p:sp>
         <p:nvSpPr>
           <p:cNvPr id="2" name="TextBox 1"/>
@@ -22579,7 +22986,7 @@
           <a:noFill/>
         </p:spPr>
         <p:txBody>
-          <a:bodyPr wrap="square" anchor="t" lIns="0" rIns="0" tIns="0" bIns="0">
+          <a:bodyPr wrap="square" lIns="0" tIns="0" rIns="0" bIns="0" anchor="t">
             <a:spAutoFit/>
           </a:bodyPr>
           <a:lstStyle/>
@@ -22639,6 +23046,7 @@
           <a:lstStyle/>
           <a:p>
             <a:pPr algn="ctr"/>
+            <a:endParaRPr/>
           </a:p>
         </p:txBody>
       </p:sp>
@@ -22659,7 +23067,7 @@
           <a:noFill/>
         </p:spPr>
         <p:txBody>
-          <a:bodyPr wrap="square" anchor="t" lIns="0" rIns="0" tIns="0" bIns="0">
+          <a:bodyPr wrap="square" lIns="0" tIns="0" rIns="0" bIns="0" anchor="t">
             <a:spAutoFit/>
           </a:bodyPr>
           <a:lstStyle/>
@@ -22691,7 +23099,7 @@
           <p:nvPr/>
         </p:nvPicPr>
         <p:blipFill>
-          <a:blip r:embed="rId2"/>
+          <a:blip r:embed="rId3"/>
           <a:stretch>
             <a:fillRect/>
           </a:stretch>
@@ -22723,7 +23131,7 @@
           <a:noFill/>
         </p:spPr>
         <p:txBody>
-          <a:bodyPr wrap="square" anchor="t" lIns="0" rIns="0" tIns="0" bIns="0">
+          <a:bodyPr wrap="square" lIns="0" tIns="0" rIns="0" bIns="0" anchor="t">
             <a:spAutoFit/>
           </a:bodyPr>
           <a:lstStyle/>
@@ -22783,6 +23191,7 @@
           <a:lstStyle/>
           <a:p>
             <a:pPr algn="ctr"/>
+            <a:endParaRPr/>
           </a:p>
         </p:txBody>
       </p:sp>
@@ -22827,6 +23236,7 @@
           <a:lstStyle/>
           <a:p>
             <a:pPr algn="ctr"/>
+            <a:endParaRPr/>
           </a:p>
         </p:txBody>
       </p:sp>
@@ -22847,7 +23257,7 @@
           <a:noFill/>
         </p:spPr>
         <p:txBody>
-          <a:bodyPr wrap="square" anchor="ctr" lIns="0" rIns="0" tIns="0" bIns="0">
+          <a:bodyPr wrap="square" lIns="0" tIns="0" rIns="0" bIns="0" anchor="ctr">
             <a:spAutoFit/>
           </a:bodyPr>
           <a:lstStyle/>
@@ -22883,7 +23293,7 @@
           <a:noFill/>
         </p:spPr>
         <p:txBody>
-          <a:bodyPr wrap="square" anchor="t" lIns="0" rIns="0" tIns="0" bIns="0">
+          <a:bodyPr wrap="square" lIns="0" tIns="0" rIns="0" bIns="0" anchor="t">
             <a:spAutoFit/>
           </a:bodyPr>
           <a:lstStyle/>
@@ -22919,7 +23329,7 @@
           <a:noFill/>
         </p:spPr>
         <p:txBody>
-          <a:bodyPr wrap="square" anchor="t" lIns="0" rIns="0" tIns="0" bIns="0">
+          <a:bodyPr wrap="square" lIns="0" tIns="0" rIns="0" bIns="0" anchor="t">
             <a:spAutoFit/>
           </a:bodyPr>
           <a:lstStyle/>
@@ -23023,6 +23433,7 @@
           <a:lstStyle/>
           <a:p>
             <a:pPr algn="ctr"/>
+            <a:endParaRPr/>
           </a:p>
         </p:txBody>
       </p:sp>
@@ -23067,6 +23478,7 @@
           <a:lstStyle/>
           <a:p>
             <a:pPr algn="ctr"/>
+            <a:endParaRPr/>
           </a:p>
         </p:txBody>
       </p:sp>
@@ -23087,7 +23499,7 @@
           <a:noFill/>
         </p:spPr>
         <p:txBody>
-          <a:bodyPr wrap="square" anchor="ctr" lIns="0" rIns="0" tIns="0" bIns="0">
+          <a:bodyPr wrap="square" lIns="0" tIns="0" rIns="0" bIns="0" anchor="ctr">
             <a:spAutoFit/>
           </a:bodyPr>
           <a:lstStyle/>
@@ -23123,7 +23535,7 @@
           <a:noFill/>
         </p:spPr>
         <p:txBody>
-          <a:bodyPr wrap="square" anchor="t" lIns="0" rIns="0" tIns="0" bIns="0">
+          <a:bodyPr wrap="square" lIns="0" tIns="0" rIns="0" bIns="0" anchor="t">
             <a:spAutoFit/>
           </a:bodyPr>
           <a:lstStyle/>
@@ -23159,7 +23571,7 @@
           <a:noFill/>
         </p:spPr>
         <p:txBody>
-          <a:bodyPr wrap="square" anchor="t" lIns="0" rIns="0" tIns="0" bIns="0">
+          <a:bodyPr wrap="square" lIns="0" tIns="0" rIns="0" bIns="0" anchor="t">
             <a:spAutoFit/>
           </a:bodyPr>
           <a:lstStyle/>
@@ -23263,6 +23675,7 @@
           <a:lstStyle/>
           <a:p>
             <a:pPr algn="ctr"/>
+            <a:endParaRPr/>
           </a:p>
         </p:txBody>
       </p:sp>
@@ -23283,7 +23696,7 @@
           <a:noFill/>
         </p:spPr>
         <p:txBody>
-          <a:bodyPr wrap="square" anchor="t" lIns="0" rIns="0" tIns="0" bIns="0">
+          <a:bodyPr wrap="square" lIns="0" tIns="0" rIns="0" bIns="0" anchor="t">
             <a:spAutoFit/>
           </a:bodyPr>
           <a:lstStyle/>
@@ -23332,7 +23745,7 @@
           <a:noFill/>
         </p:spPr>
         <p:txBody>
-          <a:bodyPr wrap="square" anchor="t" lIns="0" rIns="0" tIns="0" bIns="0">
+          <a:bodyPr wrap="square" lIns="0" tIns="0" rIns="0" bIns="0" anchor="t">
             <a:spAutoFit/>
           </a:bodyPr>
           <a:lstStyle/>
@@ -23754,7 +24167,7 @@
 </file>
 
 <file path=ppt/theme/theme2.xml><?xml version="1.0" encoding="utf-8"?>
-<a:theme xmlns:a="http://schemas.openxmlformats.org/drawingml/2006/main" name="Office Theme">
+<a:theme xmlns:a="http://schemas.openxmlformats.org/drawingml/2006/main" name="Office 테마">
   <a:themeElements>
     <a:clrScheme name="Office">
       <a:dk1>
@@ -23764,44 +24177,44 @@
         <a:sysClr val="window" lastClr="FFFFFF"/>
       </a:lt1>
       <a:dk2>
-        <a:srgbClr val="1F497D"/>
+        <a:srgbClr val="0E2841"/>
       </a:dk2>
       <a:lt2>
-        <a:srgbClr val="EEECE1"/>
+        <a:srgbClr val="E8E8E8"/>
       </a:lt2>
       <a:accent1>
-        <a:srgbClr val="4F81BD"/>
+        <a:srgbClr val="156082"/>
       </a:accent1>
       <a:accent2>
-        <a:srgbClr val="C0504D"/>
+        <a:srgbClr val="E97132"/>
       </a:accent2>
       <a:accent3>
-        <a:srgbClr val="9BBB59"/>
+        <a:srgbClr val="196B24"/>
       </a:accent3>
       <a:accent4>
-        <a:srgbClr val="8064A2"/>
+        <a:srgbClr val="0F9ED5"/>
       </a:accent4>
       <a:accent5>
-        <a:srgbClr val="4BACC6"/>
+        <a:srgbClr val="A02B93"/>
       </a:accent5>
       <a:accent6>
-        <a:srgbClr val="F79646"/>
+        <a:srgbClr val="4EA72E"/>
       </a:accent6>
       <a:hlink>
-        <a:srgbClr val="0000FF"/>
+        <a:srgbClr val="467886"/>
       </a:hlink>
       <a:folHlink>
-        <a:srgbClr val="800080"/>
+        <a:srgbClr val="96607D"/>
       </a:folHlink>
     </a:clrScheme>
     <a:fontScheme name="Office">
       <a:majorFont>
-        <a:latin typeface="Calibri"/>
+        <a:latin typeface="맑은 고딕" panose="02110004020202020204"/>
         <a:ea typeface=""/>
         <a:cs typeface=""/>
-        <a:font script="Jpan" typeface="ＭＳ Ｐゴシック"/>
+        <a:font script="Jpan" typeface="游ゴシック Light"/>
         <a:font script="Hang" typeface="맑은 고딕"/>
-        <a:font script="Hans" typeface="宋体"/>
+        <a:font script="Hans" typeface="等线 Light"/>
         <a:font script="Hant" typeface="新細明體"/>
         <a:font script="Arab" typeface="Times New Roman"/>
         <a:font script="Hebr" typeface="Times New Roman"/>
@@ -23829,14 +24242,31 @@
         <a:font script="Viet" typeface="Times New Roman"/>
         <a:font script="Uigh" typeface="Microsoft Uighur"/>
         <a:font script="Geor" typeface="Sylfaen"/>
+        <a:font script="Armn" typeface="Arial"/>
+        <a:font script="Bugi" typeface="Leelawadee UI"/>
+        <a:font script="Bopo" typeface="Microsoft JhengHei"/>
+        <a:font script="Java" typeface="Javanese Text"/>
+        <a:font script="Lisu" typeface="Segoe UI"/>
+        <a:font script="Mymr" typeface="Myanmar Text"/>
+        <a:font script="Nkoo" typeface="Ebrima"/>
+        <a:font script="Olck" typeface="Nirmala UI"/>
+        <a:font script="Osma" typeface="Ebrima"/>
+        <a:font script="Phag" typeface="Phagspa"/>
+        <a:font script="Syrn" typeface="Estrangelo Edessa"/>
+        <a:font script="Syrj" typeface="Estrangelo Edessa"/>
+        <a:font script="Syre" typeface="Estrangelo Edessa"/>
+        <a:font script="Sora" typeface="Nirmala UI"/>
+        <a:font script="Tale" typeface="Microsoft Tai Le"/>
+        <a:font script="Talu" typeface="Microsoft New Tai Lue"/>
+        <a:font script="Tfng" typeface="Ebrima"/>
       </a:majorFont>
       <a:minorFont>
-        <a:latin typeface="Calibri"/>
+        <a:latin typeface="맑은 고딕" panose="02110004020202020204"/>
         <a:ea typeface=""/>
         <a:cs typeface=""/>
-        <a:font script="Jpan" typeface="ＭＳ Ｐゴシック"/>
+        <a:font script="Jpan" typeface="游ゴシック"/>
         <a:font script="Hang" typeface="맑은 고딕"/>
-        <a:font script="Hans" typeface="宋体"/>
+        <a:font script="Hans" typeface="等线"/>
         <a:font script="Hant" typeface="新細明體"/>
         <a:font script="Arab" typeface="Arial"/>
         <a:font script="Hebr" typeface="Arial"/>
@@ -23864,6 +24294,23 @@
         <a:font script="Viet" typeface="Arial"/>
         <a:font script="Uigh" typeface="Microsoft Uighur"/>
         <a:font script="Geor" typeface="Sylfaen"/>
+        <a:font script="Armn" typeface="Arial"/>
+        <a:font script="Bugi" typeface="Leelawadee UI"/>
+        <a:font script="Bopo" typeface="Microsoft JhengHei"/>
+        <a:font script="Java" typeface="Javanese Text"/>
+        <a:font script="Lisu" typeface="Segoe UI"/>
+        <a:font script="Mymr" typeface="Myanmar Text"/>
+        <a:font script="Nkoo" typeface="Ebrima"/>
+        <a:font script="Olck" typeface="Nirmala UI"/>
+        <a:font script="Osma" typeface="Ebrima"/>
+        <a:font script="Phag" typeface="Phagspa"/>
+        <a:font script="Syrn" typeface="Estrangelo Edessa"/>
+        <a:font script="Syrj" typeface="Estrangelo Edessa"/>
+        <a:font script="Syre" typeface="Estrangelo Edessa"/>
+        <a:font script="Sora" typeface="Nirmala UI"/>
+        <a:font script="Tale" typeface="Microsoft Tai Le"/>
+        <a:font script="Talu" typeface="Microsoft New Tai Lue"/>
+        <a:font script="Tfng" typeface="Ebrima"/>
       </a:minorFont>
     </a:fontScheme>
     <a:fmtScheme name="Office">
@@ -23875,180 +24322,136 @@
           <a:gsLst>
             <a:gs pos="0">
               <a:schemeClr val="phClr">
-                <a:tint val="50000"/>
-                <a:satMod val="300000"/>
+                <a:lumMod val="110000"/>
+                <a:satMod val="105000"/>
+                <a:tint val="67000"/>
               </a:schemeClr>
             </a:gs>
-            <a:gs pos="35000">
+            <a:gs pos="50000">
               <a:schemeClr val="phClr">
-                <a:tint val="37000"/>
-                <a:satMod val="300000"/>
+                <a:lumMod val="105000"/>
+                <a:satMod val="103000"/>
+                <a:tint val="73000"/>
               </a:schemeClr>
             </a:gs>
             <a:gs pos="100000">
               <a:schemeClr val="phClr">
-                <a:tint val="15000"/>
-                <a:satMod val="350000"/>
+                <a:lumMod val="105000"/>
+                <a:satMod val="109000"/>
+                <a:tint val="81000"/>
               </a:schemeClr>
             </a:gs>
           </a:gsLst>
-          <a:lin ang="16200000" scaled="1"/>
+          <a:lin ang="5400000" scaled="0"/>
         </a:gradFill>
         <a:gradFill rotWithShape="1">
           <a:gsLst>
             <a:gs pos="0">
               <a:schemeClr val="phClr">
-                <a:tint val="100000"/>
+                <a:satMod val="103000"/>
+                <a:lumMod val="102000"/>
+                <a:tint val="94000"/>
+              </a:schemeClr>
+            </a:gs>
+            <a:gs pos="50000">
+              <a:schemeClr val="phClr">
+                <a:satMod val="110000"/>
+                <a:lumMod val="100000"/>
                 <a:shade val="100000"/>
-                <a:satMod val="130000"/>
               </a:schemeClr>
             </a:gs>
             <a:gs pos="100000">
               <a:schemeClr val="phClr">
-                <a:tint val="50000"/>
-                <a:shade val="100000"/>
-                <a:satMod val="350000"/>
+                <a:lumMod val="99000"/>
+                <a:satMod val="120000"/>
+                <a:shade val="78000"/>
               </a:schemeClr>
             </a:gs>
           </a:gsLst>
-          <a:lin ang="16200000" scaled="0"/>
+          <a:lin ang="5400000" scaled="0"/>
         </a:gradFill>
       </a:fillStyleLst>
       <a:lnStyleLst>
-        <a:ln w="9525" cap="flat" cmpd="sng" algn="ctr">
+        <a:ln w="12700" cap="flat" cmpd="sng" algn="ctr">
           <a:solidFill>
-            <a:schemeClr val="phClr">
-              <a:shade val="95000"/>
-              <a:satMod val="105000"/>
-            </a:schemeClr>
+            <a:schemeClr val="phClr"/>
           </a:solidFill>
           <a:prstDash val="solid"/>
+          <a:miter lim="800000"/>
+        </a:ln>
+        <a:ln w="19050" cap="flat" cmpd="sng" algn="ctr">
+          <a:solidFill>
+            <a:schemeClr val="phClr"/>
+          </a:solidFill>
+          <a:prstDash val="solid"/>
+          <a:miter lim="800000"/>
         </a:ln>
         <a:ln w="25400" cap="flat" cmpd="sng" algn="ctr">
           <a:solidFill>
             <a:schemeClr val="phClr"/>
           </a:solidFill>
           <a:prstDash val="solid"/>
-        </a:ln>
-        <a:ln w="38100" cap="flat" cmpd="sng" algn="ctr">
-          <a:solidFill>
-            <a:schemeClr val="phClr"/>
-          </a:solidFill>
-          <a:prstDash val="solid"/>
+          <a:miter lim="800000"/>
         </a:ln>
       </a:lnStyleLst>
       <a:effectStyleLst>
         <a:effectStyle>
+          <a:effectLst/>
+        </a:effectStyle>
+        <a:effectStyle>
+          <a:effectLst/>
+        </a:effectStyle>
+        <a:effectStyle>
           <a:effectLst>
-            <a:outerShdw blurRad="40000" dist="20000" dir="5400000" rotWithShape="0">
+            <a:outerShdw blurRad="57150" dist="19050" dir="5400000" algn="ctr" rotWithShape="0">
               <a:srgbClr val="000000">
-                <a:alpha val="38000"/>
+                <a:alpha val="63000"/>
               </a:srgbClr>
             </a:outerShdw>
           </a:effectLst>
-        </a:effectStyle>
-        <a:effectStyle>
-          <a:effectLst>
-            <a:outerShdw blurRad="40000" dist="23000" dir="5400000" rotWithShape="0">
-              <a:srgbClr val="000000">
-                <a:alpha val="35000"/>
-              </a:srgbClr>
-            </a:outerShdw>
-          </a:effectLst>
-        </a:effectStyle>
-        <a:effectStyle>
-          <a:effectLst>
-            <a:outerShdw blurRad="40000" dist="23000" dir="5400000" rotWithShape="0">
-              <a:srgbClr val="000000">
-                <a:alpha val="35000"/>
-              </a:srgbClr>
-            </a:outerShdw>
-          </a:effectLst>
-          <a:scene3d>
-            <a:camera prst="orthographicFront">
-              <a:rot lat="0" lon="0" rev="0"/>
-            </a:camera>
-            <a:lightRig rig="threePt" dir="t">
-              <a:rot lat="0" lon="0" rev="1200000"/>
-            </a:lightRig>
-          </a:scene3d>
-          <a:sp3d>
-            <a:bevelT w="63500" h="25400"/>
-          </a:sp3d>
         </a:effectStyle>
       </a:effectStyleLst>
       <a:bgFillStyleLst>
         <a:solidFill>
           <a:schemeClr val="phClr"/>
         </a:solidFill>
+        <a:solidFill>
+          <a:schemeClr val="phClr">
+            <a:tint val="95000"/>
+            <a:satMod val="170000"/>
+          </a:schemeClr>
+        </a:solidFill>
         <a:gradFill rotWithShape="1">
           <a:gsLst>
             <a:gs pos="0">
               <a:schemeClr val="phClr">
-                <a:tint val="40000"/>
-                <a:satMod val="350000"/>
+                <a:tint val="93000"/>
+                <a:satMod val="150000"/>
+                <a:shade val="98000"/>
+                <a:lumMod val="102000"/>
               </a:schemeClr>
             </a:gs>
-            <a:gs pos="40000">
+            <a:gs pos="50000">
               <a:schemeClr val="phClr">
-                <a:tint val="45000"/>
-                <a:shade val="99000"/>
-                <a:satMod val="350000"/>
+                <a:tint val="98000"/>
+                <a:satMod val="130000"/>
+                <a:shade val="90000"/>
+                <a:lumMod val="103000"/>
               </a:schemeClr>
             </a:gs>
             <a:gs pos="100000">
               <a:schemeClr val="phClr">
-                <a:shade val="20000"/>
-                <a:satMod val="255000"/>
+                <a:shade val="63000"/>
+                <a:satMod val="120000"/>
               </a:schemeClr>
             </a:gs>
           </a:gsLst>
-          <a:path path="circle">
-            <a:fillToRect l="50000" t="-80000" r="50000" b="180000"/>
-          </a:path>
-        </a:gradFill>
-        <a:gradFill rotWithShape="1">
-          <a:gsLst>
-            <a:gs pos="0">
-              <a:schemeClr val="phClr">
-                <a:tint val="80000"/>
-                <a:satMod val="300000"/>
-              </a:schemeClr>
-            </a:gs>
-            <a:gs pos="100000">
-              <a:schemeClr val="phClr">
-                <a:shade val="30000"/>
-                <a:satMod val="200000"/>
-              </a:schemeClr>
-            </a:gs>
-          </a:gsLst>
-          <a:path path="circle">
-            <a:fillToRect l="50000" t="50000" r="50000" b="50000"/>
-          </a:path>
+          <a:lin ang="5400000" scaled="0"/>
         </a:gradFill>
       </a:bgFillStyleLst>
     </a:fmtScheme>
   </a:themeElements>
   <a:objectDefaults>
-    <a:spDef>
-      <a:spPr/>
-      <a:bodyPr/>
-      <a:lstStyle/>
-      <a:style>
-        <a:lnRef idx="1">
-          <a:schemeClr val="accent1"/>
-        </a:lnRef>
-        <a:fillRef idx="3">
-          <a:schemeClr val="accent1"/>
-        </a:fillRef>
-        <a:effectRef idx="2">
-          <a:schemeClr val="accent1"/>
-        </a:effectRef>
-        <a:fontRef idx="minor">
-          <a:schemeClr val="lt1"/>
-        </a:fontRef>
-      </a:style>
-    </a:spDef>
     <a:lnDef>
       <a:spPr/>
       <a:bodyPr/>
@@ -24070,5 +24473,10 @@
     </a:lnDef>
   </a:objectDefaults>
   <a:extraClrSchemeLst/>
+  <a:extLst>
+    <a:ext uri="{05A4C25C-085E-4340-85A3-A5531E510DB2}">
+      <thm15:themeFamily xmlns:thm15="http://schemas.microsoft.com/office/thememl/2012/main" name="Office Theme" id="{2E142A2C-CD16-42D6-873A-C26D2A0506FA}" vid="{1BDDFF52-6CD6-40A5-AB3C-68EB2F1E4D0A}"/>
+    </a:ext>
+  </a:extLst>
 </a:theme>
 </file>